--- a/docs/phase1/02-as-is-to-be/Theia-AS-IS_and_TO-BE_v2.0 (1).pptx
+++ b/docs/phase1/02-as-is-to-be/Theia-AS-IS_and_TO-BE_v2.0 (1).pptx
@@ -10,9 +10,8 @@
     <p:sldId id="286" r:id="rId4"/>
     <p:sldId id="287" r:id="rId5"/>
     <p:sldId id="288" r:id="rId6"/>
-    <p:sldId id="285" r:id="rId7"/>
-    <p:sldId id="283" r:id="rId8"/>
-    <p:sldId id="282" r:id="rId9"/>
+    <p:sldId id="289" r:id="rId7"/>
+    <p:sldId id="290" r:id="rId8"/>
   </p:sldIdLst>
   <p:sldSz cx="12192000" cy="6858000"/>
   <p:notesSz cx="6858000" cy="9144000"/>
@@ -340,7 +339,7 @@
           <a:p>
             <a:fld id="{B19FC151-C95F-4B97-8B73-E5BFB448A7CA}" type="datetimeFigureOut">
               <a:rPr lang="en-US" smtClean="0"/>
-              <a:t>10/4/2026</a:t>
+              <a:t>10/11/2026</a:t>
             </a:fld>
             <a:endParaRPr lang="en-US"/>
           </a:p>
@@ -538,7 +537,7 @@
           <a:p>
             <a:fld id="{B19FC151-C95F-4B97-8B73-E5BFB448A7CA}" type="datetimeFigureOut">
               <a:rPr lang="en-US" smtClean="0"/>
-              <a:t>10/4/2026</a:t>
+              <a:t>10/11/2026</a:t>
             </a:fld>
             <a:endParaRPr lang="en-US"/>
           </a:p>
@@ -746,7 +745,7 @@
           <a:p>
             <a:fld id="{B19FC151-C95F-4B97-8B73-E5BFB448A7CA}" type="datetimeFigureOut">
               <a:rPr lang="en-US" smtClean="0"/>
-              <a:t>10/4/2026</a:t>
+              <a:t>10/11/2026</a:t>
             </a:fld>
             <a:endParaRPr lang="en-US"/>
           </a:p>
@@ -944,7 +943,7 @@
           <a:p>
             <a:fld id="{B19FC151-C95F-4B97-8B73-E5BFB448A7CA}" type="datetimeFigureOut">
               <a:rPr lang="en-US" smtClean="0"/>
-              <a:t>10/4/2026</a:t>
+              <a:t>10/11/2026</a:t>
             </a:fld>
             <a:endParaRPr lang="en-US"/>
           </a:p>
@@ -1219,7 +1218,7 @@
           <a:p>
             <a:fld id="{B19FC151-C95F-4B97-8B73-E5BFB448A7CA}" type="datetimeFigureOut">
               <a:rPr lang="en-US" smtClean="0"/>
-              <a:t>10/4/2026</a:t>
+              <a:t>10/11/2026</a:t>
             </a:fld>
             <a:endParaRPr lang="en-US"/>
           </a:p>
@@ -1484,7 +1483,7 @@
           <a:p>
             <a:fld id="{B19FC151-C95F-4B97-8B73-E5BFB448A7CA}" type="datetimeFigureOut">
               <a:rPr lang="en-US" smtClean="0"/>
-              <a:t>10/4/2026</a:t>
+              <a:t>10/11/2026</a:t>
             </a:fld>
             <a:endParaRPr lang="en-US"/>
           </a:p>
@@ -1896,7 +1895,7 @@
           <a:p>
             <a:fld id="{B19FC151-C95F-4B97-8B73-E5BFB448A7CA}" type="datetimeFigureOut">
               <a:rPr lang="en-US" smtClean="0"/>
-              <a:t>10/4/2026</a:t>
+              <a:t>10/11/2026</a:t>
             </a:fld>
             <a:endParaRPr lang="en-US"/>
           </a:p>
@@ -2037,7 +2036,7 @@
           <a:p>
             <a:fld id="{B19FC151-C95F-4B97-8B73-E5BFB448A7CA}" type="datetimeFigureOut">
               <a:rPr lang="en-US" smtClean="0"/>
-              <a:t>10/4/2026</a:t>
+              <a:t>10/11/2026</a:t>
             </a:fld>
             <a:endParaRPr lang="en-US"/>
           </a:p>
@@ -2150,7 +2149,7 @@
           <a:p>
             <a:fld id="{B19FC151-C95F-4B97-8B73-E5BFB448A7CA}" type="datetimeFigureOut">
               <a:rPr lang="en-US" smtClean="0"/>
-              <a:t>10/4/2026</a:t>
+              <a:t>10/11/2026</a:t>
             </a:fld>
             <a:endParaRPr lang="en-US"/>
           </a:p>
@@ -2461,7 +2460,7 @@
           <a:p>
             <a:fld id="{B19FC151-C95F-4B97-8B73-E5BFB448A7CA}" type="datetimeFigureOut">
               <a:rPr lang="en-US" smtClean="0"/>
-              <a:t>10/4/2026</a:t>
+              <a:t>10/11/2026</a:t>
             </a:fld>
             <a:endParaRPr lang="en-US"/>
           </a:p>
@@ -2749,7 +2748,7 @@
           <a:p>
             <a:fld id="{B19FC151-C95F-4B97-8B73-E5BFB448A7CA}" type="datetimeFigureOut">
               <a:rPr lang="en-US" smtClean="0"/>
-              <a:t>10/4/2026</a:t>
+              <a:t>10/11/2026</a:t>
             </a:fld>
             <a:endParaRPr lang="en-US"/>
           </a:p>
@@ -2990,7 +2989,7 @@
           <a:p>
             <a:fld id="{B19FC151-C95F-4B97-8B73-E5BFB448A7CA}" type="datetimeFigureOut">
               <a:rPr lang="en-US" smtClean="0"/>
-              <a:t>10/4/2026</a:t>
+              <a:t>10/11/2026</a:t>
             </a:fld>
             <a:endParaRPr lang="en-US"/>
           </a:p>
@@ -3511,18 +3510,13 @@
           <a:p>
             <a:pPr algn="l"/>
             <a:r>
-              <a:rPr lang="en-US" sz="8000">
+              <a:rPr lang="en-US" sz="8000" dirty="0">
                 <a:solidFill>
                   <a:schemeClr val="bg1"/>
                 </a:solidFill>
               </a:rPr>
               <a:t>Phase I System Presentation</a:t>
             </a:r>
-            <a:endParaRPr lang="en-US" sz="8000" dirty="0">
-              <a:solidFill>
-                <a:schemeClr val="bg1"/>
-              </a:solidFill>
-            </a:endParaRPr>
           </a:p>
         </p:txBody>
       </p:sp>
@@ -3621,10 +3615,9 @@
           <a:p>
             <a:pPr algn="l"/>
             <a:r>
-              <a:rPr lang="en-US" sz="3200"/>
+              <a:rPr lang="en-US" sz="3200" dirty="0"/>
               <a:t>Team EV</a:t>
             </a:r>
-            <a:endParaRPr lang="en-US" sz="3200" dirty="0"/>
           </a:p>
         </p:txBody>
       </p:sp>
@@ -4055,6 +4048,476 @@
   <p:clrMapOvr>
     <a:masterClrMapping/>
   </p:clrMapOvr>
+  <p:timing>
+    <p:tnLst>
+      <p:par>
+        <p:cTn id="1" dur="indefinite" restart="never" nodeType="tmRoot">
+          <p:childTnLst>
+            <p:seq concurrent="1" nextAc="seek">
+              <p:cTn id="2" dur="indefinite" nodeType="mainSeq">
+                <p:childTnLst>
+                  <p:par>
+                    <p:cTn id="3" fill="hold">
+                      <p:stCondLst>
+                        <p:cond delay="indefinite"/>
+                      </p:stCondLst>
+                      <p:childTnLst>
+                        <p:par>
+                          <p:cTn id="4" fill="hold">
+                            <p:stCondLst>
+                              <p:cond delay="0"/>
+                            </p:stCondLst>
+                            <p:childTnLst>
+                              <p:par>
+                                <p:cTn id="5" presetID="10" presetClass="entr" presetSubtype="0" fill="hold" grpId="0" nodeType="clickEffect">
+                                  <p:stCondLst>
+                                    <p:cond delay="500"/>
+                                  </p:stCondLst>
+                                  <p:childTnLst>
+                                    <p:set>
+                                      <p:cBhvr>
+                                        <p:cTn id="6" dur="1" fill="hold">
+                                          <p:stCondLst>
+                                            <p:cond delay="0"/>
+                                          </p:stCondLst>
+                                        </p:cTn>
+                                        <p:tgtEl>
+                                          <p:spTgt spid="2"/>
+                                        </p:tgtEl>
+                                        <p:attrNameLst>
+                                          <p:attrName>style.visibility</p:attrName>
+                                        </p:attrNameLst>
+                                      </p:cBhvr>
+                                      <p:to>
+                                        <p:strVal val="visible"/>
+                                      </p:to>
+                                    </p:set>
+                                    <p:animEffect transition="in" filter="fade">
+                                      <p:cBhvr>
+                                        <p:cTn id="7" dur="400"/>
+                                        <p:tgtEl>
+                                          <p:spTgt spid="2"/>
+                                        </p:tgtEl>
+                                      </p:cBhvr>
+                                    </p:animEffect>
+                                  </p:childTnLst>
+                                </p:cTn>
+                              </p:par>
+                            </p:childTnLst>
+                          </p:cTn>
+                        </p:par>
+                      </p:childTnLst>
+                    </p:cTn>
+                  </p:par>
+                  <p:par>
+                    <p:cTn id="8" fill="hold">
+                      <p:stCondLst>
+                        <p:cond delay="indefinite"/>
+                      </p:stCondLst>
+                      <p:childTnLst>
+                        <p:par>
+                          <p:cTn id="9" fill="hold">
+                            <p:stCondLst>
+                              <p:cond delay="0"/>
+                            </p:stCondLst>
+                            <p:childTnLst>
+                              <p:par>
+                                <p:cTn id="10" presetID="10" presetClass="entr" presetSubtype="0" fill="hold" grpId="0" nodeType="clickEffect">
+                                  <p:stCondLst>
+                                    <p:cond delay="500"/>
+                                  </p:stCondLst>
+                                  <p:childTnLst>
+                                    <p:set>
+                                      <p:cBhvr>
+                                        <p:cTn id="11" dur="1" fill="hold">
+                                          <p:stCondLst>
+                                            <p:cond delay="0"/>
+                                          </p:stCondLst>
+                                        </p:cTn>
+                                        <p:tgtEl>
+                                          <p:spTgt spid="3">
+                                            <p:txEl>
+                                              <p:pRg st="0" end="0"/>
+                                            </p:txEl>
+                                          </p:spTgt>
+                                        </p:tgtEl>
+                                        <p:attrNameLst>
+                                          <p:attrName>style.visibility</p:attrName>
+                                        </p:attrNameLst>
+                                      </p:cBhvr>
+                                      <p:to>
+                                        <p:strVal val="visible"/>
+                                      </p:to>
+                                    </p:set>
+                                    <p:animEffect transition="in" filter="fade">
+                                      <p:cBhvr>
+                                        <p:cTn id="12" dur="400"/>
+                                        <p:tgtEl>
+                                          <p:spTgt spid="3">
+                                            <p:txEl>
+                                              <p:pRg st="0" end="0"/>
+                                            </p:txEl>
+                                          </p:spTgt>
+                                        </p:tgtEl>
+                                      </p:cBhvr>
+                                    </p:animEffect>
+                                  </p:childTnLst>
+                                </p:cTn>
+                              </p:par>
+                              <p:par>
+                                <p:cTn id="13" presetID="10" presetClass="entr" presetSubtype="0" fill="hold" grpId="0" nodeType="withEffect">
+                                  <p:stCondLst>
+                                    <p:cond delay="2000"/>
+                                  </p:stCondLst>
+                                  <p:childTnLst>
+                                    <p:set>
+                                      <p:cBhvr>
+                                        <p:cTn id="14" dur="1" fill="hold">
+                                          <p:stCondLst>
+                                            <p:cond delay="0"/>
+                                          </p:stCondLst>
+                                        </p:cTn>
+                                        <p:tgtEl>
+                                          <p:spTgt spid="4">
+                                            <p:txEl>
+                                              <p:pRg st="0" end="0"/>
+                                            </p:txEl>
+                                          </p:spTgt>
+                                        </p:tgtEl>
+                                        <p:attrNameLst>
+                                          <p:attrName>style.visibility</p:attrName>
+                                        </p:attrNameLst>
+                                      </p:cBhvr>
+                                      <p:to>
+                                        <p:strVal val="visible"/>
+                                      </p:to>
+                                    </p:set>
+                                    <p:animEffect transition="in" filter="fade">
+                                      <p:cBhvr>
+                                        <p:cTn id="15" dur="400"/>
+                                        <p:tgtEl>
+                                          <p:spTgt spid="4">
+                                            <p:txEl>
+                                              <p:pRg st="0" end="0"/>
+                                            </p:txEl>
+                                          </p:spTgt>
+                                        </p:tgtEl>
+                                      </p:cBhvr>
+                                    </p:animEffect>
+                                  </p:childTnLst>
+                                </p:cTn>
+                              </p:par>
+                              <p:par>
+                                <p:cTn id="16" presetID="10" presetClass="entr" presetSubtype="0" fill="hold" grpId="0" nodeType="withEffect">
+                                  <p:stCondLst>
+                                    <p:cond delay="2000"/>
+                                  </p:stCondLst>
+                                  <p:childTnLst>
+                                    <p:set>
+                                      <p:cBhvr>
+                                        <p:cTn id="17" dur="1" fill="hold">
+                                          <p:stCondLst>
+                                            <p:cond delay="0"/>
+                                          </p:stCondLst>
+                                        </p:cTn>
+                                        <p:tgtEl>
+                                          <p:spTgt spid="4">
+                                            <p:txEl>
+                                              <p:pRg st="1" end="1"/>
+                                            </p:txEl>
+                                          </p:spTgt>
+                                        </p:tgtEl>
+                                        <p:attrNameLst>
+                                          <p:attrName>style.visibility</p:attrName>
+                                        </p:attrNameLst>
+                                      </p:cBhvr>
+                                      <p:to>
+                                        <p:strVal val="visible"/>
+                                      </p:to>
+                                    </p:set>
+                                    <p:animEffect transition="in" filter="fade">
+                                      <p:cBhvr>
+                                        <p:cTn id="18" dur="400"/>
+                                        <p:tgtEl>
+                                          <p:spTgt spid="4">
+                                            <p:txEl>
+                                              <p:pRg st="1" end="1"/>
+                                            </p:txEl>
+                                          </p:spTgt>
+                                        </p:tgtEl>
+                                      </p:cBhvr>
+                                    </p:animEffect>
+                                  </p:childTnLst>
+                                </p:cTn>
+                              </p:par>
+                              <p:par>
+                                <p:cTn id="19" presetID="10" presetClass="entr" presetSubtype="0" fill="hold" grpId="0" nodeType="withEffect">
+                                  <p:stCondLst>
+                                    <p:cond delay="2000"/>
+                                  </p:stCondLst>
+                                  <p:childTnLst>
+                                    <p:set>
+                                      <p:cBhvr>
+                                        <p:cTn id="20" dur="1" fill="hold">
+                                          <p:stCondLst>
+                                            <p:cond delay="0"/>
+                                          </p:stCondLst>
+                                        </p:cTn>
+                                        <p:tgtEl>
+                                          <p:spTgt spid="4">
+                                            <p:txEl>
+                                              <p:pRg st="2" end="2"/>
+                                            </p:txEl>
+                                          </p:spTgt>
+                                        </p:tgtEl>
+                                        <p:attrNameLst>
+                                          <p:attrName>style.visibility</p:attrName>
+                                        </p:attrNameLst>
+                                      </p:cBhvr>
+                                      <p:to>
+                                        <p:strVal val="visible"/>
+                                      </p:to>
+                                    </p:set>
+                                    <p:animEffect transition="in" filter="fade">
+                                      <p:cBhvr>
+                                        <p:cTn id="21" dur="400"/>
+                                        <p:tgtEl>
+                                          <p:spTgt spid="4">
+                                            <p:txEl>
+                                              <p:pRg st="2" end="2"/>
+                                            </p:txEl>
+                                          </p:spTgt>
+                                        </p:tgtEl>
+                                      </p:cBhvr>
+                                    </p:animEffect>
+                                  </p:childTnLst>
+                                </p:cTn>
+                              </p:par>
+                            </p:childTnLst>
+                          </p:cTn>
+                        </p:par>
+                      </p:childTnLst>
+                    </p:cTn>
+                  </p:par>
+                  <p:par>
+                    <p:cTn id="22" fill="hold">
+                      <p:stCondLst>
+                        <p:cond delay="indefinite"/>
+                      </p:stCondLst>
+                      <p:childTnLst>
+                        <p:par>
+                          <p:cTn id="23" fill="hold">
+                            <p:stCondLst>
+                              <p:cond delay="0"/>
+                            </p:stCondLst>
+                            <p:childTnLst>
+                              <p:par>
+                                <p:cTn id="24" presetID="10" presetClass="entr" presetSubtype="0" fill="hold" grpId="0" nodeType="clickEffect">
+                                  <p:stCondLst>
+                                    <p:cond delay="500"/>
+                                  </p:stCondLst>
+                                  <p:childTnLst>
+                                    <p:set>
+                                      <p:cBhvr>
+                                        <p:cTn id="25" dur="1" fill="hold">
+                                          <p:stCondLst>
+                                            <p:cond delay="0"/>
+                                          </p:stCondLst>
+                                        </p:cTn>
+                                        <p:tgtEl>
+                                          <p:spTgt spid="5">
+                                            <p:txEl>
+                                              <p:pRg st="0" end="0"/>
+                                            </p:txEl>
+                                          </p:spTgt>
+                                        </p:tgtEl>
+                                        <p:attrNameLst>
+                                          <p:attrName>style.visibility</p:attrName>
+                                        </p:attrNameLst>
+                                      </p:cBhvr>
+                                      <p:to>
+                                        <p:strVal val="visible"/>
+                                      </p:to>
+                                    </p:set>
+                                    <p:animEffect transition="in" filter="fade">
+                                      <p:cBhvr>
+                                        <p:cTn id="26" dur="400"/>
+                                        <p:tgtEl>
+                                          <p:spTgt spid="5">
+                                            <p:txEl>
+                                              <p:pRg st="0" end="0"/>
+                                            </p:txEl>
+                                          </p:spTgt>
+                                        </p:tgtEl>
+                                      </p:cBhvr>
+                                    </p:animEffect>
+                                  </p:childTnLst>
+                                </p:cTn>
+                              </p:par>
+                              <p:par>
+                                <p:cTn id="27" presetID="10" presetClass="entr" presetSubtype="0" fill="hold" grpId="0" nodeType="withEffect">
+                                  <p:stCondLst>
+                                    <p:cond delay="2000"/>
+                                  </p:stCondLst>
+                                  <p:childTnLst>
+                                    <p:set>
+                                      <p:cBhvr>
+                                        <p:cTn id="28" dur="1" fill="hold">
+                                          <p:stCondLst>
+                                            <p:cond delay="0"/>
+                                          </p:stCondLst>
+                                        </p:cTn>
+                                        <p:tgtEl>
+                                          <p:spTgt spid="6">
+                                            <p:txEl>
+                                              <p:pRg st="0" end="0"/>
+                                            </p:txEl>
+                                          </p:spTgt>
+                                        </p:tgtEl>
+                                        <p:attrNameLst>
+                                          <p:attrName>style.visibility</p:attrName>
+                                        </p:attrNameLst>
+                                      </p:cBhvr>
+                                      <p:to>
+                                        <p:strVal val="visible"/>
+                                      </p:to>
+                                    </p:set>
+                                    <p:animEffect transition="in" filter="fade">
+                                      <p:cBhvr>
+                                        <p:cTn id="29" dur="400"/>
+                                        <p:tgtEl>
+                                          <p:spTgt spid="6">
+                                            <p:txEl>
+                                              <p:pRg st="0" end="0"/>
+                                            </p:txEl>
+                                          </p:spTgt>
+                                        </p:tgtEl>
+                                      </p:cBhvr>
+                                    </p:animEffect>
+                                  </p:childTnLst>
+                                </p:cTn>
+                              </p:par>
+                              <p:par>
+                                <p:cTn id="30" presetID="10" presetClass="entr" presetSubtype="0" fill="hold" grpId="0" nodeType="withEffect">
+                                  <p:stCondLst>
+                                    <p:cond delay="2000"/>
+                                  </p:stCondLst>
+                                  <p:childTnLst>
+                                    <p:set>
+                                      <p:cBhvr>
+                                        <p:cTn id="31" dur="1" fill="hold">
+                                          <p:stCondLst>
+                                            <p:cond delay="0"/>
+                                          </p:stCondLst>
+                                        </p:cTn>
+                                        <p:tgtEl>
+                                          <p:spTgt spid="6">
+                                            <p:txEl>
+                                              <p:pRg st="1" end="1"/>
+                                            </p:txEl>
+                                          </p:spTgt>
+                                        </p:tgtEl>
+                                        <p:attrNameLst>
+                                          <p:attrName>style.visibility</p:attrName>
+                                        </p:attrNameLst>
+                                      </p:cBhvr>
+                                      <p:to>
+                                        <p:strVal val="visible"/>
+                                      </p:to>
+                                    </p:set>
+                                    <p:animEffect transition="in" filter="fade">
+                                      <p:cBhvr>
+                                        <p:cTn id="32" dur="400"/>
+                                        <p:tgtEl>
+                                          <p:spTgt spid="6">
+                                            <p:txEl>
+                                              <p:pRg st="1" end="1"/>
+                                            </p:txEl>
+                                          </p:spTgt>
+                                        </p:tgtEl>
+                                      </p:cBhvr>
+                                    </p:animEffect>
+                                  </p:childTnLst>
+                                </p:cTn>
+                              </p:par>
+                              <p:par>
+                                <p:cTn id="33" presetID="10" presetClass="entr" presetSubtype="0" fill="hold" grpId="0" nodeType="withEffect">
+                                  <p:stCondLst>
+                                    <p:cond delay="2000"/>
+                                  </p:stCondLst>
+                                  <p:childTnLst>
+                                    <p:set>
+                                      <p:cBhvr>
+                                        <p:cTn id="34" dur="1" fill="hold">
+                                          <p:stCondLst>
+                                            <p:cond delay="0"/>
+                                          </p:stCondLst>
+                                        </p:cTn>
+                                        <p:tgtEl>
+                                          <p:spTgt spid="6">
+                                            <p:txEl>
+                                              <p:pRg st="2" end="2"/>
+                                            </p:txEl>
+                                          </p:spTgt>
+                                        </p:tgtEl>
+                                        <p:attrNameLst>
+                                          <p:attrName>style.visibility</p:attrName>
+                                        </p:attrNameLst>
+                                      </p:cBhvr>
+                                      <p:to>
+                                        <p:strVal val="visible"/>
+                                      </p:to>
+                                    </p:set>
+                                    <p:animEffect transition="in" filter="fade">
+                                      <p:cBhvr>
+                                        <p:cTn id="35" dur="400"/>
+                                        <p:tgtEl>
+                                          <p:spTgt spid="6">
+                                            <p:txEl>
+                                              <p:pRg st="2" end="2"/>
+                                            </p:txEl>
+                                          </p:spTgt>
+                                        </p:tgtEl>
+                                      </p:cBhvr>
+                                    </p:animEffect>
+                                  </p:childTnLst>
+                                </p:cTn>
+                              </p:par>
+                            </p:childTnLst>
+                          </p:cTn>
+                        </p:par>
+                      </p:childTnLst>
+                    </p:cTn>
+                  </p:par>
+                </p:childTnLst>
+              </p:cTn>
+              <p:prevCondLst>
+                <p:cond evt="onPrev" delay="0">
+                  <p:tgtEl>
+                    <p:sldTgt/>
+                  </p:tgtEl>
+                </p:cond>
+              </p:prevCondLst>
+              <p:nextCondLst>
+                <p:cond evt="onNext" delay="0">
+                  <p:tgtEl>
+                    <p:sldTgt/>
+                  </p:tgtEl>
+                </p:cond>
+              </p:nextCondLst>
+            </p:seq>
+          </p:childTnLst>
+        </p:cTn>
+      </p:par>
+    </p:tnLst>
+    <p:bldLst>
+      <p:bldP spid="2" grpId="0"/>
+      <p:bldP spid="3" grpId="0" build="p"/>
+      <p:bldP spid="4" grpId="0" uiExpand="1" build="p"/>
+      <p:bldP spid="5" grpId="0" build="p"/>
+      <p:bldP spid="6" grpId="0" build="p"/>
+    </p:bldLst>
+  </p:timing>
 </p:sld>
 </file>
 
@@ -4279,6 +4742,519 @@
   <p:clrMapOvr>
     <a:masterClrMapping/>
   </p:clrMapOvr>
+  <p:timing>
+    <p:tnLst>
+      <p:par>
+        <p:cTn id="1" dur="indefinite" restart="never" nodeType="tmRoot">
+          <p:childTnLst>
+            <p:seq concurrent="1" nextAc="seek">
+              <p:cTn id="2" dur="indefinite" nodeType="mainSeq">
+                <p:childTnLst>
+                  <p:par>
+                    <p:cTn id="3" fill="hold">
+                      <p:stCondLst>
+                        <p:cond delay="indefinite"/>
+                      </p:stCondLst>
+                      <p:childTnLst>
+                        <p:par>
+                          <p:cTn id="4" fill="hold">
+                            <p:stCondLst>
+                              <p:cond delay="0"/>
+                            </p:stCondLst>
+                            <p:childTnLst>
+                              <p:par>
+                                <p:cTn id="5" presetID="10" presetClass="entr" presetSubtype="0" fill="hold" grpId="0" nodeType="clickEffect">
+                                  <p:stCondLst>
+                                    <p:cond delay="500"/>
+                                  </p:stCondLst>
+                                  <p:childTnLst>
+                                    <p:set>
+                                      <p:cBhvr>
+                                        <p:cTn id="6" dur="1" fill="hold">
+                                          <p:stCondLst>
+                                            <p:cond delay="0"/>
+                                          </p:stCondLst>
+                                        </p:cTn>
+                                        <p:tgtEl>
+                                          <p:spTgt spid="2"/>
+                                        </p:tgtEl>
+                                        <p:attrNameLst>
+                                          <p:attrName>style.visibility</p:attrName>
+                                        </p:attrNameLst>
+                                      </p:cBhvr>
+                                      <p:to>
+                                        <p:strVal val="visible"/>
+                                      </p:to>
+                                    </p:set>
+                                    <p:animEffect transition="in" filter="fade">
+                                      <p:cBhvr>
+                                        <p:cTn id="7" dur="400"/>
+                                        <p:tgtEl>
+                                          <p:spTgt spid="2"/>
+                                        </p:tgtEl>
+                                      </p:cBhvr>
+                                    </p:animEffect>
+                                  </p:childTnLst>
+                                </p:cTn>
+                              </p:par>
+                            </p:childTnLst>
+                          </p:cTn>
+                        </p:par>
+                      </p:childTnLst>
+                    </p:cTn>
+                  </p:par>
+                  <p:par>
+                    <p:cTn id="8" fill="hold">
+                      <p:stCondLst>
+                        <p:cond delay="indefinite"/>
+                      </p:stCondLst>
+                      <p:childTnLst>
+                        <p:par>
+                          <p:cTn id="9" fill="hold">
+                            <p:stCondLst>
+                              <p:cond delay="0"/>
+                            </p:stCondLst>
+                            <p:childTnLst>
+                              <p:par>
+                                <p:cTn id="10" presetID="10" presetClass="entr" presetSubtype="0" fill="hold" grpId="0" nodeType="clickEffect">
+                                  <p:stCondLst>
+                                    <p:cond delay="500"/>
+                                  </p:stCondLst>
+                                  <p:childTnLst>
+                                    <p:set>
+                                      <p:cBhvr>
+                                        <p:cTn id="11" dur="1" fill="hold">
+                                          <p:stCondLst>
+                                            <p:cond delay="0"/>
+                                          </p:stCondLst>
+                                        </p:cTn>
+                                        <p:tgtEl>
+                                          <p:spTgt spid="3">
+                                            <p:txEl>
+                                              <p:pRg st="0" end="0"/>
+                                            </p:txEl>
+                                          </p:spTgt>
+                                        </p:tgtEl>
+                                        <p:attrNameLst>
+                                          <p:attrName>style.visibility</p:attrName>
+                                        </p:attrNameLst>
+                                      </p:cBhvr>
+                                      <p:to>
+                                        <p:strVal val="visible"/>
+                                      </p:to>
+                                    </p:set>
+                                    <p:animEffect transition="in" filter="fade">
+                                      <p:cBhvr>
+                                        <p:cTn id="12" dur="400"/>
+                                        <p:tgtEl>
+                                          <p:spTgt spid="3">
+                                            <p:txEl>
+                                              <p:pRg st="0" end="0"/>
+                                            </p:txEl>
+                                          </p:spTgt>
+                                        </p:tgtEl>
+                                      </p:cBhvr>
+                                    </p:animEffect>
+                                  </p:childTnLst>
+                                </p:cTn>
+                              </p:par>
+                              <p:par>
+                                <p:cTn id="13" presetID="10" presetClass="entr" presetSubtype="0" fill="hold" grpId="0" nodeType="withEffect">
+                                  <p:stCondLst>
+                                    <p:cond delay="2000"/>
+                                  </p:stCondLst>
+                                  <p:childTnLst>
+                                    <p:set>
+                                      <p:cBhvr>
+                                        <p:cTn id="14" dur="1" fill="hold">
+                                          <p:stCondLst>
+                                            <p:cond delay="0"/>
+                                          </p:stCondLst>
+                                        </p:cTn>
+                                        <p:tgtEl>
+                                          <p:spTgt spid="4">
+                                            <p:txEl>
+                                              <p:pRg st="0" end="0"/>
+                                            </p:txEl>
+                                          </p:spTgt>
+                                        </p:tgtEl>
+                                        <p:attrNameLst>
+                                          <p:attrName>style.visibility</p:attrName>
+                                        </p:attrNameLst>
+                                      </p:cBhvr>
+                                      <p:to>
+                                        <p:strVal val="visible"/>
+                                      </p:to>
+                                    </p:set>
+                                    <p:animEffect transition="in" filter="fade">
+                                      <p:cBhvr>
+                                        <p:cTn id="15" dur="400"/>
+                                        <p:tgtEl>
+                                          <p:spTgt spid="4">
+                                            <p:txEl>
+                                              <p:pRg st="0" end="0"/>
+                                            </p:txEl>
+                                          </p:spTgt>
+                                        </p:tgtEl>
+                                      </p:cBhvr>
+                                    </p:animEffect>
+                                  </p:childTnLst>
+                                </p:cTn>
+                              </p:par>
+                              <p:par>
+                                <p:cTn id="16" presetID="10" presetClass="entr" presetSubtype="0" fill="hold" grpId="0" nodeType="withEffect">
+                                  <p:stCondLst>
+                                    <p:cond delay="2000"/>
+                                  </p:stCondLst>
+                                  <p:childTnLst>
+                                    <p:set>
+                                      <p:cBhvr>
+                                        <p:cTn id="17" dur="1" fill="hold">
+                                          <p:stCondLst>
+                                            <p:cond delay="0"/>
+                                          </p:stCondLst>
+                                        </p:cTn>
+                                        <p:tgtEl>
+                                          <p:spTgt spid="4">
+                                            <p:txEl>
+                                              <p:pRg st="1" end="1"/>
+                                            </p:txEl>
+                                          </p:spTgt>
+                                        </p:tgtEl>
+                                        <p:attrNameLst>
+                                          <p:attrName>style.visibility</p:attrName>
+                                        </p:attrNameLst>
+                                      </p:cBhvr>
+                                      <p:to>
+                                        <p:strVal val="visible"/>
+                                      </p:to>
+                                    </p:set>
+                                    <p:animEffect transition="in" filter="fade">
+                                      <p:cBhvr>
+                                        <p:cTn id="18" dur="400"/>
+                                        <p:tgtEl>
+                                          <p:spTgt spid="4">
+                                            <p:txEl>
+                                              <p:pRg st="1" end="1"/>
+                                            </p:txEl>
+                                          </p:spTgt>
+                                        </p:tgtEl>
+                                      </p:cBhvr>
+                                    </p:animEffect>
+                                  </p:childTnLst>
+                                </p:cTn>
+                              </p:par>
+                              <p:par>
+                                <p:cTn id="19" presetID="10" presetClass="entr" presetSubtype="0" fill="hold" grpId="0" nodeType="withEffect">
+                                  <p:stCondLst>
+                                    <p:cond delay="2000"/>
+                                  </p:stCondLst>
+                                  <p:childTnLst>
+                                    <p:set>
+                                      <p:cBhvr>
+                                        <p:cTn id="20" dur="1" fill="hold">
+                                          <p:stCondLst>
+                                            <p:cond delay="0"/>
+                                          </p:stCondLst>
+                                        </p:cTn>
+                                        <p:tgtEl>
+                                          <p:spTgt spid="4">
+                                            <p:txEl>
+                                              <p:pRg st="2" end="2"/>
+                                            </p:txEl>
+                                          </p:spTgt>
+                                        </p:tgtEl>
+                                        <p:attrNameLst>
+                                          <p:attrName>style.visibility</p:attrName>
+                                        </p:attrNameLst>
+                                      </p:cBhvr>
+                                      <p:to>
+                                        <p:strVal val="visible"/>
+                                      </p:to>
+                                    </p:set>
+                                    <p:animEffect transition="in" filter="fade">
+                                      <p:cBhvr>
+                                        <p:cTn id="21" dur="400"/>
+                                        <p:tgtEl>
+                                          <p:spTgt spid="4">
+                                            <p:txEl>
+                                              <p:pRg st="2" end="2"/>
+                                            </p:txEl>
+                                          </p:spTgt>
+                                        </p:tgtEl>
+                                      </p:cBhvr>
+                                    </p:animEffect>
+                                  </p:childTnLst>
+                                </p:cTn>
+                              </p:par>
+                              <p:par>
+                                <p:cTn id="22" presetID="10" presetClass="entr" presetSubtype="0" fill="hold" grpId="0" nodeType="withEffect">
+                                  <p:stCondLst>
+                                    <p:cond delay="2000"/>
+                                  </p:stCondLst>
+                                  <p:childTnLst>
+                                    <p:set>
+                                      <p:cBhvr>
+                                        <p:cTn id="23" dur="1" fill="hold">
+                                          <p:stCondLst>
+                                            <p:cond delay="0"/>
+                                          </p:stCondLst>
+                                        </p:cTn>
+                                        <p:tgtEl>
+                                          <p:spTgt spid="4">
+                                            <p:txEl>
+                                              <p:pRg st="3" end="3"/>
+                                            </p:txEl>
+                                          </p:spTgt>
+                                        </p:tgtEl>
+                                        <p:attrNameLst>
+                                          <p:attrName>style.visibility</p:attrName>
+                                        </p:attrNameLst>
+                                      </p:cBhvr>
+                                      <p:to>
+                                        <p:strVal val="visible"/>
+                                      </p:to>
+                                    </p:set>
+                                    <p:animEffect transition="in" filter="fade">
+                                      <p:cBhvr>
+                                        <p:cTn id="24" dur="400"/>
+                                        <p:tgtEl>
+                                          <p:spTgt spid="4">
+                                            <p:txEl>
+                                              <p:pRg st="3" end="3"/>
+                                            </p:txEl>
+                                          </p:spTgt>
+                                        </p:tgtEl>
+                                      </p:cBhvr>
+                                    </p:animEffect>
+                                  </p:childTnLst>
+                                </p:cTn>
+                              </p:par>
+                            </p:childTnLst>
+                          </p:cTn>
+                        </p:par>
+                      </p:childTnLst>
+                    </p:cTn>
+                  </p:par>
+                  <p:par>
+                    <p:cTn id="25" fill="hold">
+                      <p:stCondLst>
+                        <p:cond delay="indefinite"/>
+                      </p:stCondLst>
+                      <p:childTnLst>
+                        <p:par>
+                          <p:cTn id="26" fill="hold">
+                            <p:stCondLst>
+                              <p:cond delay="0"/>
+                            </p:stCondLst>
+                            <p:childTnLst>
+                              <p:par>
+                                <p:cTn id="27" presetID="10" presetClass="entr" presetSubtype="0" fill="hold" grpId="0" nodeType="clickEffect">
+                                  <p:stCondLst>
+                                    <p:cond delay="500"/>
+                                  </p:stCondLst>
+                                  <p:childTnLst>
+                                    <p:set>
+                                      <p:cBhvr>
+                                        <p:cTn id="28" dur="1" fill="hold">
+                                          <p:stCondLst>
+                                            <p:cond delay="0"/>
+                                          </p:stCondLst>
+                                        </p:cTn>
+                                        <p:tgtEl>
+                                          <p:spTgt spid="5">
+                                            <p:txEl>
+                                              <p:pRg st="0" end="0"/>
+                                            </p:txEl>
+                                          </p:spTgt>
+                                        </p:tgtEl>
+                                        <p:attrNameLst>
+                                          <p:attrName>style.visibility</p:attrName>
+                                        </p:attrNameLst>
+                                      </p:cBhvr>
+                                      <p:to>
+                                        <p:strVal val="visible"/>
+                                      </p:to>
+                                    </p:set>
+                                    <p:animEffect transition="in" filter="fade">
+                                      <p:cBhvr>
+                                        <p:cTn id="29" dur="400"/>
+                                        <p:tgtEl>
+                                          <p:spTgt spid="5">
+                                            <p:txEl>
+                                              <p:pRg st="0" end="0"/>
+                                            </p:txEl>
+                                          </p:spTgt>
+                                        </p:tgtEl>
+                                      </p:cBhvr>
+                                    </p:animEffect>
+                                  </p:childTnLst>
+                                </p:cTn>
+                              </p:par>
+                              <p:par>
+                                <p:cTn id="30" presetID="10" presetClass="entr" presetSubtype="0" fill="hold" grpId="0" nodeType="withEffect">
+                                  <p:stCondLst>
+                                    <p:cond delay="2000"/>
+                                  </p:stCondLst>
+                                  <p:childTnLst>
+                                    <p:set>
+                                      <p:cBhvr>
+                                        <p:cTn id="31" dur="1" fill="hold">
+                                          <p:stCondLst>
+                                            <p:cond delay="0"/>
+                                          </p:stCondLst>
+                                        </p:cTn>
+                                        <p:tgtEl>
+                                          <p:spTgt spid="6">
+                                            <p:txEl>
+                                              <p:pRg st="0" end="0"/>
+                                            </p:txEl>
+                                          </p:spTgt>
+                                        </p:tgtEl>
+                                        <p:attrNameLst>
+                                          <p:attrName>style.visibility</p:attrName>
+                                        </p:attrNameLst>
+                                      </p:cBhvr>
+                                      <p:to>
+                                        <p:strVal val="visible"/>
+                                      </p:to>
+                                    </p:set>
+                                    <p:animEffect transition="in" filter="fade">
+                                      <p:cBhvr>
+                                        <p:cTn id="32" dur="400"/>
+                                        <p:tgtEl>
+                                          <p:spTgt spid="6">
+                                            <p:txEl>
+                                              <p:pRg st="0" end="0"/>
+                                            </p:txEl>
+                                          </p:spTgt>
+                                        </p:tgtEl>
+                                      </p:cBhvr>
+                                    </p:animEffect>
+                                  </p:childTnLst>
+                                </p:cTn>
+                              </p:par>
+                              <p:par>
+                                <p:cTn id="33" presetID="10" presetClass="entr" presetSubtype="0" fill="hold" grpId="0" nodeType="withEffect">
+                                  <p:stCondLst>
+                                    <p:cond delay="2000"/>
+                                  </p:stCondLst>
+                                  <p:childTnLst>
+                                    <p:set>
+                                      <p:cBhvr>
+                                        <p:cTn id="34" dur="1" fill="hold">
+                                          <p:stCondLst>
+                                            <p:cond delay="0"/>
+                                          </p:stCondLst>
+                                        </p:cTn>
+                                        <p:tgtEl>
+                                          <p:spTgt spid="6">
+                                            <p:txEl>
+                                              <p:pRg st="1" end="1"/>
+                                            </p:txEl>
+                                          </p:spTgt>
+                                        </p:tgtEl>
+                                        <p:attrNameLst>
+                                          <p:attrName>style.visibility</p:attrName>
+                                        </p:attrNameLst>
+                                      </p:cBhvr>
+                                      <p:to>
+                                        <p:strVal val="visible"/>
+                                      </p:to>
+                                    </p:set>
+                                    <p:animEffect transition="in" filter="fade">
+                                      <p:cBhvr>
+                                        <p:cTn id="35" dur="400"/>
+                                        <p:tgtEl>
+                                          <p:spTgt spid="6">
+                                            <p:txEl>
+                                              <p:pRg st="1" end="1"/>
+                                            </p:txEl>
+                                          </p:spTgt>
+                                        </p:tgtEl>
+                                      </p:cBhvr>
+                                    </p:animEffect>
+                                  </p:childTnLst>
+                                </p:cTn>
+                              </p:par>
+                              <p:par>
+                                <p:cTn id="36" presetID="10" presetClass="entr" presetSubtype="0" fill="hold" grpId="0" nodeType="withEffect">
+                                  <p:stCondLst>
+                                    <p:cond delay="2000"/>
+                                  </p:stCondLst>
+                                  <p:childTnLst>
+                                    <p:set>
+                                      <p:cBhvr>
+                                        <p:cTn id="37" dur="1" fill="hold">
+                                          <p:stCondLst>
+                                            <p:cond delay="0"/>
+                                          </p:stCondLst>
+                                        </p:cTn>
+                                        <p:tgtEl>
+                                          <p:spTgt spid="6">
+                                            <p:txEl>
+                                              <p:pRg st="2" end="2"/>
+                                            </p:txEl>
+                                          </p:spTgt>
+                                        </p:tgtEl>
+                                        <p:attrNameLst>
+                                          <p:attrName>style.visibility</p:attrName>
+                                        </p:attrNameLst>
+                                      </p:cBhvr>
+                                      <p:to>
+                                        <p:strVal val="visible"/>
+                                      </p:to>
+                                    </p:set>
+                                    <p:animEffect transition="in" filter="fade">
+                                      <p:cBhvr>
+                                        <p:cTn id="38" dur="400"/>
+                                        <p:tgtEl>
+                                          <p:spTgt spid="6">
+                                            <p:txEl>
+                                              <p:pRg st="2" end="2"/>
+                                            </p:txEl>
+                                          </p:spTgt>
+                                        </p:tgtEl>
+                                      </p:cBhvr>
+                                    </p:animEffect>
+                                  </p:childTnLst>
+                                </p:cTn>
+                              </p:par>
+                            </p:childTnLst>
+                          </p:cTn>
+                        </p:par>
+                      </p:childTnLst>
+                    </p:cTn>
+                  </p:par>
+                </p:childTnLst>
+              </p:cTn>
+              <p:prevCondLst>
+                <p:cond evt="onPrev" delay="0">
+                  <p:tgtEl>
+                    <p:sldTgt/>
+                  </p:tgtEl>
+                </p:cond>
+              </p:prevCondLst>
+              <p:nextCondLst>
+                <p:cond evt="onNext" delay="0">
+                  <p:tgtEl>
+                    <p:sldTgt/>
+                  </p:tgtEl>
+                </p:cond>
+              </p:nextCondLst>
+            </p:seq>
+          </p:childTnLst>
+        </p:cTn>
+      </p:par>
+    </p:tnLst>
+    <p:bldLst>
+      <p:bldP spid="2" grpId="0"/>
+      <p:bldP spid="3" grpId="0" build="p"/>
+      <p:bldP spid="4" grpId="0" build="p"/>
+      <p:bldP spid="5" grpId="0" build="p"/>
+      <p:bldP spid="6" grpId="0" build="p"/>
+    </p:bldLst>
+  </p:timing>
 </p:sld>
 </file>
 
@@ -4509,6 +5485,562 @@
   <p:clrMapOvr>
     <a:masterClrMapping/>
   </p:clrMapOvr>
+  <p:timing>
+    <p:tnLst>
+      <p:par>
+        <p:cTn id="1" dur="indefinite" restart="never" nodeType="tmRoot">
+          <p:childTnLst>
+            <p:seq concurrent="1" nextAc="seek">
+              <p:cTn id="2" dur="indefinite" nodeType="mainSeq">
+                <p:childTnLst>
+                  <p:par>
+                    <p:cTn id="3" fill="hold">
+                      <p:stCondLst>
+                        <p:cond delay="indefinite"/>
+                      </p:stCondLst>
+                      <p:childTnLst>
+                        <p:par>
+                          <p:cTn id="4" fill="hold">
+                            <p:stCondLst>
+                              <p:cond delay="0"/>
+                            </p:stCondLst>
+                            <p:childTnLst>
+                              <p:par>
+                                <p:cTn id="5" presetID="10" presetClass="entr" presetSubtype="0" fill="hold" grpId="0" nodeType="clickEffect">
+                                  <p:stCondLst>
+                                    <p:cond delay="500"/>
+                                  </p:stCondLst>
+                                  <p:childTnLst>
+                                    <p:set>
+                                      <p:cBhvr>
+                                        <p:cTn id="6" dur="1" fill="hold">
+                                          <p:stCondLst>
+                                            <p:cond delay="0"/>
+                                          </p:stCondLst>
+                                        </p:cTn>
+                                        <p:tgtEl>
+                                          <p:spTgt spid="2"/>
+                                        </p:tgtEl>
+                                        <p:attrNameLst>
+                                          <p:attrName>style.visibility</p:attrName>
+                                        </p:attrNameLst>
+                                      </p:cBhvr>
+                                      <p:to>
+                                        <p:strVal val="visible"/>
+                                      </p:to>
+                                    </p:set>
+                                    <p:animEffect transition="in" filter="fade">
+                                      <p:cBhvr>
+                                        <p:cTn id="7" dur="400"/>
+                                        <p:tgtEl>
+                                          <p:spTgt spid="2"/>
+                                        </p:tgtEl>
+                                      </p:cBhvr>
+                                    </p:animEffect>
+                                  </p:childTnLst>
+                                </p:cTn>
+                              </p:par>
+                            </p:childTnLst>
+                          </p:cTn>
+                        </p:par>
+                      </p:childTnLst>
+                    </p:cTn>
+                  </p:par>
+                  <p:par>
+                    <p:cTn id="8" fill="hold">
+                      <p:stCondLst>
+                        <p:cond delay="indefinite"/>
+                      </p:stCondLst>
+                      <p:childTnLst>
+                        <p:par>
+                          <p:cTn id="9" fill="hold">
+                            <p:stCondLst>
+                              <p:cond delay="0"/>
+                            </p:stCondLst>
+                            <p:childTnLst>
+                              <p:par>
+                                <p:cTn id="10" presetID="10" presetClass="entr" presetSubtype="0" fill="hold" grpId="0" nodeType="clickEffect">
+                                  <p:stCondLst>
+                                    <p:cond delay="500"/>
+                                  </p:stCondLst>
+                                  <p:childTnLst>
+                                    <p:set>
+                                      <p:cBhvr>
+                                        <p:cTn id="11" dur="1" fill="hold">
+                                          <p:stCondLst>
+                                            <p:cond delay="0"/>
+                                          </p:stCondLst>
+                                        </p:cTn>
+                                        <p:tgtEl>
+                                          <p:spTgt spid="3">
+                                            <p:txEl>
+                                              <p:pRg st="0" end="0"/>
+                                            </p:txEl>
+                                          </p:spTgt>
+                                        </p:tgtEl>
+                                        <p:attrNameLst>
+                                          <p:attrName>style.visibility</p:attrName>
+                                        </p:attrNameLst>
+                                      </p:cBhvr>
+                                      <p:to>
+                                        <p:strVal val="visible"/>
+                                      </p:to>
+                                    </p:set>
+                                    <p:animEffect transition="in" filter="fade">
+                                      <p:cBhvr>
+                                        <p:cTn id="12" dur="400"/>
+                                        <p:tgtEl>
+                                          <p:spTgt spid="3">
+                                            <p:txEl>
+                                              <p:pRg st="0" end="0"/>
+                                            </p:txEl>
+                                          </p:spTgt>
+                                        </p:tgtEl>
+                                      </p:cBhvr>
+                                    </p:animEffect>
+                                  </p:childTnLst>
+                                </p:cTn>
+                              </p:par>
+                              <p:par>
+                                <p:cTn id="13" presetID="10" presetClass="entr" presetSubtype="0" fill="hold" grpId="0" nodeType="withEffect">
+                                  <p:stCondLst>
+                                    <p:cond delay="2000"/>
+                                  </p:stCondLst>
+                                  <p:childTnLst>
+                                    <p:set>
+                                      <p:cBhvr>
+                                        <p:cTn id="14" dur="1" fill="hold">
+                                          <p:stCondLst>
+                                            <p:cond delay="0"/>
+                                          </p:stCondLst>
+                                        </p:cTn>
+                                        <p:tgtEl>
+                                          <p:spTgt spid="4">
+                                            <p:txEl>
+                                              <p:pRg st="0" end="0"/>
+                                            </p:txEl>
+                                          </p:spTgt>
+                                        </p:tgtEl>
+                                        <p:attrNameLst>
+                                          <p:attrName>style.visibility</p:attrName>
+                                        </p:attrNameLst>
+                                      </p:cBhvr>
+                                      <p:to>
+                                        <p:strVal val="visible"/>
+                                      </p:to>
+                                    </p:set>
+                                    <p:animEffect transition="in" filter="fade">
+                                      <p:cBhvr>
+                                        <p:cTn id="15" dur="400"/>
+                                        <p:tgtEl>
+                                          <p:spTgt spid="4">
+                                            <p:txEl>
+                                              <p:pRg st="0" end="0"/>
+                                            </p:txEl>
+                                          </p:spTgt>
+                                        </p:tgtEl>
+                                      </p:cBhvr>
+                                    </p:animEffect>
+                                  </p:childTnLst>
+                                </p:cTn>
+                              </p:par>
+                              <p:par>
+                                <p:cTn id="16" presetID="10" presetClass="entr" presetSubtype="0" fill="hold" grpId="0" nodeType="withEffect">
+                                  <p:stCondLst>
+                                    <p:cond delay="2000"/>
+                                  </p:stCondLst>
+                                  <p:childTnLst>
+                                    <p:set>
+                                      <p:cBhvr>
+                                        <p:cTn id="17" dur="1" fill="hold">
+                                          <p:stCondLst>
+                                            <p:cond delay="0"/>
+                                          </p:stCondLst>
+                                        </p:cTn>
+                                        <p:tgtEl>
+                                          <p:spTgt spid="4">
+                                            <p:txEl>
+                                              <p:pRg st="1" end="1"/>
+                                            </p:txEl>
+                                          </p:spTgt>
+                                        </p:tgtEl>
+                                        <p:attrNameLst>
+                                          <p:attrName>style.visibility</p:attrName>
+                                        </p:attrNameLst>
+                                      </p:cBhvr>
+                                      <p:to>
+                                        <p:strVal val="visible"/>
+                                      </p:to>
+                                    </p:set>
+                                    <p:animEffect transition="in" filter="fade">
+                                      <p:cBhvr>
+                                        <p:cTn id="18" dur="400"/>
+                                        <p:tgtEl>
+                                          <p:spTgt spid="4">
+                                            <p:txEl>
+                                              <p:pRg st="1" end="1"/>
+                                            </p:txEl>
+                                          </p:spTgt>
+                                        </p:tgtEl>
+                                      </p:cBhvr>
+                                    </p:animEffect>
+                                  </p:childTnLst>
+                                </p:cTn>
+                              </p:par>
+                              <p:par>
+                                <p:cTn id="19" presetID="10" presetClass="entr" presetSubtype="0" fill="hold" grpId="0" nodeType="withEffect">
+                                  <p:stCondLst>
+                                    <p:cond delay="2000"/>
+                                  </p:stCondLst>
+                                  <p:childTnLst>
+                                    <p:set>
+                                      <p:cBhvr>
+                                        <p:cTn id="20" dur="1" fill="hold">
+                                          <p:stCondLst>
+                                            <p:cond delay="0"/>
+                                          </p:stCondLst>
+                                        </p:cTn>
+                                        <p:tgtEl>
+                                          <p:spTgt spid="4">
+                                            <p:txEl>
+                                              <p:pRg st="2" end="2"/>
+                                            </p:txEl>
+                                          </p:spTgt>
+                                        </p:tgtEl>
+                                        <p:attrNameLst>
+                                          <p:attrName>style.visibility</p:attrName>
+                                        </p:attrNameLst>
+                                      </p:cBhvr>
+                                      <p:to>
+                                        <p:strVal val="visible"/>
+                                      </p:to>
+                                    </p:set>
+                                    <p:animEffect transition="in" filter="fade">
+                                      <p:cBhvr>
+                                        <p:cTn id="21" dur="400"/>
+                                        <p:tgtEl>
+                                          <p:spTgt spid="4">
+                                            <p:txEl>
+                                              <p:pRg st="2" end="2"/>
+                                            </p:txEl>
+                                          </p:spTgt>
+                                        </p:tgtEl>
+                                      </p:cBhvr>
+                                    </p:animEffect>
+                                  </p:childTnLst>
+                                </p:cTn>
+                              </p:par>
+                              <p:par>
+                                <p:cTn id="22" presetID="10" presetClass="entr" presetSubtype="0" fill="hold" grpId="0" nodeType="withEffect">
+                                  <p:stCondLst>
+                                    <p:cond delay="2000"/>
+                                  </p:stCondLst>
+                                  <p:childTnLst>
+                                    <p:set>
+                                      <p:cBhvr>
+                                        <p:cTn id="23" dur="1" fill="hold">
+                                          <p:stCondLst>
+                                            <p:cond delay="0"/>
+                                          </p:stCondLst>
+                                        </p:cTn>
+                                        <p:tgtEl>
+                                          <p:spTgt spid="4">
+                                            <p:txEl>
+                                              <p:pRg st="3" end="3"/>
+                                            </p:txEl>
+                                          </p:spTgt>
+                                        </p:tgtEl>
+                                        <p:attrNameLst>
+                                          <p:attrName>style.visibility</p:attrName>
+                                        </p:attrNameLst>
+                                      </p:cBhvr>
+                                      <p:to>
+                                        <p:strVal val="visible"/>
+                                      </p:to>
+                                    </p:set>
+                                    <p:animEffect transition="in" filter="fade">
+                                      <p:cBhvr>
+                                        <p:cTn id="24" dur="400"/>
+                                        <p:tgtEl>
+                                          <p:spTgt spid="4">
+                                            <p:txEl>
+                                              <p:pRg st="3" end="3"/>
+                                            </p:txEl>
+                                          </p:spTgt>
+                                        </p:tgtEl>
+                                      </p:cBhvr>
+                                    </p:animEffect>
+                                  </p:childTnLst>
+                                </p:cTn>
+                              </p:par>
+                            </p:childTnLst>
+                          </p:cTn>
+                        </p:par>
+                      </p:childTnLst>
+                    </p:cTn>
+                  </p:par>
+                  <p:par>
+                    <p:cTn id="25" fill="hold">
+                      <p:stCondLst>
+                        <p:cond delay="indefinite"/>
+                      </p:stCondLst>
+                      <p:childTnLst>
+                        <p:par>
+                          <p:cTn id="26" fill="hold">
+                            <p:stCondLst>
+                              <p:cond delay="0"/>
+                            </p:stCondLst>
+                            <p:childTnLst>
+                              <p:par>
+                                <p:cTn id="27" presetID="10" presetClass="entr" presetSubtype="0" fill="hold" grpId="0" nodeType="clickEffect">
+                                  <p:stCondLst>
+                                    <p:cond delay="500"/>
+                                  </p:stCondLst>
+                                  <p:childTnLst>
+                                    <p:set>
+                                      <p:cBhvr>
+                                        <p:cTn id="28" dur="1" fill="hold">
+                                          <p:stCondLst>
+                                            <p:cond delay="0"/>
+                                          </p:stCondLst>
+                                        </p:cTn>
+                                        <p:tgtEl>
+                                          <p:spTgt spid="5">
+                                            <p:txEl>
+                                              <p:pRg st="0" end="0"/>
+                                            </p:txEl>
+                                          </p:spTgt>
+                                        </p:tgtEl>
+                                        <p:attrNameLst>
+                                          <p:attrName>style.visibility</p:attrName>
+                                        </p:attrNameLst>
+                                      </p:cBhvr>
+                                      <p:to>
+                                        <p:strVal val="visible"/>
+                                      </p:to>
+                                    </p:set>
+                                    <p:animEffect transition="in" filter="fade">
+                                      <p:cBhvr>
+                                        <p:cTn id="29" dur="400"/>
+                                        <p:tgtEl>
+                                          <p:spTgt spid="5">
+                                            <p:txEl>
+                                              <p:pRg st="0" end="0"/>
+                                            </p:txEl>
+                                          </p:spTgt>
+                                        </p:tgtEl>
+                                      </p:cBhvr>
+                                    </p:animEffect>
+                                  </p:childTnLst>
+                                </p:cTn>
+                              </p:par>
+                              <p:par>
+                                <p:cTn id="30" presetID="10" presetClass="entr" presetSubtype="0" fill="hold" grpId="0" nodeType="withEffect">
+                                  <p:stCondLst>
+                                    <p:cond delay="2000"/>
+                                  </p:stCondLst>
+                                  <p:childTnLst>
+                                    <p:set>
+                                      <p:cBhvr>
+                                        <p:cTn id="31" dur="1" fill="hold">
+                                          <p:stCondLst>
+                                            <p:cond delay="0"/>
+                                          </p:stCondLst>
+                                        </p:cTn>
+                                        <p:tgtEl>
+                                          <p:spTgt spid="6">
+                                            <p:txEl>
+                                              <p:pRg st="0" end="0"/>
+                                            </p:txEl>
+                                          </p:spTgt>
+                                        </p:tgtEl>
+                                        <p:attrNameLst>
+                                          <p:attrName>style.visibility</p:attrName>
+                                        </p:attrNameLst>
+                                      </p:cBhvr>
+                                      <p:to>
+                                        <p:strVal val="visible"/>
+                                      </p:to>
+                                    </p:set>
+                                    <p:animEffect transition="in" filter="fade">
+                                      <p:cBhvr>
+                                        <p:cTn id="32" dur="400"/>
+                                        <p:tgtEl>
+                                          <p:spTgt spid="6">
+                                            <p:txEl>
+                                              <p:pRg st="0" end="0"/>
+                                            </p:txEl>
+                                          </p:spTgt>
+                                        </p:tgtEl>
+                                      </p:cBhvr>
+                                    </p:animEffect>
+                                  </p:childTnLst>
+                                </p:cTn>
+                              </p:par>
+                              <p:par>
+                                <p:cTn id="33" presetID="10" presetClass="entr" presetSubtype="0" fill="hold" grpId="0" nodeType="withEffect">
+                                  <p:stCondLst>
+                                    <p:cond delay="2000"/>
+                                  </p:stCondLst>
+                                  <p:childTnLst>
+                                    <p:set>
+                                      <p:cBhvr>
+                                        <p:cTn id="34" dur="1" fill="hold">
+                                          <p:stCondLst>
+                                            <p:cond delay="0"/>
+                                          </p:stCondLst>
+                                        </p:cTn>
+                                        <p:tgtEl>
+                                          <p:spTgt spid="6">
+                                            <p:txEl>
+                                              <p:pRg st="1" end="1"/>
+                                            </p:txEl>
+                                          </p:spTgt>
+                                        </p:tgtEl>
+                                        <p:attrNameLst>
+                                          <p:attrName>style.visibility</p:attrName>
+                                        </p:attrNameLst>
+                                      </p:cBhvr>
+                                      <p:to>
+                                        <p:strVal val="visible"/>
+                                      </p:to>
+                                    </p:set>
+                                    <p:animEffect transition="in" filter="fade">
+                                      <p:cBhvr>
+                                        <p:cTn id="35" dur="400"/>
+                                        <p:tgtEl>
+                                          <p:spTgt spid="6">
+                                            <p:txEl>
+                                              <p:pRg st="1" end="1"/>
+                                            </p:txEl>
+                                          </p:spTgt>
+                                        </p:tgtEl>
+                                      </p:cBhvr>
+                                    </p:animEffect>
+                                  </p:childTnLst>
+                                </p:cTn>
+                              </p:par>
+                              <p:par>
+                                <p:cTn id="36" presetID="10" presetClass="entr" presetSubtype="0" fill="hold" grpId="0" nodeType="withEffect">
+                                  <p:stCondLst>
+                                    <p:cond delay="2000"/>
+                                  </p:stCondLst>
+                                  <p:childTnLst>
+                                    <p:set>
+                                      <p:cBhvr>
+                                        <p:cTn id="37" dur="1" fill="hold">
+                                          <p:stCondLst>
+                                            <p:cond delay="0"/>
+                                          </p:stCondLst>
+                                        </p:cTn>
+                                        <p:tgtEl>
+                                          <p:spTgt spid="6">
+                                            <p:txEl>
+                                              <p:pRg st="2" end="2"/>
+                                            </p:txEl>
+                                          </p:spTgt>
+                                        </p:tgtEl>
+                                        <p:attrNameLst>
+                                          <p:attrName>style.visibility</p:attrName>
+                                        </p:attrNameLst>
+                                      </p:cBhvr>
+                                      <p:to>
+                                        <p:strVal val="visible"/>
+                                      </p:to>
+                                    </p:set>
+                                    <p:animEffect transition="in" filter="fade">
+                                      <p:cBhvr>
+                                        <p:cTn id="38" dur="400"/>
+                                        <p:tgtEl>
+                                          <p:spTgt spid="6">
+                                            <p:txEl>
+                                              <p:pRg st="2" end="2"/>
+                                            </p:txEl>
+                                          </p:spTgt>
+                                        </p:tgtEl>
+                                      </p:cBhvr>
+                                    </p:animEffect>
+                                  </p:childTnLst>
+                                </p:cTn>
+                              </p:par>
+                              <p:par>
+                                <p:cTn id="39" presetID="10" presetClass="entr" presetSubtype="0" fill="hold" grpId="0" nodeType="withEffect">
+                                  <p:stCondLst>
+                                    <p:cond delay="2000"/>
+                                  </p:stCondLst>
+                                  <p:childTnLst>
+                                    <p:set>
+                                      <p:cBhvr>
+                                        <p:cTn id="40" dur="1" fill="hold">
+                                          <p:stCondLst>
+                                            <p:cond delay="0"/>
+                                          </p:stCondLst>
+                                        </p:cTn>
+                                        <p:tgtEl>
+                                          <p:spTgt spid="6">
+                                            <p:txEl>
+                                              <p:pRg st="3" end="3"/>
+                                            </p:txEl>
+                                          </p:spTgt>
+                                        </p:tgtEl>
+                                        <p:attrNameLst>
+                                          <p:attrName>style.visibility</p:attrName>
+                                        </p:attrNameLst>
+                                      </p:cBhvr>
+                                      <p:to>
+                                        <p:strVal val="visible"/>
+                                      </p:to>
+                                    </p:set>
+                                    <p:animEffect transition="in" filter="fade">
+                                      <p:cBhvr>
+                                        <p:cTn id="41" dur="400"/>
+                                        <p:tgtEl>
+                                          <p:spTgt spid="6">
+                                            <p:txEl>
+                                              <p:pRg st="3" end="3"/>
+                                            </p:txEl>
+                                          </p:spTgt>
+                                        </p:tgtEl>
+                                      </p:cBhvr>
+                                    </p:animEffect>
+                                  </p:childTnLst>
+                                </p:cTn>
+                              </p:par>
+                            </p:childTnLst>
+                          </p:cTn>
+                        </p:par>
+                      </p:childTnLst>
+                    </p:cTn>
+                  </p:par>
+                </p:childTnLst>
+              </p:cTn>
+              <p:prevCondLst>
+                <p:cond evt="onPrev" delay="0">
+                  <p:tgtEl>
+                    <p:sldTgt/>
+                  </p:tgtEl>
+                </p:cond>
+              </p:prevCondLst>
+              <p:nextCondLst>
+                <p:cond evt="onNext" delay="0">
+                  <p:tgtEl>
+                    <p:sldTgt/>
+                  </p:tgtEl>
+                </p:cond>
+              </p:nextCondLst>
+            </p:seq>
+          </p:childTnLst>
+        </p:cTn>
+      </p:par>
+    </p:tnLst>
+    <p:bldLst>
+      <p:bldP spid="2" grpId="0"/>
+      <p:bldP spid="3" grpId="0" build="p"/>
+      <p:bldP spid="4" grpId="0" build="p"/>
+      <p:bldP spid="5" grpId="0" build="p"/>
+      <p:bldP spid="6" grpId="0" build="p"/>
+    </p:bldLst>
+  </p:timing>
 </p:sld>
 </file>
 
@@ -4727,15 +6259,499 @@
   <p:clrMapOvr>
     <a:masterClrMapping/>
   </p:clrMapOvr>
+  <p:timing>
+    <p:tnLst>
+      <p:par>
+        <p:cTn id="1" dur="indefinite" restart="never" nodeType="tmRoot">
+          <p:childTnLst>
+            <p:seq concurrent="1" nextAc="seek">
+              <p:cTn id="2" dur="indefinite" nodeType="mainSeq">
+                <p:childTnLst>
+                  <p:par>
+                    <p:cTn id="3" fill="hold">
+                      <p:stCondLst>
+                        <p:cond delay="indefinite"/>
+                      </p:stCondLst>
+                      <p:childTnLst>
+                        <p:par>
+                          <p:cTn id="4" fill="hold">
+                            <p:stCondLst>
+                              <p:cond delay="0"/>
+                            </p:stCondLst>
+                            <p:childTnLst>
+                              <p:par>
+                                <p:cTn id="5" presetID="10" presetClass="entr" presetSubtype="0" fill="hold" grpId="0" nodeType="clickEffect">
+                                  <p:stCondLst>
+                                    <p:cond delay="500"/>
+                                  </p:stCondLst>
+                                  <p:childTnLst>
+                                    <p:set>
+                                      <p:cBhvr>
+                                        <p:cTn id="6" dur="1" fill="hold">
+                                          <p:stCondLst>
+                                            <p:cond delay="0"/>
+                                          </p:stCondLst>
+                                        </p:cTn>
+                                        <p:tgtEl>
+                                          <p:spTgt spid="2"/>
+                                        </p:tgtEl>
+                                        <p:attrNameLst>
+                                          <p:attrName>style.visibility</p:attrName>
+                                        </p:attrNameLst>
+                                      </p:cBhvr>
+                                      <p:to>
+                                        <p:strVal val="visible"/>
+                                      </p:to>
+                                    </p:set>
+                                    <p:animEffect transition="in" filter="fade">
+                                      <p:cBhvr>
+                                        <p:cTn id="7" dur="400"/>
+                                        <p:tgtEl>
+                                          <p:spTgt spid="2"/>
+                                        </p:tgtEl>
+                                      </p:cBhvr>
+                                    </p:animEffect>
+                                  </p:childTnLst>
+                                </p:cTn>
+                              </p:par>
+                            </p:childTnLst>
+                          </p:cTn>
+                        </p:par>
+                      </p:childTnLst>
+                    </p:cTn>
+                  </p:par>
+                  <p:par>
+                    <p:cTn id="8" fill="hold">
+                      <p:stCondLst>
+                        <p:cond delay="indefinite"/>
+                      </p:stCondLst>
+                      <p:childTnLst>
+                        <p:par>
+                          <p:cTn id="9" fill="hold">
+                            <p:stCondLst>
+                              <p:cond delay="0"/>
+                            </p:stCondLst>
+                            <p:childTnLst>
+                              <p:par>
+                                <p:cTn id="10" presetID="10" presetClass="entr" presetSubtype="0" fill="hold" grpId="0" nodeType="clickEffect">
+                                  <p:stCondLst>
+                                    <p:cond delay="500"/>
+                                  </p:stCondLst>
+                                  <p:childTnLst>
+                                    <p:set>
+                                      <p:cBhvr>
+                                        <p:cTn id="11" dur="1" fill="hold">
+                                          <p:stCondLst>
+                                            <p:cond delay="0"/>
+                                          </p:stCondLst>
+                                        </p:cTn>
+                                        <p:tgtEl>
+                                          <p:spTgt spid="3">
+                                            <p:txEl>
+                                              <p:pRg st="0" end="0"/>
+                                            </p:txEl>
+                                          </p:spTgt>
+                                        </p:tgtEl>
+                                        <p:attrNameLst>
+                                          <p:attrName>style.visibility</p:attrName>
+                                        </p:attrNameLst>
+                                      </p:cBhvr>
+                                      <p:to>
+                                        <p:strVal val="visible"/>
+                                      </p:to>
+                                    </p:set>
+                                    <p:animEffect transition="in" filter="fade">
+                                      <p:cBhvr>
+                                        <p:cTn id="12" dur="400"/>
+                                        <p:tgtEl>
+                                          <p:spTgt spid="3">
+                                            <p:txEl>
+                                              <p:pRg st="0" end="0"/>
+                                            </p:txEl>
+                                          </p:spTgt>
+                                        </p:tgtEl>
+                                      </p:cBhvr>
+                                    </p:animEffect>
+                                  </p:childTnLst>
+                                </p:cTn>
+                              </p:par>
+                              <p:par>
+                                <p:cTn id="13" presetID="10" presetClass="entr" presetSubtype="0" fill="hold" grpId="0" nodeType="withEffect">
+                                  <p:stCondLst>
+                                    <p:cond delay="2000"/>
+                                  </p:stCondLst>
+                                  <p:childTnLst>
+                                    <p:set>
+                                      <p:cBhvr>
+                                        <p:cTn id="14" dur="1" fill="hold">
+                                          <p:stCondLst>
+                                            <p:cond delay="0"/>
+                                          </p:stCondLst>
+                                        </p:cTn>
+                                        <p:tgtEl>
+                                          <p:spTgt spid="4">
+                                            <p:txEl>
+                                              <p:pRg st="0" end="0"/>
+                                            </p:txEl>
+                                          </p:spTgt>
+                                        </p:tgtEl>
+                                        <p:attrNameLst>
+                                          <p:attrName>style.visibility</p:attrName>
+                                        </p:attrNameLst>
+                                      </p:cBhvr>
+                                      <p:to>
+                                        <p:strVal val="visible"/>
+                                      </p:to>
+                                    </p:set>
+                                    <p:animEffect transition="in" filter="fade">
+                                      <p:cBhvr>
+                                        <p:cTn id="15" dur="400"/>
+                                        <p:tgtEl>
+                                          <p:spTgt spid="4">
+                                            <p:txEl>
+                                              <p:pRg st="0" end="0"/>
+                                            </p:txEl>
+                                          </p:spTgt>
+                                        </p:tgtEl>
+                                      </p:cBhvr>
+                                    </p:animEffect>
+                                  </p:childTnLst>
+                                </p:cTn>
+                              </p:par>
+                              <p:par>
+                                <p:cTn id="16" presetID="10" presetClass="entr" presetSubtype="0" fill="hold" grpId="0" nodeType="withEffect">
+                                  <p:stCondLst>
+                                    <p:cond delay="2000"/>
+                                  </p:stCondLst>
+                                  <p:childTnLst>
+                                    <p:set>
+                                      <p:cBhvr>
+                                        <p:cTn id="17" dur="1" fill="hold">
+                                          <p:stCondLst>
+                                            <p:cond delay="0"/>
+                                          </p:stCondLst>
+                                        </p:cTn>
+                                        <p:tgtEl>
+                                          <p:spTgt spid="4">
+                                            <p:txEl>
+                                              <p:pRg st="1" end="1"/>
+                                            </p:txEl>
+                                          </p:spTgt>
+                                        </p:tgtEl>
+                                        <p:attrNameLst>
+                                          <p:attrName>style.visibility</p:attrName>
+                                        </p:attrNameLst>
+                                      </p:cBhvr>
+                                      <p:to>
+                                        <p:strVal val="visible"/>
+                                      </p:to>
+                                    </p:set>
+                                    <p:animEffect transition="in" filter="fade">
+                                      <p:cBhvr>
+                                        <p:cTn id="18" dur="400"/>
+                                        <p:tgtEl>
+                                          <p:spTgt spid="4">
+                                            <p:txEl>
+                                              <p:pRg st="1" end="1"/>
+                                            </p:txEl>
+                                          </p:spTgt>
+                                        </p:tgtEl>
+                                      </p:cBhvr>
+                                    </p:animEffect>
+                                  </p:childTnLst>
+                                </p:cTn>
+                              </p:par>
+                              <p:par>
+                                <p:cTn id="19" presetID="10" presetClass="entr" presetSubtype="0" fill="hold" grpId="0" nodeType="withEffect">
+                                  <p:stCondLst>
+                                    <p:cond delay="2000"/>
+                                  </p:stCondLst>
+                                  <p:childTnLst>
+                                    <p:set>
+                                      <p:cBhvr>
+                                        <p:cTn id="20" dur="1" fill="hold">
+                                          <p:stCondLst>
+                                            <p:cond delay="0"/>
+                                          </p:stCondLst>
+                                        </p:cTn>
+                                        <p:tgtEl>
+                                          <p:spTgt spid="4">
+                                            <p:txEl>
+                                              <p:pRg st="2" end="2"/>
+                                            </p:txEl>
+                                          </p:spTgt>
+                                        </p:tgtEl>
+                                        <p:attrNameLst>
+                                          <p:attrName>style.visibility</p:attrName>
+                                        </p:attrNameLst>
+                                      </p:cBhvr>
+                                      <p:to>
+                                        <p:strVal val="visible"/>
+                                      </p:to>
+                                    </p:set>
+                                    <p:animEffect transition="in" filter="fade">
+                                      <p:cBhvr>
+                                        <p:cTn id="21" dur="400"/>
+                                        <p:tgtEl>
+                                          <p:spTgt spid="4">
+                                            <p:txEl>
+                                              <p:pRg st="2" end="2"/>
+                                            </p:txEl>
+                                          </p:spTgt>
+                                        </p:tgtEl>
+                                      </p:cBhvr>
+                                    </p:animEffect>
+                                  </p:childTnLst>
+                                </p:cTn>
+                              </p:par>
+                            </p:childTnLst>
+                          </p:cTn>
+                        </p:par>
+                      </p:childTnLst>
+                    </p:cTn>
+                  </p:par>
+                  <p:par>
+                    <p:cTn id="22" fill="hold">
+                      <p:stCondLst>
+                        <p:cond delay="indefinite"/>
+                      </p:stCondLst>
+                      <p:childTnLst>
+                        <p:par>
+                          <p:cTn id="23" fill="hold">
+                            <p:stCondLst>
+                              <p:cond delay="0"/>
+                            </p:stCondLst>
+                            <p:childTnLst>
+                              <p:par>
+                                <p:cTn id="24" presetID="10" presetClass="entr" presetSubtype="0" fill="hold" grpId="0" nodeType="clickEffect">
+                                  <p:stCondLst>
+                                    <p:cond delay="500"/>
+                                  </p:stCondLst>
+                                  <p:childTnLst>
+                                    <p:set>
+                                      <p:cBhvr>
+                                        <p:cTn id="25" dur="1" fill="hold">
+                                          <p:stCondLst>
+                                            <p:cond delay="0"/>
+                                          </p:stCondLst>
+                                        </p:cTn>
+                                        <p:tgtEl>
+                                          <p:spTgt spid="5">
+                                            <p:txEl>
+                                              <p:pRg st="0" end="0"/>
+                                            </p:txEl>
+                                          </p:spTgt>
+                                        </p:tgtEl>
+                                        <p:attrNameLst>
+                                          <p:attrName>style.visibility</p:attrName>
+                                        </p:attrNameLst>
+                                      </p:cBhvr>
+                                      <p:to>
+                                        <p:strVal val="visible"/>
+                                      </p:to>
+                                    </p:set>
+                                    <p:animEffect transition="in" filter="fade">
+                                      <p:cBhvr>
+                                        <p:cTn id="26" dur="400"/>
+                                        <p:tgtEl>
+                                          <p:spTgt spid="5">
+                                            <p:txEl>
+                                              <p:pRg st="0" end="0"/>
+                                            </p:txEl>
+                                          </p:spTgt>
+                                        </p:tgtEl>
+                                      </p:cBhvr>
+                                    </p:animEffect>
+                                  </p:childTnLst>
+                                </p:cTn>
+                              </p:par>
+                              <p:par>
+                                <p:cTn id="27" presetID="10" presetClass="entr" presetSubtype="0" fill="hold" grpId="0" nodeType="withEffect">
+                                  <p:stCondLst>
+                                    <p:cond delay="2000"/>
+                                  </p:stCondLst>
+                                  <p:childTnLst>
+                                    <p:set>
+                                      <p:cBhvr>
+                                        <p:cTn id="28" dur="1" fill="hold">
+                                          <p:stCondLst>
+                                            <p:cond delay="0"/>
+                                          </p:stCondLst>
+                                        </p:cTn>
+                                        <p:tgtEl>
+                                          <p:spTgt spid="6">
+                                            <p:txEl>
+                                              <p:pRg st="0" end="0"/>
+                                            </p:txEl>
+                                          </p:spTgt>
+                                        </p:tgtEl>
+                                        <p:attrNameLst>
+                                          <p:attrName>style.visibility</p:attrName>
+                                        </p:attrNameLst>
+                                      </p:cBhvr>
+                                      <p:to>
+                                        <p:strVal val="visible"/>
+                                      </p:to>
+                                    </p:set>
+                                    <p:animEffect transition="in" filter="fade">
+                                      <p:cBhvr>
+                                        <p:cTn id="29" dur="400"/>
+                                        <p:tgtEl>
+                                          <p:spTgt spid="6">
+                                            <p:txEl>
+                                              <p:pRg st="0" end="0"/>
+                                            </p:txEl>
+                                          </p:spTgt>
+                                        </p:tgtEl>
+                                      </p:cBhvr>
+                                    </p:animEffect>
+                                  </p:childTnLst>
+                                </p:cTn>
+                              </p:par>
+                              <p:par>
+                                <p:cTn id="30" presetID="10" presetClass="entr" presetSubtype="0" fill="hold" grpId="0" nodeType="withEffect">
+                                  <p:stCondLst>
+                                    <p:cond delay="2000"/>
+                                  </p:stCondLst>
+                                  <p:childTnLst>
+                                    <p:set>
+                                      <p:cBhvr>
+                                        <p:cTn id="31" dur="1" fill="hold">
+                                          <p:stCondLst>
+                                            <p:cond delay="0"/>
+                                          </p:stCondLst>
+                                        </p:cTn>
+                                        <p:tgtEl>
+                                          <p:spTgt spid="6">
+                                            <p:txEl>
+                                              <p:pRg st="1" end="1"/>
+                                            </p:txEl>
+                                          </p:spTgt>
+                                        </p:tgtEl>
+                                        <p:attrNameLst>
+                                          <p:attrName>style.visibility</p:attrName>
+                                        </p:attrNameLst>
+                                      </p:cBhvr>
+                                      <p:to>
+                                        <p:strVal val="visible"/>
+                                      </p:to>
+                                    </p:set>
+                                    <p:animEffect transition="in" filter="fade">
+                                      <p:cBhvr>
+                                        <p:cTn id="32" dur="400"/>
+                                        <p:tgtEl>
+                                          <p:spTgt spid="6">
+                                            <p:txEl>
+                                              <p:pRg st="1" end="1"/>
+                                            </p:txEl>
+                                          </p:spTgt>
+                                        </p:tgtEl>
+                                      </p:cBhvr>
+                                    </p:animEffect>
+                                  </p:childTnLst>
+                                </p:cTn>
+                              </p:par>
+                              <p:par>
+                                <p:cTn id="33" presetID="10" presetClass="entr" presetSubtype="0" fill="hold" grpId="0" nodeType="withEffect">
+                                  <p:stCondLst>
+                                    <p:cond delay="2000"/>
+                                  </p:stCondLst>
+                                  <p:childTnLst>
+                                    <p:set>
+                                      <p:cBhvr>
+                                        <p:cTn id="34" dur="1" fill="hold">
+                                          <p:stCondLst>
+                                            <p:cond delay="0"/>
+                                          </p:stCondLst>
+                                        </p:cTn>
+                                        <p:tgtEl>
+                                          <p:spTgt spid="6">
+                                            <p:txEl>
+                                              <p:pRg st="2" end="2"/>
+                                            </p:txEl>
+                                          </p:spTgt>
+                                        </p:tgtEl>
+                                        <p:attrNameLst>
+                                          <p:attrName>style.visibility</p:attrName>
+                                        </p:attrNameLst>
+                                      </p:cBhvr>
+                                      <p:to>
+                                        <p:strVal val="visible"/>
+                                      </p:to>
+                                    </p:set>
+                                    <p:animEffect transition="in" filter="fade">
+                                      <p:cBhvr>
+                                        <p:cTn id="35" dur="400"/>
+                                        <p:tgtEl>
+                                          <p:spTgt spid="6">
+                                            <p:txEl>
+                                              <p:pRg st="2" end="2"/>
+                                            </p:txEl>
+                                          </p:spTgt>
+                                        </p:tgtEl>
+                                      </p:cBhvr>
+                                    </p:animEffect>
+                                  </p:childTnLst>
+                                </p:cTn>
+                              </p:par>
+                            </p:childTnLst>
+                          </p:cTn>
+                        </p:par>
+                      </p:childTnLst>
+                    </p:cTn>
+                  </p:par>
+                </p:childTnLst>
+              </p:cTn>
+              <p:prevCondLst>
+                <p:cond evt="onPrev" delay="0">
+                  <p:tgtEl>
+                    <p:sldTgt/>
+                  </p:tgtEl>
+                </p:cond>
+              </p:prevCondLst>
+              <p:nextCondLst>
+                <p:cond evt="onNext" delay="0">
+                  <p:tgtEl>
+                    <p:sldTgt/>
+                  </p:tgtEl>
+                </p:cond>
+              </p:nextCondLst>
+            </p:seq>
+          </p:childTnLst>
+        </p:cTn>
+      </p:par>
+    </p:tnLst>
+    <p:bldLst>
+      <p:bldP spid="2" grpId="0"/>
+      <p:bldP spid="3" grpId="0" build="p"/>
+      <p:bldP spid="4" grpId="0" build="p"/>
+      <p:bldP spid="5" grpId="0" build="p"/>
+      <p:bldP spid="6" grpId="0" build="p"/>
+    </p:bldLst>
+  </p:timing>
 </p:sld>
 </file>
 
 <file path=ppt/slides/slide6.xml><?xml version="1.0" encoding="utf-8"?>
 <p:sld xmlns:a="http://schemas.openxmlformats.org/drawingml/2006/main" xmlns:r="http://schemas.openxmlformats.org/officeDocument/2006/relationships" xmlns:p="http://schemas.openxmlformats.org/presentationml/2006/main">
   <p:cSld>
+    <p:bg>
+      <p:bgPr>
+        <a:solidFill>
+          <a:schemeClr val="bg1"/>
+        </a:solidFill>
+        <a:effectLst/>
+      </p:bgPr>
+    </p:bg>
     <p:spTree>
       <p:nvGrpSpPr>
-        <p:cNvPr id="1" name=""/>
+        <p:cNvPr id="1" name="">
+          <a:extLst>
+            <a:ext uri="{FF2B5EF4-FFF2-40B4-BE49-F238E27FC236}">
+              <a16:creationId xmlns:a16="http://schemas.microsoft.com/office/drawing/2014/main" id="{8624F778-81C0-88BB-BF15-48744463E4D9}"/>
+            </a:ext>
+          </a:extLst>
+        </p:cNvPr>
         <p:cNvGrpSpPr/>
         <p:nvPr/>
       </p:nvGrpSpPr>
@@ -4749,24 +6765,41 @@
       </p:grpSpPr>
       <p:sp>
         <p:nvSpPr>
-          <p:cNvPr id="3" name="Rounded Rectangle 24">
+          <p:cNvPr id="8" name="Rectangle 7">
             <a:extLst>
               <a:ext uri="{FF2B5EF4-FFF2-40B4-BE49-F238E27FC236}">
-                <a16:creationId xmlns:a16="http://schemas.microsoft.com/office/drawing/2014/main" id="{C78BCB4B-3E01-C2DF-E355-5735D1CFF239}"/>
+                <a16:creationId xmlns:a16="http://schemas.microsoft.com/office/drawing/2014/main" id="{E38F5530-DA31-4B62-8DF9-56A1A3B6B614}"/>
+              </a:ext>
+              <a:ext uri="{C183D7F6-B498-43B3-948B-1728B52AA6E4}">
+                <adec:decorative xmlns:adec="http://schemas.microsoft.com/office/drawing/2017/decorative" val="1"/>
               </a:ext>
             </a:extLst>
           </p:cNvPr>
-          <p:cNvSpPr/>
-          <p:nvPr/>
+          <p:cNvSpPr>
+            <a:spLocks noGrp="1" noRot="1" noChangeAspect="1" noMove="1" noResize="1" noEditPoints="1" noAdjustHandles="1" noChangeArrowheads="1" noChangeShapeType="1" noTextEdit="1"/>
+          </p:cNvSpPr>
+          <p:nvPr>
+            <p:extLst>
+              <p:ext uri="{386F3935-93C4-4BCD-93E2-E3B085C9AB24}">
+                <p16:designElem xmlns:p16="http://schemas.microsoft.com/office/powerpoint/2015/main" val="1"/>
+              </p:ext>
+            </p:extLst>
+          </p:nvPr>
         </p:nvSpPr>
         <p:spPr>
           <a:xfrm>
-            <a:off x="1150706" y="768096"/>
-            <a:ext cx="9300886" cy="5138928"/>
+            <a:off x="3048" y="0"/>
+            <a:ext cx="12188952" cy="6858000"/>
           </a:xfrm>
-          <a:prstGeom prst="roundRect">
+          <a:prstGeom prst="rect">
             <a:avLst/>
           </a:prstGeom>
+          <a:solidFill>
+            <a:schemeClr val="tx2"/>
+          </a:solidFill>
+          <a:ln>
+            <a:noFill/>
+          </a:ln>
         </p:spPr>
         <p:style>
           <a:lnRef idx="2">
@@ -4789,74 +6822,49 @@
           <a:lstStyle/>
           <a:p>
             <a:pPr algn="ctr"/>
-            <a:r>
-              <a:rPr lang="en-US" dirty="0"/>
-              <a:t>During your presentation, identify what features is each pair of scenario about, which user group(s) are going to be benefiting from the features of the THEIA app. </a:t>
-            </a:r>
-          </a:p>
-          <a:p>
-            <a:pPr algn="ctr"/>
-            <a:endParaRPr lang="en-US" dirty="0"/>
-          </a:p>
-          <a:p>
-            <a:pPr algn="ctr"/>
-            <a:r>
-              <a:rPr lang="en-US" dirty="0"/>
-              <a:t>Explain clearly, how the user would carry out a certain scenario (i.e. Navigation) without the THEIA app (AS-IS), and what the app could do to make it “better” for the user(s) (TO-BE). </a:t>
-            </a:r>
+            <a:endParaRPr lang="en-US"/>
           </a:p>
         </p:txBody>
       </p:sp>
-    </p:spTree>
-    <p:extLst>
-      <p:ext uri="{BB962C8B-B14F-4D97-AF65-F5344CB8AC3E}">
-        <p14:creationId xmlns:p14="http://schemas.microsoft.com/office/powerpoint/2010/main" val="2111641846"/>
-      </p:ext>
-    </p:extLst>
-  </p:cSld>
-  <p:clrMapOvr>
-    <a:masterClrMapping/>
-  </p:clrMapOvr>
-</p:sld>
-</file>
-
-<file path=ppt/slides/slide7.xml><?xml version="1.0" encoding="utf-8"?>
-<p:sld xmlns:a="http://schemas.openxmlformats.org/drawingml/2006/main" xmlns:r="http://schemas.openxmlformats.org/officeDocument/2006/relationships" xmlns:p="http://schemas.openxmlformats.org/presentationml/2006/main">
-  <p:cSld>
-    <p:spTree>
-      <p:nvGrpSpPr>
-        <p:cNvPr id="1" name=""/>
-        <p:cNvGrpSpPr/>
-        <p:nvPr/>
-      </p:nvGrpSpPr>
-      <p:grpSpPr>
-        <a:xfrm>
-          <a:off x="0" y="0"/>
-          <a:ext cx="0" cy="0"/>
-          <a:chOff x="0" y="0"/>
-          <a:chExt cx="0" cy="0"/>
-        </a:xfrm>
-      </p:grpSpPr>
       <p:sp>
         <p:nvSpPr>
-          <p:cNvPr id="4" name="Rounded Rectangle 1">
+          <p:cNvPr id="10" name="Rectangle 9">
             <a:extLst>
               <a:ext uri="{FF2B5EF4-FFF2-40B4-BE49-F238E27FC236}">
-                <a16:creationId xmlns:a16="http://schemas.microsoft.com/office/drawing/2014/main" id="{CA077796-0C99-4A05-86E9-E608F3560883}"/>
+                <a16:creationId xmlns:a16="http://schemas.microsoft.com/office/drawing/2014/main" id="{4AEFAF95-013F-4375-AAF4-033AC93F5550}"/>
+              </a:ext>
+              <a:ext uri="{C183D7F6-B498-43B3-948B-1728B52AA6E4}">
+                <adec:decorative xmlns:adec="http://schemas.microsoft.com/office/drawing/2017/decorative" val="1"/>
               </a:ext>
             </a:extLst>
           </p:cNvPr>
-          <p:cNvSpPr/>
-          <p:nvPr/>
+          <p:cNvSpPr>
+            <a:spLocks noGrp="1" noRot="1" noChangeAspect="1" noMove="1" noResize="1" noEditPoints="1" noAdjustHandles="1" noChangeArrowheads="1" noChangeShapeType="1" noTextEdit="1"/>
+          </p:cNvSpPr>
+          <p:nvPr>
+            <p:extLst>
+              <p:ext uri="{386F3935-93C4-4BCD-93E2-E3B085C9AB24}">
+                <p16:designElem xmlns:p16="http://schemas.microsoft.com/office/powerpoint/2015/main" val="1"/>
+              </p:ext>
+            </p:extLst>
+          </p:nvPr>
         </p:nvSpPr>
         <p:spPr>
           <a:xfrm>
-            <a:off x="1489753" y="768096"/>
-            <a:ext cx="8928385" cy="5138928"/>
+            <a:off x="0" y="0"/>
+            <a:ext cx="12188952" cy="6858000"/>
           </a:xfrm>
-          <a:prstGeom prst="roundRect">
+          <a:prstGeom prst="rect">
             <a:avLst/>
           </a:prstGeom>
+          <a:solidFill>
+            <a:schemeClr val="tx1">
+              <a:alpha val="53000"/>
+            </a:schemeClr>
+          </a:solidFill>
+          <a:ln>
+            <a:noFill/>
+          </a:ln>
         </p:spPr>
         <p:style>
           <a:lnRef idx="2">
@@ -4879,133 +6887,552 @@
           <a:lstStyle/>
           <a:p>
             <a:pPr algn="ctr"/>
-            <a:r>
-              <a:rPr lang="en-US" sz="1800" b="1" dirty="0">
-                <a:solidFill>
-                  <a:srgbClr val="002060"/>
-                </a:solidFill>
-                <a:highlight>
-                  <a:srgbClr val="FFFF00"/>
-                </a:highlight>
-              </a:rPr>
-              <a:t>Out of the 4 pairs of scenarios above, pick the top priority TO-BE scenario, and perform further analysis using the types of questions presented in Lesson 6.</a:t>
-            </a:r>
-          </a:p>
-          <a:p>
-            <a:pPr algn="ctr"/>
-            <a:endParaRPr lang="en-US" b="1" dirty="0">
-              <a:solidFill>
-                <a:srgbClr val="002060"/>
-              </a:solidFill>
-              <a:highlight>
-                <a:srgbClr val="FFFF00"/>
-              </a:highlight>
-            </a:endParaRPr>
-          </a:p>
-          <a:p>
-            <a:pPr algn="ctr"/>
-            <a:r>
-              <a:rPr lang="en-US" sz="1800" b="1" dirty="0">
-                <a:solidFill>
-                  <a:srgbClr val="002060"/>
-                </a:solidFill>
-                <a:highlight>
-                  <a:srgbClr val="FFFF00"/>
-                </a:highlight>
-              </a:rPr>
-              <a:t>This </a:t>
-            </a:r>
-            <a:r>
-              <a:rPr lang="en-US" b="1" dirty="0">
-                <a:solidFill>
-                  <a:srgbClr val="002060"/>
-                </a:solidFill>
-                <a:highlight>
-                  <a:srgbClr val="FFFF00"/>
-                </a:highlight>
-              </a:rPr>
-              <a:t>analysis is </a:t>
-            </a:r>
-            <a:r>
-              <a:rPr lang="en-US" b="1">
-                <a:solidFill>
-                  <a:srgbClr val="002060"/>
-                </a:solidFill>
-                <a:highlight>
-                  <a:srgbClr val="FFFF00"/>
-                </a:highlight>
-              </a:rPr>
-              <a:t>mandatory and </a:t>
-            </a:r>
-            <a:r>
-              <a:rPr lang="en-US" sz="1800" b="1">
-                <a:solidFill>
-                  <a:srgbClr val="002060"/>
-                </a:solidFill>
-                <a:highlight>
-                  <a:srgbClr val="FFFF00"/>
-                </a:highlight>
-              </a:rPr>
-              <a:t>should </a:t>
-            </a:r>
-            <a:r>
-              <a:rPr lang="en-US" sz="1800" b="1" dirty="0">
-                <a:solidFill>
-                  <a:srgbClr val="002060"/>
-                </a:solidFill>
-                <a:highlight>
-                  <a:srgbClr val="FFFF00"/>
-                </a:highlight>
-              </a:rPr>
-              <a:t>be at least one slide.</a:t>
-            </a:r>
+            <a:endParaRPr lang="en-US"/>
           </a:p>
         </p:txBody>
       </p:sp>
-    </p:spTree>
-    <p:extLst>
-      <p:ext uri="{BB962C8B-B14F-4D97-AF65-F5344CB8AC3E}">
-        <p14:creationId xmlns:p14="http://schemas.microsoft.com/office/powerpoint/2010/main" val="395913222"/>
-      </p:ext>
-    </p:extLst>
-  </p:cSld>
-  <p:clrMapOvr>
-    <a:masterClrMapping/>
-  </p:clrMapOvr>
-</p:sld>
-</file>
-
-<file path=ppt/slides/slide8.xml><?xml version="1.0" encoding="utf-8"?>
-<p:sld xmlns:a="http://schemas.openxmlformats.org/drawingml/2006/main" xmlns:r="http://schemas.openxmlformats.org/officeDocument/2006/relationships" xmlns:p="http://schemas.openxmlformats.org/presentationml/2006/main">
-  <p:cSld>
-    <p:spTree>
-      <p:nvGrpSpPr>
-        <p:cNvPr id="1" name=""/>
-        <p:cNvGrpSpPr/>
-        <p:nvPr/>
-      </p:nvGrpSpPr>
-      <p:grpSpPr>
-        <a:xfrm>
-          <a:off x="0" y="0"/>
-          <a:ext cx="0" cy="0"/>
-          <a:chOff x="0" y="0"/>
-          <a:chExt cx="0" cy="0"/>
-        </a:xfrm>
-      </p:grpSpPr>
+      <p:grpSp>
+        <p:nvGrpSpPr>
+          <p:cNvPr id="12" name="Group 11">
+            <a:extLst>
+              <a:ext uri="{FF2B5EF4-FFF2-40B4-BE49-F238E27FC236}">
+                <a16:creationId xmlns:a16="http://schemas.microsoft.com/office/drawing/2014/main" id="{68735E28-7236-42D8-A5E1-A0F302FE879A}"/>
+              </a:ext>
+              <a:ext uri="{C183D7F6-B498-43B3-948B-1728B52AA6E4}">
+                <adec:decorative xmlns:adec="http://schemas.microsoft.com/office/drawing/2017/decorative" val="1"/>
+              </a:ext>
+            </a:extLst>
+          </p:cNvPr>
+          <p:cNvGrpSpPr>
+            <a:grpSpLocks noGrp="1" noUngrp="1" noRot="1" noChangeAspect="1" noMove="1" noResize="1"/>
+          </p:cNvGrpSpPr>
+          <p:nvPr>
+            <p:extLst>
+              <p:ext uri="{386F3935-93C4-4BCD-93E2-E3B085C9AB24}">
+                <p16:designElem xmlns:p16="http://schemas.microsoft.com/office/powerpoint/2015/main" val="1"/>
+              </p:ext>
+            </p:extLst>
+          </p:nvPr>
+        </p:nvGrpSpPr>
+        <p:grpSpPr>
+          <a:xfrm>
+            <a:off x="1" y="2075420"/>
+            <a:ext cx="12048729" cy="4093306"/>
+            <a:chOff x="1" y="2075420"/>
+            <a:chExt cx="12048729" cy="4093306"/>
+          </a:xfrm>
+        </p:grpSpPr>
+        <p:sp>
+          <p:nvSpPr>
+            <p:cNvPr id="13" name="Oval 12">
+              <a:extLst>
+                <a:ext uri="{FF2B5EF4-FFF2-40B4-BE49-F238E27FC236}">
+                  <a16:creationId xmlns:a16="http://schemas.microsoft.com/office/drawing/2014/main" id="{F3642881-D4B2-4CC2-A287-0FA0006F3AC8}"/>
+                </a:ext>
+                <a:ext uri="{C183D7F6-B498-43B3-948B-1728B52AA6E4}">
+                  <adec:decorative xmlns:adec="http://schemas.microsoft.com/office/drawing/2017/decorative" val="1"/>
+                </a:ext>
+              </a:extLst>
+            </p:cNvPr>
+            <p:cNvSpPr/>
+            <p:nvPr>
+              <p:extLst>
+                <p:ext uri="{386F3935-93C4-4BCD-93E2-E3B085C9AB24}">
+                  <p16:designElem xmlns:p16="http://schemas.microsoft.com/office/powerpoint/2015/main" val="1"/>
+                </p:ext>
+              </p:extLst>
+            </p:nvPr>
+          </p:nvSpPr>
+          <p:spPr>
+            <a:xfrm rot="4500000">
+              <a:off x="7942191" y="2507571"/>
+              <a:ext cx="3563871" cy="3563871"/>
+            </a:xfrm>
+            <a:prstGeom prst="ellipse">
+              <a:avLst/>
+            </a:prstGeom>
+            <a:noFill/>
+            <a:ln w="31750">
+              <a:gradFill>
+                <a:gsLst>
+                  <a:gs pos="0">
+                    <a:schemeClr val="tx2">
+                      <a:lumMod val="60000"/>
+                      <a:lumOff val="40000"/>
+                      <a:alpha val="10000"/>
+                    </a:schemeClr>
+                  </a:gs>
+                  <a:gs pos="100000">
+                    <a:schemeClr val="tx2">
+                      <a:lumMod val="50000"/>
+                      <a:alpha val="20000"/>
+                    </a:schemeClr>
+                  </a:gs>
+                </a:gsLst>
+                <a:lin ang="5400000" scaled="1"/>
+              </a:gradFill>
+              <a:prstDash val="sysDot"/>
+            </a:ln>
+          </p:spPr>
+          <p:style>
+            <a:lnRef idx="2">
+              <a:schemeClr val="accent1">
+                <a:shade val="50000"/>
+              </a:schemeClr>
+            </a:lnRef>
+            <a:fillRef idx="1">
+              <a:schemeClr val="accent1"/>
+            </a:fillRef>
+            <a:effectRef idx="0">
+              <a:schemeClr val="accent1"/>
+            </a:effectRef>
+            <a:fontRef idx="minor">
+              <a:schemeClr val="lt1"/>
+            </a:fontRef>
+          </p:style>
+          <p:txBody>
+            <a:bodyPr rtlCol="0" anchor="ctr"/>
+            <a:lstStyle/>
+            <a:p>
+              <a:pPr algn="ctr"/>
+              <a:endParaRPr lang="en-US"/>
+            </a:p>
+          </p:txBody>
+        </p:sp>
+        <p:sp>
+          <p:nvSpPr>
+            <p:cNvPr id="14" name="Oval 13">
+              <a:extLst>
+                <a:ext uri="{FF2B5EF4-FFF2-40B4-BE49-F238E27FC236}">
+                  <a16:creationId xmlns:a16="http://schemas.microsoft.com/office/drawing/2014/main" id="{901C50C6-CC43-4D9E-B2AB-F373712E43AF}"/>
+                </a:ext>
+                <a:ext uri="{C183D7F6-B498-43B3-948B-1728B52AA6E4}">
+                  <adec:decorative xmlns:adec="http://schemas.microsoft.com/office/drawing/2017/decorative" val="1"/>
+                </a:ext>
+              </a:extLst>
+            </p:cNvPr>
+            <p:cNvSpPr/>
+            <p:nvPr>
+              <p:extLst>
+                <p:ext uri="{386F3935-93C4-4BCD-93E2-E3B085C9AB24}">
+                  <p16:designElem xmlns:p16="http://schemas.microsoft.com/office/powerpoint/2015/main" val="1"/>
+                </p:ext>
+              </p:extLst>
+            </p:nvPr>
+          </p:nvSpPr>
+          <p:spPr>
+            <a:xfrm rot="16200000">
+              <a:off x="10435065" y="4048931"/>
+              <a:ext cx="1381607" cy="1381607"/>
+            </a:xfrm>
+            <a:prstGeom prst="ellipse">
+              <a:avLst/>
+            </a:prstGeom>
+            <a:noFill/>
+            <a:ln w="31750">
+              <a:gradFill>
+                <a:gsLst>
+                  <a:gs pos="0">
+                    <a:schemeClr val="tx2">
+                      <a:lumMod val="60000"/>
+                      <a:lumOff val="40000"/>
+                      <a:alpha val="20000"/>
+                    </a:schemeClr>
+                  </a:gs>
+                  <a:gs pos="100000">
+                    <a:schemeClr val="tx2">
+                      <a:lumMod val="50000"/>
+                      <a:alpha val="20000"/>
+                    </a:schemeClr>
+                  </a:gs>
+                </a:gsLst>
+                <a:lin ang="5400000" scaled="1"/>
+              </a:gradFill>
+              <a:prstDash val="sysDot"/>
+            </a:ln>
+          </p:spPr>
+          <p:style>
+            <a:lnRef idx="2">
+              <a:schemeClr val="accent1">
+                <a:shade val="50000"/>
+              </a:schemeClr>
+            </a:lnRef>
+            <a:fillRef idx="1">
+              <a:schemeClr val="accent1"/>
+            </a:fillRef>
+            <a:effectRef idx="0">
+              <a:schemeClr val="accent1"/>
+            </a:effectRef>
+            <a:fontRef idx="minor">
+              <a:schemeClr val="lt1"/>
+            </a:fontRef>
+          </p:style>
+          <p:txBody>
+            <a:bodyPr rtlCol="0" anchor="ctr"/>
+            <a:lstStyle/>
+            <a:p>
+              <a:pPr algn="ctr"/>
+              <a:endParaRPr lang="en-US"/>
+            </a:p>
+          </p:txBody>
+        </p:sp>
+        <p:sp>
+          <p:nvSpPr>
+            <p:cNvPr id="15" name="Oval 14">
+              <a:extLst>
+                <a:ext uri="{FF2B5EF4-FFF2-40B4-BE49-F238E27FC236}">
+                  <a16:creationId xmlns:a16="http://schemas.microsoft.com/office/drawing/2014/main" id="{26E7187D-0938-461D-BFC5-89EEF3506225}"/>
+                </a:ext>
+                <a:ext uri="{C183D7F6-B498-43B3-948B-1728B52AA6E4}">
+                  <adec:decorative xmlns:adec="http://schemas.microsoft.com/office/drawing/2017/decorative" val="1"/>
+                </a:ext>
+              </a:extLst>
+            </p:cNvPr>
+            <p:cNvSpPr/>
+            <p:nvPr>
+              <p:extLst>
+                <p:ext uri="{386F3935-93C4-4BCD-93E2-E3B085C9AB24}">
+                  <p16:designElem xmlns:p16="http://schemas.microsoft.com/office/powerpoint/2015/main" val="1"/>
+                </p:ext>
+              </p:extLst>
+            </p:nvPr>
+          </p:nvSpPr>
+          <p:spPr>
+            <a:xfrm rot="16200000">
+              <a:off x="1" y="2075420"/>
+              <a:ext cx="3144364" cy="3144364"/>
+            </a:xfrm>
+            <a:prstGeom prst="ellipse">
+              <a:avLst/>
+            </a:prstGeom>
+            <a:gradFill>
+              <a:gsLst>
+                <a:gs pos="0">
+                  <a:schemeClr val="tx2">
+                    <a:lumMod val="75000"/>
+                    <a:alpha val="20000"/>
+                  </a:schemeClr>
+                </a:gs>
+                <a:gs pos="100000">
+                  <a:schemeClr val="tx2">
+                    <a:lumMod val="50000"/>
+                    <a:alpha val="10000"/>
+                  </a:schemeClr>
+                </a:gs>
+              </a:gsLst>
+              <a:lin ang="5400000" scaled="1"/>
+            </a:gradFill>
+            <a:ln>
+              <a:noFill/>
+            </a:ln>
+          </p:spPr>
+          <p:style>
+            <a:lnRef idx="2">
+              <a:schemeClr val="accent1">
+                <a:shade val="50000"/>
+              </a:schemeClr>
+            </a:lnRef>
+            <a:fillRef idx="1">
+              <a:schemeClr val="accent1"/>
+            </a:fillRef>
+            <a:effectRef idx="0">
+              <a:schemeClr val="accent1"/>
+            </a:effectRef>
+            <a:fontRef idx="minor">
+              <a:schemeClr val="lt1"/>
+            </a:fontRef>
+          </p:style>
+          <p:txBody>
+            <a:bodyPr rtlCol="0" anchor="ctr"/>
+            <a:lstStyle/>
+            <a:p>
+              <a:pPr algn="ctr"/>
+              <a:endParaRPr lang="en-US"/>
+            </a:p>
+          </p:txBody>
+        </p:sp>
+        <p:sp>
+          <p:nvSpPr>
+            <p:cNvPr id="16" name="Oval 15">
+              <a:extLst>
+                <a:ext uri="{FF2B5EF4-FFF2-40B4-BE49-F238E27FC236}">
+                  <a16:creationId xmlns:a16="http://schemas.microsoft.com/office/drawing/2014/main" id="{934C951A-9754-438B-9D57-E6B93B6E4C24}"/>
+                </a:ext>
+                <a:ext uri="{C183D7F6-B498-43B3-948B-1728B52AA6E4}">
+                  <adec:decorative xmlns:adec="http://schemas.microsoft.com/office/drawing/2017/decorative" val="1"/>
+                </a:ext>
+              </a:extLst>
+            </p:cNvPr>
+            <p:cNvSpPr/>
+            <p:nvPr>
+              <p:extLst>
+                <p:ext uri="{386F3935-93C4-4BCD-93E2-E3B085C9AB24}">
+                  <p16:designElem xmlns:p16="http://schemas.microsoft.com/office/powerpoint/2015/main" val="1"/>
+                </p:ext>
+              </p:extLst>
+            </p:nvPr>
+          </p:nvSpPr>
+          <p:spPr>
+            <a:xfrm rot="12600000">
+              <a:off x="10150845" y="4270841"/>
+              <a:ext cx="1897885" cy="1897885"/>
+            </a:xfrm>
+            <a:prstGeom prst="ellipse">
+              <a:avLst/>
+            </a:prstGeom>
+            <a:gradFill>
+              <a:gsLst>
+                <a:gs pos="0">
+                  <a:schemeClr val="tx2">
+                    <a:lumMod val="75000"/>
+                    <a:alpha val="10000"/>
+                  </a:schemeClr>
+                </a:gs>
+                <a:gs pos="100000">
+                  <a:schemeClr val="tx2">
+                    <a:lumMod val="75000"/>
+                    <a:alpha val="20000"/>
+                  </a:schemeClr>
+                </a:gs>
+              </a:gsLst>
+              <a:lin ang="5400000" scaled="1"/>
+            </a:gradFill>
+            <a:ln>
+              <a:noFill/>
+            </a:ln>
+          </p:spPr>
+          <p:style>
+            <a:lnRef idx="2">
+              <a:schemeClr val="accent1">
+                <a:shade val="50000"/>
+              </a:schemeClr>
+            </a:lnRef>
+            <a:fillRef idx="1">
+              <a:schemeClr val="accent1"/>
+            </a:fillRef>
+            <a:effectRef idx="0">
+              <a:schemeClr val="accent1"/>
+            </a:effectRef>
+            <a:fontRef idx="minor">
+              <a:schemeClr val="lt1"/>
+            </a:fontRef>
+          </p:style>
+          <p:txBody>
+            <a:bodyPr rtlCol="0" anchor="ctr"/>
+            <a:lstStyle/>
+            <a:p>
+              <a:pPr algn="ctr"/>
+              <a:endParaRPr lang="en-US" dirty="0"/>
+            </a:p>
+          </p:txBody>
+        </p:sp>
+        <p:sp>
+          <p:nvSpPr>
+            <p:cNvPr id="17" name="Oval 16">
+              <a:extLst>
+                <a:ext uri="{FF2B5EF4-FFF2-40B4-BE49-F238E27FC236}">
+                  <a16:creationId xmlns:a16="http://schemas.microsoft.com/office/drawing/2014/main" id="{FCCC8FCE-0563-4147-B2A2-7C81702EBE88}"/>
+                </a:ext>
+                <a:ext uri="{C183D7F6-B498-43B3-948B-1728B52AA6E4}">
+                  <adec:decorative xmlns:adec="http://schemas.microsoft.com/office/drawing/2017/decorative" val="1"/>
+                </a:ext>
+              </a:extLst>
+            </p:cNvPr>
+            <p:cNvSpPr/>
+            <p:nvPr>
+              <p:extLst>
+                <p:ext uri="{386F3935-93C4-4BCD-93E2-E3B085C9AB24}">
+                  <p16:designElem xmlns:p16="http://schemas.microsoft.com/office/powerpoint/2015/main" val="1"/>
+                </p:ext>
+              </p:extLst>
+            </p:nvPr>
+          </p:nvSpPr>
+          <p:spPr>
+            <a:xfrm rot="4500000">
+              <a:off x="2046780" y="3040492"/>
+              <a:ext cx="2579322" cy="2579322"/>
+            </a:xfrm>
+            <a:prstGeom prst="ellipse">
+              <a:avLst/>
+            </a:prstGeom>
+            <a:noFill/>
+            <a:ln w="31750">
+              <a:gradFill>
+                <a:gsLst>
+                  <a:gs pos="0">
+                    <a:schemeClr val="tx2">
+                      <a:lumMod val="60000"/>
+                      <a:lumOff val="40000"/>
+                      <a:alpha val="20000"/>
+                    </a:schemeClr>
+                  </a:gs>
+                  <a:gs pos="100000">
+                    <a:schemeClr val="tx2">
+                      <a:lumMod val="50000"/>
+                      <a:alpha val="20000"/>
+                    </a:schemeClr>
+                  </a:gs>
+                </a:gsLst>
+                <a:lin ang="5400000" scaled="1"/>
+              </a:gradFill>
+              <a:prstDash val="sysDot"/>
+            </a:ln>
+          </p:spPr>
+          <p:style>
+            <a:lnRef idx="2">
+              <a:schemeClr val="accent1">
+                <a:shade val="50000"/>
+              </a:schemeClr>
+            </a:lnRef>
+            <a:fillRef idx="1">
+              <a:schemeClr val="accent1"/>
+            </a:fillRef>
+            <a:effectRef idx="0">
+              <a:schemeClr val="accent1"/>
+            </a:effectRef>
+            <a:fontRef idx="minor">
+              <a:schemeClr val="lt1"/>
+            </a:fontRef>
+          </p:style>
+          <p:txBody>
+            <a:bodyPr rtlCol="0" anchor="ctr"/>
+            <a:lstStyle/>
+            <a:p>
+              <a:pPr algn="ctr"/>
+              <a:endParaRPr lang="en-US"/>
+            </a:p>
+          </p:txBody>
+        </p:sp>
+        <p:sp>
+          <p:nvSpPr>
+            <p:cNvPr id="18" name="Oval 17">
+              <a:extLst>
+                <a:ext uri="{FF2B5EF4-FFF2-40B4-BE49-F238E27FC236}">
+                  <a16:creationId xmlns:a16="http://schemas.microsoft.com/office/drawing/2014/main" id="{5E68FC26-41A9-4C82-BE7F-E9344CDC4F9F}"/>
+                </a:ext>
+                <a:ext uri="{C183D7F6-B498-43B3-948B-1728B52AA6E4}">
+                  <adec:decorative xmlns:adec="http://schemas.microsoft.com/office/drawing/2017/decorative" val="1"/>
+                </a:ext>
+              </a:extLst>
+            </p:cNvPr>
+            <p:cNvSpPr/>
+            <p:nvPr>
+              <p:extLst>
+                <p:ext uri="{386F3935-93C4-4BCD-93E2-E3B085C9AB24}">
+                  <p16:designElem xmlns:p16="http://schemas.microsoft.com/office/powerpoint/2015/main" val="1"/>
+                </p:ext>
+              </p:extLst>
+            </p:nvPr>
+          </p:nvSpPr>
+          <p:spPr>
+            <a:xfrm rot="4500000">
+              <a:off x="2224640" y="3193975"/>
+              <a:ext cx="2243193" cy="2243193"/>
+            </a:xfrm>
+            <a:prstGeom prst="ellipse">
+              <a:avLst/>
+            </a:prstGeom>
+            <a:noFill/>
+            <a:ln w="31750">
+              <a:gradFill>
+                <a:gsLst>
+                  <a:gs pos="0">
+                    <a:schemeClr val="tx2">
+                      <a:lumMod val="60000"/>
+                      <a:lumOff val="40000"/>
+                      <a:alpha val="10000"/>
+                    </a:schemeClr>
+                  </a:gs>
+                  <a:gs pos="100000">
+                    <a:schemeClr val="tx2">
+                      <a:lumMod val="50000"/>
+                      <a:alpha val="10000"/>
+                    </a:schemeClr>
+                  </a:gs>
+                </a:gsLst>
+                <a:lin ang="5400000" scaled="1"/>
+              </a:gradFill>
+            </a:ln>
+          </p:spPr>
+          <p:style>
+            <a:lnRef idx="2">
+              <a:schemeClr val="accent1">
+                <a:shade val="50000"/>
+              </a:schemeClr>
+            </a:lnRef>
+            <a:fillRef idx="1">
+              <a:schemeClr val="accent1"/>
+            </a:fillRef>
+            <a:effectRef idx="0">
+              <a:schemeClr val="accent1"/>
+            </a:effectRef>
+            <a:fontRef idx="minor">
+              <a:schemeClr val="lt1"/>
+            </a:fontRef>
+          </p:style>
+          <p:txBody>
+            <a:bodyPr rtlCol="0" anchor="ctr"/>
+            <a:lstStyle/>
+            <a:p>
+              <a:pPr algn="ctr"/>
+              <a:endParaRPr lang="en-US"/>
+            </a:p>
+          </p:txBody>
+        </p:sp>
+      </p:grpSp>
       <p:sp>
         <p:nvSpPr>
-          <p:cNvPr id="2" name="Rounded Rectangle 1"/>
-          <p:cNvSpPr/>
-          <p:nvPr/>
+          <p:cNvPr id="20" name="Rectangle 19">
+            <a:extLst>
+              <a:ext uri="{FF2B5EF4-FFF2-40B4-BE49-F238E27FC236}">
+                <a16:creationId xmlns:a16="http://schemas.microsoft.com/office/drawing/2014/main" id="{FBB336D1-2562-4680-B29B-E22C603C0ED9}"/>
+              </a:ext>
+              <a:ext uri="{C183D7F6-B498-43B3-948B-1728B52AA6E4}">
+                <adec:decorative xmlns:adec="http://schemas.microsoft.com/office/drawing/2017/decorative" val="1"/>
+              </a:ext>
+            </a:extLst>
+          </p:cNvPr>
+          <p:cNvSpPr>
+            <a:spLocks noGrp="1" noRot="1" noChangeAspect="1" noMove="1" noResize="1" noEditPoints="1" noAdjustHandles="1" noChangeArrowheads="1" noChangeShapeType="1" noTextEdit="1"/>
+          </p:cNvSpPr>
+          <p:nvPr>
+            <p:extLst>
+              <p:ext uri="{386F3935-93C4-4BCD-93E2-E3B085C9AB24}">
+                <p16:designElem xmlns:p16="http://schemas.microsoft.com/office/powerpoint/2015/main" val="1"/>
+              </p:ext>
+            </p:extLst>
+          </p:nvPr>
         </p:nvSpPr>
         <p:spPr>
-          <a:xfrm>
-            <a:off x="657547" y="768096"/>
-            <a:ext cx="10900880" cy="5138928"/>
+          <a:xfrm rot="16200000">
+            <a:off x="10438146" y="1042605"/>
+            <a:ext cx="2796461" cy="711252"/>
           </a:xfrm>
-          <a:prstGeom prst="roundRect">
+          <a:prstGeom prst="rect">
             <a:avLst/>
           </a:prstGeom>
+          <a:gradFill flip="none" rotWithShape="1">
+            <a:gsLst>
+              <a:gs pos="0">
+                <a:schemeClr val="tx2">
+                  <a:lumMod val="40000"/>
+                  <a:lumOff val="60000"/>
+                  <a:alpha val="0"/>
+                </a:schemeClr>
+              </a:gs>
+              <a:gs pos="100000">
+                <a:schemeClr val="tx2">
+                  <a:lumMod val="75000"/>
+                  <a:alpha val="10000"/>
+                </a:schemeClr>
+              </a:gs>
+            </a:gsLst>
+            <a:lin ang="8400000" scaled="0"/>
+            <a:tileRect/>
+          </a:gradFill>
+          <a:ln>
+            <a:noFill/>
+          </a:ln>
         </p:spPr>
         <p:style>
           <a:lnRef idx="2">
@@ -5028,42 +7455,4046 @@
           <a:lstStyle/>
           <a:p>
             <a:pPr algn="ctr"/>
-            <a:r>
-              <a:rPr lang="en-US" dirty="0"/>
-              <a:t>Important update: </a:t>
-            </a:r>
-            <a:r>
-              <a:rPr lang="en-US" u="sng" dirty="0"/>
-              <a:t>starting Fall 2025</a:t>
-            </a:r>
-            <a:r>
-              <a:rPr lang="en-US" dirty="0"/>
-              <a:t>, presentation of “function points calculation and creep rate estimation” is no longer required in the team project presentation. This is moved to an individual homework assignment. </a:t>
-            </a:r>
-          </a:p>
+            <a:endParaRPr lang="en-US"/>
+          </a:p>
+        </p:txBody>
+      </p:sp>
+      <p:grpSp>
+        <p:nvGrpSpPr>
+          <p:cNvPr id="22" name="Group 21">
+            <a:extLst>
+              <a:ext uri="{FF2B5EF4-FFF2-40B4-BE49-F238E27FC236}">
+                <a16:creationId xmlns:a16="http://schemas.microsoft.com/office/drawing/2014/main" id="{9EED3885-4010-4FBE-A045-DC59CAE78290}"/>
+              </a:ext>
+              <a:ext uri="{C183D7F6-B498-43B3-948B-1728B52AA6E4}">
+                <adec:decorative xmlns:adec="http://schemas.microsoft.com/office/drawing/2017/decorative" val="1"/>
+              </a:ext>
+            </a:extLst>
+          </p:cNvPr>
+          <p:cNvGrpSpPr>
+            <a:grpSpLocks noGrp="1" noUngrp="1" noRot="1" noChangeAspect="1" noMove="1" noResize="1"/>
+          </p:cNvGrpSpPr>
+          <p:nvPr>
+            <p:extLst>
+              <p:ext uri="{386F3935-93C4-4BCD-93E2-E3B085C9AB24}">
+                <p16:designElem xmlns:p16="http://schemas.microsoft.com/office/powerpoint/2015/main" val="1"/>
+              </p:ext>
+            </p:extLst>
+          </p:nvPr>
+        </p:nvGrpSpPr>
+        <p:grpSpPr>
+          <a:xfrm>
+            <a:off x="11259539" y="317578"/>
+            <a:ext cx="548640" cy="549007"/>
+            <a:chOff x="7029447" y="3514725"/>
+            <a:chExt cx="1285875" cy="549007"/>
+          </a:xfrm>
+        </p:grpSpPr>
+        <p:cxnSp>
+          <p:nvCxnSpPr>
+            <p:cNvPr id="23" name="Straight Connector 22">
+              <a:extLst>
+                <a:ext uri="{FF2B5EF4-FFF2-40B4-BE49-F238E27FC236}">
+                  <a16:creationId xmlns:a16="http://schemas.microsoft.com/office/drawing/2014/main" id="{C3D74F45-ED22-46E8-8A8C-85550ED981FC}"/>
+                </a:ext>
+                <a:ext uri="{C183D7F6-B498-43B3-948B-1728B52AA6E4}">
+                  <adec:decorative xmlns:adec="http://schemas.microsoft.com/office/drawing/2017/decorative" val="1"/>
+                </a:ext>
+              </a:extLst>
+            </p:cNvPr>
+            <p:cNvCxnSpPr>
+              <a:cxnSpLocks/>
+            </p:cNvCxnSpPr>
+            <p:nvPr>
+              <p:extLst>
+                <p:ext uri="{386F3935-93C4-4BCD-93E2-E3B085C9AB24}">
+                  <p16:designElem xmlns:p16="http://schemas.microsoft.com/office/powerpoint/2015/main" val="1"/>
+                </p:ext>
+              </p:extLst>
+            </p:nvPr>
+          </p:nvCxnSpPr>
+          <p:spPr>
+            <a:xfrm>
+              <a:off x="7029447" y="3514725"/>
+              <a:ext cx="1285875" cy="0"/>
+            </a:xfrm>
+            <a:prstGeom prst="line">
+              <a:avLst/>
+            </a:prstGeom>
+            <a:ln w="31750" cap="rnd" cmpd="sng">
+              <a:gradFill>
+                <a:gsLst>
+                  <a:gs pos="0">
+                    <a:schemeClr val="tx2">
+                      <a:lumMod val="60000"/>
+                      <a:lumOff val="40000"/>
+                      <a:alpha val="40000"/>
+                    </a:schemeClr>
+                  </a:gs>
+                  <a:gs pos="100000">
+                    <a:schemeClr val="tx2">
+                      <a:lumMod val="75000"/>
+                      <a:alpha val="40000"/>
+                    </a:schemeClr>
+                  </a:gs>
+                </a:gsLst>
+                <a:lin ang="5400000" scaled="1"/>
+              </a:gradFill>
+              <a:prstDash val="sysDot"/>
+              <a:round/>
+            </a:ln>
+          </p:spPr>
+          <p:style>
+            <a:lnRef idx="1">
+              <a:schemeClr val="accent1"/>
+            </a:lnRef>
+            <a:fillRef idx="0">
+              <a:schemeClr val="accent1"/>
+            </a:fillRef>
+            <a:effectRef idx="0">
+              <a:schemeClr val="accent1"/>
+            </a:effectRef>
+            <a:fontRef idx="minor">
+              <a:schemeClr val="tx1"/>
+            </a:fontRef>
+          </p:style>
+        </p:cxnSp>
+        <p:cxnSp>
+          <p:nvCxnSpPr>
+            <p:cNvPr id="24" name="Straight Connector 23">
+              <a:extLst>
+                <a:ext uri="{FF2B5EF4-FFF2-40B4-BE49-F238E27FC236}">
+                  <a16:creationId xmlns:a16="http://schemas.microsoft.com/office/drawing/2014/main" id="{7F675583-78ED-4BEC-8424-37068227E88F}"/>
+                </a:ext>
+                <a:ext uri="{C183D7F6-B498-43B3-948B-1728B52AA6E4}">
+                  <adec:decorative xmlns:adec="http://schemas.microsoft.com/office/drawing/2017/decorative" val="1"/>
+                </a:ext>
+              </a:extLst>
+            </p:cNvPr>
+            <p:cNvCxnSpPr>
+              <a:cxnSpLocks/>
+            </p:cNvCxnSpPr>
+            <p:nvPr>
+              <p:extLst>
+                <p:ext uri="{386F3935-93C4-4BCD-93E2-E3B085C9AB24}">
+                  <p16:designElem xmlns:p16="http://schemas.microsoft.com/office/powerpoint/2015/main" val="1"/>
+                </p:ext>
+              </p:extLst>
+            </p:nvPr>
+          </p:nvCxnSpPr>
+          <p:spPr>
+            <a:xfrm>
+              <a:off x="7029447" y="3697727"/>
+              <a:ext cx="1285875" cy="0"/>
+            </a:xfrm>
+            <a:prstGeom prst="line">
+              <a:avLst/>
+            </a:prstGeom>
+            <a:ln w="31750" cap="rnd" cmpd="sng">
+              <a:gradFill>
+                <a:gsLst>
+                  <a:gs pos="0">
+                    <a:schemeClr val="tx2">
+                      <a:lumMod val="60000"/>
+                      <a:lumOff val="40000"/>
+                      <a:alpha val="40000"/>
+                    </a:schemeClr>
+                  </a:gs>
+                  <a:gs pos="100000">
+                    <a:schemeClr val="tx2">
+                      <a:lumMod val="75000"/>
+                      <a:alpha val="40000"/>
+                    </a:schemeClr>
+                  </a:gs>
+                </a:gsLst>
+                <a:lin ang="5400000" scaled="1"/>
+              </a:gradFill>
+              <a:prstDash val="sysDot"/>
+              <a:round/>
+            </a:ln>
+          </p:spPr>
+          <p:style>
+            <a:lnRef idx="1">
+              <a:schemeClr val="accent1"/>
+            </a:lnRef>
+            <a:fillRef idx="0">
+              <a:schemeClr val="accent1"/>
+            </a:fillRef>
+            <a:effectRef idx="0">
+              <a:schemeClr val="accent1"/>
+            </a:effectRef>
+            <a:fontRef idx="minor">
+              <a:schemeClr val="tx1"/>
+            </a:fontRef>
+          </p:style>
+        </p:cxnSp>
+        <p:cxnSp>
+          <p:nvCxnSpPr>
+            <p:cNvPr id="25" name="Straight Connector 24">
+              <a:extLst>
+                <a:ext uri="{FF2B5EF4-FFF2-40B4-BE49-F238E27FC236}">
+                  <a16:creationId xmlns:a16="http://schemas.microsoft.com/office/drawing/2014/main" id="{C9BD9726-207D-4725-AA6E-5147080D5BEC}"/>
+                </a:ext>
+                <a:ext uri="{C183D7F6-B498-43B3-948B-1728B52AA6E4}">
+                  <adec:decorative xmlns:adec="http://schemas.microsoft.com/office/drawing/2017/decorative" val="1"/>
+                </a:ext>
+              </a:extLst>
+            </p:cNvPr>
+            <p:cNvCxnSpPr>
+              <a:cxnSpLocks/>
+            </p:cNvCxnSpPr>
+            <p:nvPr>
+              <p:extLst>
+                <p:ext uri="{386F3935-93C4-4BCD-93E2-E3B085C9AB24}">
+                  <p16:designElem xmlns:p16="http://schemas.microsoft.com/office/powerpoint/2015/main" val="1"/>
+                </p:ext>
+              </p:extLst>
+            </p:nvPr>
+          </p:nvCxnSpPr>
+          <p:spPr>
+            <a:xfrm>
+              <a:off x="7029447" y="3880729"/>
+              <a:ext cx="1285875" cy="0"/>
+            </a:xfrm>
+            <a:prstGeom prst="line">
+              <a:avLst/>
+            </a:prstGeom>
+            <a:ln w="31750" cap="rnd" cmpd="sng">
+              <a:gradFill>
+                <a:gsLst>
+                  <a:gs pos="0">
+                    <a:schemeClr val="tx2">
+                      <a:lumMod val="60000"/>
+                      <a:lumOff val="40000"/>
+                      <a:alpha val="40000"/>
+                    </a:schemeClr>
+                  </a:gs>
+                  <a:gs pos="100000">
+                    <a:schemeClr val="tx2">
+                      <a:lumMod val="75000"/>
+                      <a:alpha val="40000"/>
+                    </a:schemeClr>
+                  </a:gs>
+                </a:gsLst>
+                <a:lin ang="5400000" scaled="1"/>
+              </a:gradFill>
+              <a:prstDash val="sysDot"/>
+              <a:round/>
+            </a:ln>
+          </p:spPr>
+          <p:style>
+            <a:lnRef idx="1">
+              <a:schemeClr val="accent1"/>
+            </a:lnRef>
+            <a:fillRef idx="0">
+              <a:schemeClr val="accent1"/>
+            </a:fillRef>
+            <a:effectRef idx="0">
+              <a:schemeClr val="accent1"/>
+            </a:effectRef>
+            <a:fontRef idx="minor">
+              <a:schemeClr val="tx1"/>
+            </a:fontRef>
+          </p:style>
+        </p:cxnSp>
+        <p:cxnSp>
+          <p:nvCxnSpPr>
+            <p:cNvPr id="26" name="Straight Connector 25">
+              <a:extLst>
+                <a:ext uri="{FF2B5EF4-FFF2-40B4-BE49-F238E27FC236}">
+                  <a16:creationId xmlns:a16="http://schemas.microsoft.com/office/drawing/2014/main" id="{B1A43941-4783-4A0B-9385-1952F9F89DEC}"/>
+                </a:ext>
+                <a:ext uri="{C183D7F6-B498-43B3-948B-1728B52AA6E4}">
+                  <adec:decorative xmlns:adec="http://schemas.microsoft.com/office/drawing/2017/decorative" val="1"/>
+                </a:ext>
+              </a:extLst>
+            </p:cNvPr>
+            <p:cNvCxnSpPr>
+              <a:cxnSpLocks/>
+            </p:cNvCxnSpPr>
+            <p:nvPr>
+              <p:extLst>
+                <p:ext uri="{386F3935-93C4-4BCD-93E2-E3B085C9AB24}">
+                  <p16:designElem xmlns:p16="http://schemas.microsoft.com/office/powerpoint/2015/main" val="1"/>
+                </p:ext>
+              </p:extLst>
+            </p:nvPr>
+          </p:nvCxnSpPr>
+          <p:spPr>
+            <a:xfrm>
+              <a:off x="7029447" y="4063732"/>
+              <a:ext cx="1285875" cy="0"/>
+            </a:xfrm>
+            <a:prstGeom prst="line">
+              <a:avLst/>
+            </a:prstGeom>
+            <a:ln w="31750" cap="rnd" cmpd="sng">
+              <a:gradFill>
+                <a:gsLst>
+                  <a:gs pos="0">
+                    <a:schemeClr val="tx2">
+                      <a:lumMod val="60000"/>
+                      <a:lumOff val="40000"/>
+                      <a:alpha val="40000"/>
+                    </a:schemeClr>
+                  </a:gs>
+                  <a:gs pos="100000">
+                    <a:schemeClr val="tx2">
+                      <a:lumMod val="75000"/>
+                      <a:alpha val="40000"/>
+                    </a:schemeClr>
+                  </a:gs>
+                </a:gsLst>
+                <a:lin ang="5400000" scaled="1"/>
+              </a:gradFill>
+              <a:prstDash val="sysDot"/>
+              <a:round/>
+            </a:ln>
+          </p:spPr>
+          <p:style>
+            <a:lnRef idx="1">
+              <a:schemeClr val="accent1"/>
+            </a:lnRef>
+            <a:fillRef idx="0">
+              <a:schemeClr val="accent1"/>
+            </a:fillRef>
+            <a:effectRef idx="0">
+              <a:schemeClr val="accent1"/>
+            </a:effectRef>
+            <a:fontRef idx="minor">
+              <a:schemeClr val="tx1"/>
+            </a:fontRef>
+          </p:style>
+        </p:cxnSp>
+      </p:grpSp>
+      <p:sp>
+        <p:nvSpPr>
+          <p:cNvPr id="28" name="Rectangle 27">
+            <a:extLst>
+              <a:ext uri="{FF2B5EF4-FFF2-40B4-BE49-F238E27FC236}">
+                <a16:creationId xmlns:a16="http://schemas.microsoft.com/office/drawing/2014/main" id="{B4806F9C-3233-4FC3-B300-D5AA58A5CD8F}"/>
+              </a:ext>
+              <a:ext uri="{C183D7F6-B498-43B3-948B-1728B52AA6E4}">
+                <adec:decorative xmlns:adec="http://schemas.microsoft.com/office/drawing/2017/decorative" val="1"/>
+              </a:ext>
+            </a:extLst>
+          </p:cNvPr>
+          <p:cNvSpPr>
+            <a:spLocks noGrp="1" noRot="1" noChangeAspect="1" noMove="1" noResize="1" noEditPoints="1" noAdjustHandles="1" noChangeArrowheads="1" noChangeShapeType="1" noTextEdit="1"/>
+          </p:cNvSpPr>
+          <p:nvPr>
+            <p:extLst>
+              <p:ext uri="{386F3935-93C4-4BCD-93E2-E3B085C9AB24}">
+                <p16:designElem xmlns:p16="http://schemas.microsoft.com/office/powerpoint/2015/main" val="1"/>
+              </p:ext>
+            </p:extLst>
+          </p:nvPr>
+        </p:nvSpPr>
+        <p:spPr>
+          <a:xfrm rot="10800000">
+            <a:off x="-1" y="6140785"/>
+            <a:ext cx="6095997" cy="711252"/>
+          </a:xfrm>
+          <a:prstGeom prst="rect">
+            <a:avLst/>
+          </a:prstGeom>
+          <a:gradFill flip="none" rotWithShape="1">
+            <a:gsLst>
+              <a:gs pos="10000">
+                <a:schemeClr val="tx2">
+                  <a:lumMod val="50000"/>
+                  <a:alpha val="10000"/>
+                </a:schemeClr>
+              </a:gs>
+              <a:gs pos="100000">
+                <a:schemeClr val="tx2">
+                  <a:lumMod val="60000"/>
+                  <a:lumOff val="40000"/>
+                  <a:alpha val="0"/>
+                </a:schemeClr>
+              </a:gs>
+            </a:gsLst>
+            <a:lin ang="8400000" scaled="0"/>
+            <a:tileRect/>
+          </a:gradFill>
+          <a:ln>
+            <a:noFill/>
+          </a:ln>
+        </p:spPr>
+        <p:style>
+          <a:lnRef idx="2">
+            <a:schemeClr val="accent1">
+              <a:shade val="50000"/>
+            </a:schemeClr>
+          </a:lnRef>
+          <a:fillRef idx="1">
+            <a:schemeClr val="accent1"/>
+          </a:fillRef>
+          <a:effectRef idx="0">
+            <a:schemeClr val="accent1"/>
+          </a:effectRef>
+          <a:fontRef idx="minor">
+            <a:schemeClr val="lt1"/>
+          </a:fontRef>
+        </p:style>
+        <p:txBody>
+          <a:bodyPr rtlCol="0" anchor="ctr"/>
+          <a:lstStyle/>
           <a:p>
             <a:pPr algn="ctr"/>
-            <a:endParaRPr lang="en-US" dirty="0"/>
-          </a:p>
-          <a:p>
-            <a:pPr algn="ctr"/>
-            <a:r>
-              <a:rPr lang="en-US" dirty="0"/>
-              <a:t>You may ignore instructions (recorded prior) that mentioned this section for the presentation.</a:t>
-            </a:r>
+            <a:endParaRPr lang="en-US"/>
+          </a:p>
+        </p:txBody>
+      </p:sp>
+      <p:grpSp>
+        <p:nvGrpSpPr>
+          <p:cNvPr id="30" name="Group 29">
+            <a:extLst>
+              <a:ext uri="{FF2B5EF4-FFF2-40B4-BE49-F238E27FC236}">
+                <a16:creationId xmlns:a16="http://schemas.microsoft.com/office/drawing/2014/main" id="{70E3F9FC-BB7B-433D-8A4F-1BCFA582E019}"/>
+              </a:ext>
+              <a:ext uri="{C183D7F6-B498-43B3-948B-1728B52AA6E4}">
+                <adec:decorative xmlns:adec="http://schemas.microsoft.com/office/drawing/2017/decorative" val="1"/>
+              </a:ext>
+            </a:extLst>
+          </p:cNvPr>
+          <p:cNvGrpSpPr>
+            <a:grpSpLocks noGrp="1" noUngrp="1" noRot="1" noChangeAspect="1" noMove="1" noResize="1"/>
+          </p:cNvGrpSpPr>
+          <p:nvPr>
+            <p:extLst>
+              <p:ext uri="{386F3935-93C4-4BCD-93E2-E3B085C9AB24}">
+                <p16:designElem xmlns:p16="http://schemas.microsoft.com/office/powerpoint/2015/main" val="1"/>
+              </p:ext>
+            </p:extLst>
+          </p:nvPr>
+        </p:nvGrpSpPr>
+        <p:grpSpPr>
+          <a:xfrm rot="5400000">
+            <a:off x="616345" y="5940560"/>
+            <a:ext cx="1285875" cy="549007"/>
+            <a:chOff x="7029447" y="3514725"/>
+            <a:chExt cx="1285875" cy="549007"/>
+          </a:xfrm>
+        </p:grpSpPr>
+        <p:cxnSp>
+          <p:nvCxnSpPr>
+            <p:cNvPr id="31" name="Straight Connector 30">
+              <a:extLst>
+                <a:ext uri="{FF2B5EF4-FFF2-40B4-BE49-F238E27FC236}">
+                  <a16:creationId xmlns:a16="http://schemas.microsoft.com/office/drawing/2014/main" id="{1406F394-9D6F-4986-A3AF-6EF16DEDE62B}"/>
+                </a:ext>
+                <a:ext uri="{C183D7F6-B498-43B3-948B-1728B52AA6E4}">
+                  <adec:decorative xmlns:adec="http://schemas.microsoft.com/office/drawing/2017/decorative" val="1"/>
+                </a:ext>
+              </a:extLst>
+            </p:cNvPr>
+            <p:cNvCxnSpPr>
+              <a:cxnSpLocks/>
+            </p:cNvCxnSpPr>
+            <p:nvPr>
+              <p:extLst>
+                <p:ext uri="{386F3935-93C4-4BCD-93E2-E3B085C9AB24}">
+                  <p16:designElem xmlns:p16="http://schemas.microsoft.com/office/powerpoint/2015/main" val="1"/>
+                </p:ext>
+              </p:extLst>
+            </p:nvPr>
+          </p:nvCxnSpPr>
+          <p:spPr>
+            <a:xfrm>
+              <a:off x="7029447" y="3514725"/>
+              <a:ext cx="1285875" cy="0"/>
+            </a:xfrm>
+            <a:prstGeom prst="line">
+              <a:avLst/>
+            </a:prstGeom>
+            <a:ln w="31750" cap="rnd" cmpd="sng">
+              <a:gradFill>
+                <a:gsLst>
+                  <a:gs pos="0">
+                    <a:schemeClr val="tx2">
+                      <a:lumMod val="60000"/>
+                      <a:lumOff val="40000"/>
+                      <a:alpha val="40000"/>
+                    </a:schemeClr>
+                  </a:gs>
+                  <a:gs pos="100000">
+                    <a:schemeClr val="tx2">
+                      <a:lumMod val="50000"/>
+                      <a:alpha val="40000"/>
+                    </a:schemeClr>
+                  </a:gs>
+                </a:gsLst>
+                <a:lin ang="5400000" scaled="1"/>
+              </a:gradFill>
+              <a:prstDash val="sysDot"/>
+              <a:round/>
+            </a:ln>
+          </p:spPr>
+          <p:style>
+            <a:lnRef idx="1">
+              <a:schemeClr val="accent1"/>
+            </a:lnRef>
+            <a:fillRef idx="0">
+              <a:schemeClr val="accent1"/>
+            </a:fillRef>
+            <a:effectRef idx="0">
+              <a:schemeClr val="accent1"/>
+            </a:effectRef>
+            <a:fontRef idx="minor">
+              <a:schemeClr val="tx1"/>
+            </a:fontRef>
+          </p:style>
+        </p:cxnSp>
+        <p:cxnSp>
+          <p:nvCxnSpPr>
+            <p:cNvPr id="32" name="Straight Connector 31">
+              <a:extLst>
+                <a:ext uri="{FF2B5EF4-FFF2-40B4-BE49-F238E27FC236}">
+                  <a16:creationId xmlns:a16="http://schemas.microsoft.com/office/drawing/2014/main" id="{54F98CF1-0C8F-435D-846B-D3C506378FC8}"/>
+                </a:ext>
+                <a:ext uri="{C183D7F6-B498-43B3-948B-1728B52AA6E4}">
+                  <adec:decorative xmlns:adec="http://schemas.microsoft.com/office/drawing/2017/decorative" val="1"/>
+                </a:ext>
+              </a:extLst>
+            </p:cNvPr>
+            <p:cNvCxnSpPr>
+              <a:cxnSpLocks/>
+            </p:cNvCxnSpPr>
+            <p:nvPr>
+              <p:extLst>
+                <p:ext uri="{386F3935-93C4-4BCD-93E2-E3B085C9AB24}">
+                  <p16:designElem xmlns:p16="http://schemas.microsoft.com/office/powerpoint/2015/main" val="1"/>
+                </p:ext>
+              </p:extLst>
+            </p:nvPr>
+          </p:nvCxnSpPr>
+          <p:spPr>
+            <a:xfrm>
+              <a:off x="7029447" y="3697727"/>
+              <a:ext cx="1285875" cy="0"/>
+            </a:xfrm>
+            <a:prstGeom prst="line">
+              <a:avLst/>
+            </a:prstGeom>
+            <a:ln w="31750" cap="rnd" cmpd="sng">
+              <a:gradFill>
+                <a:gsLst>
+                  <a:gs pos="0">
+                    <a:schemeClr val="tx2">
+                      <a:lumMod val="60000"/>
+                      <a:lumOff val="40000"/>
+                      <a:alpha val="40000"/>
+                    </a:schemeClr>
+                  </a:gs>
+                  <a:gs pos="100000">
+                    <a:schemeClr val="tx2">
+                      <a:lumMod val="50000"/>
+                      <a:alpha val="40000"/>
+                    </a:schemeClr>
+                  </a:gs>
+                </a:gsLst>
+                <a:lin ang="5400000" scaled="1"/>
+              </a:gradFill>
+              <a:prstDash val="sysDot"/>
+              <a:round/>
+            </a:ln>
+          </p:spPr>
+          <p:style>
+            <a:lnRef idx="1">
+              <a:schemeClr val="accent1"/>
+            </a:lnRef>
+            <a:fillRef idx="0">
+              <a:schemeClr val="accent1"/>
+            </a:fillRef>
+            <a:effectRef idx="0">
+              <a:schemeClr val="accent1"/>
+            </a:effectRef>
+            <a:fontRef idx="minor">
+              <a:schemeClr val="tx1"/>
+            </a:fontRef>
+          </p:style>
+        </p:cxnSp>
+        <p:cxnSp>
+          <p:nvCxnSpPr>
+            <p:cNvPr id="33" name="Straight Connector 32">
+              <a:extLst>
+                <a:ext uri="{FF2B5EF4-FFF2-40B4-BE49-F238E27FC236}">
+                  <a16:creationId xmlns:a16="http://schemas.microsoft.com/office/drawing/2014/main" id="{2781ACDD-4A0F-4369-A468-3FEC355F8E29}"/>
+                </a:ext>
+                <a:ext uri="{C183D7F6-B498-43B3-948B-1728B52AA6E4}">
+                  <adec:decorative xmlns:adec="http://schemas.microsoft.com/office/drawing/2017/decorative" val="1"/>
+                </a:ext>
+              </a:extLst>
+            </p:cNvPr>
+            <p:cNvCxnSpPr>
+              <a:cxnSpLocks/>
+            </p:cNvCxnSpPr>
+            <p:nvPr>
+              <p:extLst>
+                <p:ext uri="{386F3935-93C4-4BCD-93E2-E3B085C9AB24}">
+                  <p16:designElem xmlns:p16="http://schemas.microsoft.com/office/powerpoint/2015/main" val="1"/>
+                </p:ext>
+              </p:extLst>
+            </p:nvPr>
+          </p:nvCxnSpPr>
+          <p:spPr>
+            <a:xfrm>
+              <a:off x="7029447" y="3880729"/>
+              <a:ext cx="1285875" cy="0"/>
+            </a:xfrm>
+            <a:prstGeom prst="line">
+              <a:avLst/>
+            </a:prstGeom>
+            <a:ln w="31750" cap="rnd" cmpd="sng">
+              <a:gradFill>
+                <a:gsLst>
+                  <a:gs pos="0">
+                    <a:schemeClr val="tx2">
+                      <a:lumMod val="60000"/>
+                      <a:lumOff val="40000"/>
+                      <a:alpha val="40000"/>
+                    </a:schemeClr>
+                  </a:gs>
+                  <a:gs pos="100000">
+                    <a:schemeClr val="tx2">
+                      <a:lumMod val="50000"/>
+                      <a:alpha val="40000"/>
+                    </a:schemeClr>
+                  </a:gs>
+                </a:gsLst>
+                <a:lin ang="5400000" scaled="1"/>
+              </a:gradFill>
+              <a:prstDash val="sysDot"/>
+              <a:round/>
+            </a:ln>
+          </p:spPr>
+          <p:style>
+            <a:lnRef idx="1">
+              <a:schemeClr val="accent1"/>
+            </a:lnRef>
+            <a:fillRef idx="0">
+              <a:schemeClr val="accent1"/>
+            </a:fillRef>
+            <a:effectRef idx="0">
+              <a:schemeClr val="accent1"/>
+            </a:effectRef>
+            <a:fontRef idx="minor">
+              <a:schemeClr val="tx1"/>
+            </a:fontRef>
+          </p:style>
+        </p:cxnSp>
+        <p:cxnSp>
+          <p:nvCxnSpPr>
+            <p:cNvPr id="34" name="Straight Connector 33">
+              <a:extLst>
+                <a:ext uri="{FF2B5EF4-FFF2-40B4-BE49-F238E27FC236}">
+                  <a16:creationId xmlns:a16="http://schemas.microsoft.com/office/drawing/2014/main" id="{2BB34D61-E762-4862-9DA8-702D97A3620C}"/>
+                </a:ext>
+                <a:ext uri="{C183D7F6-B498-43B3-948B-1728B52AA6E4}">
+                  <adec:decorative xmlns:adec="http://schemas.microsoft.com/office/drawing/2017/decorative" val="1"/>
+                </a:ext>
+              </a:extLst>
+            </p:cNvPr>
+            <p:cNvCxnSpPr>
+              <a:cxnSpLocks/>
+            </p:cNvCxnSpPr>
+            <p:nvPr>
+              <p:extLst>
+                <p:ext uri="{386F3935-93C4-4BCD-93E2-E3B085C9AB24}">
+                  <p16:designElem xmlns:p16="http://schemas.microsoft.com/office/powerpoint/2015/main" val="1"/>
+                </p:ext>
+              </p:extLst>
+            </p:nvPr>
+          </p:nvCxnSpPr>
+          <p:spPr>
+            <a:xfrm>
+              <a:off x="7029447" y="4063732"/>
+              <a:ext cx="1285875" cy="0"/>
+            </a:xfrm>
+            <a:prstGeom prst="line">
+              <a:avLst/>
+            </a:prstGeom>
+            <a:ln w="31750" cap="rnd" cmpd="sng">
+              <a:gradFill>
+                <a:gsLst>
+                  <a:gs pos="0">
+                    <a:schemeClr val="tx2">
+                      <a:lumMod val="60000"/>
+                      <a:lumOff val="40000"/>
+                      <a:alpha val="40000"/>
+                    </a:schemeClr>
+                  </a:gs>
+                  <a:gs pos="100000">
+                    <a:schemeClr val="tx2">
+                      <a:lumMod val="50000"/>
+                      <a:alpha val="40000"/>
+                    </a:schemeClr>
+                  </a:gs>
+                </a:gsLst>
+                <a:lin ang="5400000" scaled="1"/>
+              </a:gradFill>
+              <a:prstDash val="sysDot"/>
+              <a:round/>
+            </a:ln>
+          </p:spPr>
+          <p:style>
+            <a:lnRef idx="1">
+              <a:schemeClr val="accent1"/>
+            </a:lnRef>
+            <a:fillRef idx="0">
+              <a:schemeClr val="accent1"/>
+            </a:fillRef>
+            <a:effectRef idx="0">
+              <a:schemeClr val="accent1"/>
+            </a:effectRef>
+            <a:fontRef idx="minor">
+              <a:schemeClr val="tx1"/>
+            </a:fontRef>
+          </p:style>
+        </p:cxnSp>
+      </p:grpSp>
+      <p:sp>
+        <p:nvSpPr>
+          <p:cNvPr id="2" name="Title 1">
+            <a:extLst>
+              <a:ext uri="{FF2B5EF4-FFF2-40B4-BE49-F238E27FC236}">
+                <a16:creationId xmlns:a16="http://schemas.microsoft.com/office/drawing/2014/main" id="{DEC0EC56-83C4-A9F3-53CF-50277910B4BA}"/>
+              </a:ext>
+            </a:extLst>
+          </p:cNvPr>
+          <p:cNvSpPr>
+            <a:spLocks noGrp="1"/>
+          </p:cNvSpPr>
+          <p:nvPr>
+            <p:ph type="title"/>
+          </p:nvPr>
+        </p:nvSpPr>
+        <p:spPr>
+          <a:xfrm>
+            <a:off x="630936" y="630936"/>
+            <a:ext cx="5465064" cy="5626947"/>
+          </a:xfrm>
+          <a:noFill/>
+        </p:spPr>
+        <p:txBody>
+          <a:bodyPr anchor="ctr">
+            <a:normAutofit/>
+          </a:bodyPr>
+          <a:lstStyle/>
+          <a:p>
+            <a:r>
+              <a:rPr lang="en-US" sz="4800" dirty="0">
+                <a:solidFill>
+                  <a:schemeClr val="bg1"/>
+                </a:solidFill>
+              </a:rPr>
+              <a:t>Top Priority Scenario</a:t>
+            </a:r>
+            <a:br>
+              <a:rPr lang="en-US" sz="4800" dirty="0">
+                <a:solidFill>
+                  <a:schemeClr val="bg1"/>
+                </a:solidFill>
+              </a:rPr>
+            </a:br>
+            <a:r>
+              <a:rPr lang="en-US" sz="4800" dirty="0">
+                <a:solidFill>
+                  <a:schemeClr val="bg1"/>
+                </a:solidFill>
+              </a:rPr>
+              <a:t>Scenario 2</a:t>
+            </a:r>
+          </a:p>
+        </p:txBody>
+      </p:sp>
+      <p:sp>
+        <p:nvSpPr>
+          <p:cNvPr id="3" name="Text Placeholder 2">
+            <a:extLst>
+              <a:ext uri="{FF2B5EF4-FFF2-40B4-BE49-F238E27FC236}">
+                <a16:creationId xmlns:a16="http://schemas.microsoft.com/office/drawing/2014/main" id="{20412452-832C-323E-F4A0-23654058DE24}"/>
+              </a:ext>
+            </a:extLst>
+          </p:cNvPr>
+          <p:cNvSpPr>
+            <a:spLocks noGrp="1"/>
+          </p:cNvSpPr>
+          <p:nvPr>
+            <p:ph idx="1"/>
+          </p:nvPr>
+        </p:nvSpPr>
+        <p:spPr>
+          <a:xfrm>
+            <a:off x="6502152" y="630936"/>
+            <a:ext cx="4978592" cy="5626957"/>
+          </a:xfrm>
+          <a:noFill/>
+        </p:spPr>
+        <p:txBody>
+          <a:bodyPr anchor="ctr">
+            <a:normAutofit/>
+          </a:bodyPr>
+          <a:lstStyle/>
+          <a:p>
+            <a:pPr marL="0" indent="0">
+              <a:buNone/>
+            </a:pPr>
+            <a:r>
+              <a:rPr lang="en-US" sz="1500" dirty="0">
+                <a:solidFill>
+                  <a:schemeClr val="bg1"/>
+                </a:solidFill>
+              </a:rPr>
+              <a:t>What If:</a:t>
+            </a:r>
+          </a:p>
+          <a:p>
+            <a:pPr marL="0" indent="0">
+              <a:buNone/>
+            </a:pPr>
+            <a:r>
+              <a:rPr lang="en-US" sz="1500" dirty="0">
+                <a:solidFill>
+                  <a:schemeClr val="bg1"/>
+                </a:solidFill>
+              </a:rPr>
+              <a:t>A wrong turn occurs </a:t>
+            </a:r>
+            <a:r>
+              <a:rPr lang="en-US" sz="1500" dirty="0">
+                <a:solidFill>
+                  <a:schemeClr val="bg1"/>
+                </a:solidFill>
+                <a:sym typeface="Wingdings" panose="05000000000000000000" pitchFamily="2" charset="2"/>
+              </a:rPr>
+              <a:t> THEIA provides dynamic rerouting and step-by-step backtracking to Spark 233</a:t>
+            </a:r>
+          </a:p>
+          <a:p>
+            <a:pPr marL="0" indent="0">
+              <a:buNone/>
+            </a:pPr>
+            <a:r>
+              <a:rPr lang="en-US" sz="1500" dirty="0">
+                <a:solidFill>
+                  <a:schemeClr val="bg1"/>
+                </a:solidFill>
+                <a:sym typeface="Wingdings" panose="05000000000000000000" pitchFamily="2" charset="2"/>
+              </a:rPr>
+              <a:t>Who:</a:t>
+            </a:r>
+          </a:p>
+          <a:p>
+            <a:pPr marL="0" indent="0">
+              <a:buNone/>
+            </a:pPr>
+            <a:r>
+              <a:rPr lang="en-US" sz="1500" dirty="0">
+                <a:solidFill>
+                  <a:schemeClr val="bg1"/>
+                </a:solidFill>
+                <a:sym typeface="Wingdings" panose="05000000000000000000" pitchFamily="2" charset="2"/>
+              </a:rPr>
+              <a:t>Primary User Alfred controls route preferences;</a:t>
+            </a:r>
+          </a:p>
+          <a:p>
+            <a:pPr marL="0" indent="0">
+              <a:buNone/>
+            </a:pPr>
+            <a:r>
+              <a:rPr lang="en-US" sz="1500" dirty="0">
+                <a:solidFill>
+                  <a:schemeClr val="bg1"/>
+                </a:solidFill>
+                <a:sym typeface="Wingdings" panose="05000000000000000000" pitchFamily="2" charset="2"/>
+              </a:rPr>
+              <a:t>Caretaker Bella receives text alerts from THEIA</a:t>
+            </a:r>
+          </a:p>
+          <a:p>
+            <a:pPr marL="0" indent="0">
+              <a:buNone/>
+            </a:pPr>
+            <a:r>
+              <a:rPr lang="en-US" sz="1500" dirty="0">
+                <a:solidFill>
+                  <a:schemeClr val="bg1"/>
+                </a:solidFill>
+                <a:sym typeface="Wingdings" panose="05000000000000000000" pitchFamily="2" charset="2"/>
+              </a:rPr>
+              <a:t>Campus Police serve as secondary escalation</a:t>
+            </a:r>
+          </a:p>
+          <a:p>
+            <a:pPr marL="0" indent="0">
+              <a:buNone/>
+            </a:pPr>
+            <a:r>
+              <a:rPr lang="en-US" sz="1500" dirty="0">
+                <a:solidFill>
+                  <a:schemeClr val="bg1"/>
+                </a:solidFill>
+                <a:sym typeface="Wingdings" panose="05000000000000000000" pitchFamily="2" charset="2"/>
+              </a:rPr>
+              <a:t>When:</a:t>
+            </a:r>
+          </a:p>
+          <a:p>
+            <a:pPr marL="0" indent="0">
+              <a:buNone/>
+            </a:pPr>
+            <a:r>
+              <a:rPr lang="en-US" sz="1500" dirty="0">
+                <a:solidFill>
+                  <a:schemeClr val="bg1"/>
+                </a:solidFill>
+                <a:sym typeface="Wingdings" panose="05000000000000000000" pitchFamily="2" charset="2"/>
+              </a:rPr>
+              <a:t>Off-route warnings will trigger when missing expected BLE beacons</a:t>
+            </a:r>
+          </a:p>
+          <a:p>
+            <a:pPr marL="0" indent="0">
+              <a:buNone/>
+            </a:pPr>
+            <a:r>
+              <a:rPr lang="en-US" sz="1500" dirty="0">
+                <a:solidFill>
+                  <a:schemeClr val="bg1"/>
+                </a:solidFill>
+                <a:sym typeface="Wingdings" panose="05000000000000000000" pitchFamily="2" charset="2"/>
+              </a:rPr>
+              <a:t>Emergency SMS dispatches after 30 seconds of unacknowledged fall check from primary user</a:t>
+            </a:r>
+          </a:p>
+          <a:p>
+            <a:pPr marL="0" indent="0">
+              <a:buNone/>
+            </a:pPr>
+            <a:r>
+              <a:rPr lang="en-US" sz="1500" dirty="0">
+                <a:solidFill>
+                  <a:schemeClr val="bg1"/>
+                </a:solidFill>
+                <a:sym typeface="Wingdings" panose="05000000000000000000" pitchFamily="2" charset="2"/>
+              </a:rPr>
+              <a:t>How To:</a:t>
+            </a:r>
+          </a:p>
+          <a:p>
+            <a:pPr marL="0" indent="0">
+              <a:buNone/>
+            </a:pPr>
+            <a:r>
+              <a:rPr lang="en-US" sz="1500" dirty="0">
+                <a:solidFill>
+                  <a:schemeClr val="bg1"/>
+                </a:solidFill>
+                <a:sym typeface="Wingdings" panose="05000000000000000000" pitchFamily="2" charset="2"/>
+              </a:rPr>
+              <a:t>THEIA uses 3D spatial audio and short haptic vibration pulses to guide users back without requiring visual screen visual</a:t>
+            </a:r>
+          </a:p>
+          <a:p>
+            <a:pPr marL="0" indent="0">
+              <a:buNone/>
+            </a:pPr>
+            <a:r>
+              <a:rPr lang="en-US" sz="1500" dirty="0">
+                <a:solidFill>
+                  <a:schemeClr val="bg1"/>
+                </a:solidFill>
+                <a:sym typeface="Wingdings" panose="05000000000000000000" pitchFamily="2" charset="2"/>
+              </a:rPr>
+              <a:t>What Kind of:</a:t>
+            </a:r>
+          </a:p>
+          <a:p>
+            <a:pPr marL="0" indent="0">
+              <a:buNone/>
+            </a:pPr>
+            <a:r>
+              <a:rPr lang="en-US" sz="1500" dirty="0">
+                <a:solidFill>
+                  <a:schemeClr val="bg1"/>
+                </a:solidFill>
+                <a:sym typeface="Wingdings" panose="05000000000000000000" pitchFamily="2" charset="2"/>
+              </a:rPr>
+              <a:t>Real-time audio and haptic navigation prompts, automated SMS text alerts with room and beacon labels, and phone/emergency dial-outs for incidents</a:t>
+            </a:r>
+            <a:endParaRPr lang="en-US" sz="1500" dirty="0">
+              <a:solidFill>
+                <a:schemeClr val="bg1"/>
+              </a:solidFill>
+            </a:endParaRPr>
           </a:p>
         </p:txBody>
       </p:sp>
     </p:spTree>
     <p:extLst>
       <p:ext uri="{BB962C8B-B14F-4D97-AF65-F5344CB8AC3E}">
-        <p14:creationId xmlns:p14="http://schemas.microsoft.com/office/powerpoint/2010/main" val="478818447"/>
+        <p14:creationId xmlns:p14="http://schemas.microsoft.com/office/powerpoint/2010/main" val="3126240756"/>
       </p:ext>
     </p:extLst>
   </p:cSld>
   <p:clrMapOvr>
     <a:masterClrMapping/>
   </p:clrMapOvr>
+  <p:timing>
+    <p:tnLst>
+      <p:par>
+        <p:cTn id="1" dur="indefinite" restart="never" nodeType="tmRoot">
+          <p:childTnLst>
+            <p:seq concurrent="1" nextAc="seek">
+              <p:cTn id="2" dur="indefinite" nodeType="mainSeq">
+                <p:childTnLst>
+                  <p:par>
+                    <p:cTn id="3" fill="hold">
+                      <p:stCondLst>
+                        <p:cond delay="indefinite"/>
+                      </p:stCondLst>
+                      <p:childTnLst>
+                        <p:par>
+                          <p:cTn id="4" fill="hold">
+                            <p:stCondLst>
+                              <p:cond delay="0"/>
+                            </p:stCondLst>
+                            <p:childTnLst>
+                              <p:par>
+                                <p:cTn id="5" presetID="10" presetClass="entr" presetSubtype="0" fill="hold" grpId="0" nodeType="clickEffect">
+                                  <p:stCondLst>
+                                    <p:cond delay="500"/>
+                                  </p:stCondLst>
+                                  <p:childTnLst>
+                                    <p:set>
+                                      <p:cBhvr>
+                                        <p:cTn id="6" dur="1" fill="hold">
+                                          <p:stCondLst>
+                                            <p:cond delay="0"/>
+                                          </p:stCondLst>
+                                        </p:cTn>
+                                        <p:tgtEl>
+                                          <p:spTgt spid="2"/>
+                                        </p:tgtEl>
+                                        <p:attrNameLst>
+                                          <p:attrName>style.visibility</p:attrName>
+                                        </p:attrNameLst>
+                                      </p:cBhvr>
+                                      <p:to>
+                                        <p:strVal val="visible"/>
+                                      </p:to>
+                                    </p:set>
+                                    <p:animEffect transition="in" filter="fade">
+                                      <p:cBhvr>
+                                        <p:cTn id="7" dur="400"/>
+                                        <p:tgtEl>
+                                          <p:spTgt spid="2"/>
+                                        </p:tgtEl>
+                                      </p:cBhvr>
+                                    </p:animEffect>
+                                  </p:childTnLst>
+                                </p:cTn>
+                              </p:par>
+                            </p:childTnLst>
+                          </p:cTn>
+                        </p:par>
+                      </p:childTnLst>
+                    </p:cTn>
+                  </p:par>
+                  <p:par>
+                    <p:cTn id="8" fill="hold">
+                      <p:stCondLst>
+                        <p:cond delay="indefinite"/>
+                      </p:stCondLst>
+                      <p:childTnLst>
+                        <p:par>
+                          <p:cTn id="9" fill="hold">
+                            <p:stCondLst>
+                              <p:cond delay="0"/>
+                            </p:stCondLst>
+                            <p:childTnLst>
+                              <p:par>
+                                <p:cTn id="10" presetID="10" presetClass="entr" presetSubtype="0" fill="hold" grpId="0" nodeType="clickEffect">
+                                  <p:stCondLst>
+                                    <p:cond delay="500"/>
+                                  </p:stCondLst>
+                                  <p:childTnLst>
+                                    <p:set>
+                                      <p:cBhvr>
+                                        <p:cTn id="11" dur="1" fill="hold">
+                                          <p:stCondLst>
+                                            <p:cond delay="0"/>
+                                          </p:stCondLst>
+                                        </p:cTn>
+                                        <p:tgtEl>
+                                          <p:spTgt spid="3">
+                                            <p:txEl>
+                                              <p:pRg st="0" end="0"/>
+                                            </p:txEl>
+                                          </p:spTgt>
+                                        </p:tgtEl>
+                                        <p:attrNameLst>
+                                          <p:attrName>style.visibility</p:attrName>
+                                        </p:attrNameLst>
+                                      </p:cBhvr>
+                                      <p:to>
+                                        <p:strVal val="visible"/>
+                                      </p:to>
+                                    </p:set>
+                                    <p:animEffect transition="in" filter="fade">
+                                      <p:cBhvr>
+                                        <p:cTn id="12" dur="400"/>
+                                        <p:tgtEl>
+                                          <p:spTgt spid="3">
+                                            <p:txEl>
+                                              <p:pRg st="0" end="0"/>
+                                            </p:txEl>
+                                          </p:spTgt>
+                                        </p:tgtEl>
+                                      </p:cBhvr>
+                                    </p:animEffect>
+                                  </p:childTnLst>
+                                </p:cTn>
+                              </p:par>
+                              <p:par>
+                                <p:cTn id="13" presetID="10" presetClass="entr" presetSubtype="0" fill="hold" grpId="0" nodeType="withEffect">
+                                  <p:stCondLst>
+                                    <p:cond delay="2000"/>
+                                  </p:stCondLst>
+                                  <p:childTnLst>
+                                    <p:set>
+                                      <p:cBhvr>
+                                        <p:cTn id="14" dur="1" fill="hold">
+                                          <p:stCondLst>
+                                            <p:cond delay="0"/>
+                                          </p:stCondLst>
+                                        </p:cTn>
+                                        <p:tgtEl>
+                                          <p:spTgt spid="3">
+                                            <p:txEl>
+                                              <p:pRg st="1" end="1"/>
+                                            </p:txEl>
+                                          </p:spTgt>
+                                        </p:tgtEl>
+                                        <p:attrNameLst>
+                                          <p:attrName>style.visibility</p:attrName>
+                                        </p:attrNameLst>
+                                      </p:cBhvr>
+                                      <p:to>
+                                        <p:strVal val="visible"/>
+                                      </p:to>
+                                    </p:set>
+                                    <p:animEffect transition="in" filter="fade">
+                                      <p:cBhvr>
+                                        <p:cTn id="15" dur="400"/>
+                                        <p:tgtEl>
+                                          <p:spTgt spid="3">
+                                            <p:txEl>
+                                              <p:pRg st="1" end="1"/>
+                                            </p:txEl>
+                                          </p:spTgt>
+                                        </p:tgtEl>
+                                      </p:cBhvr>
+                                    </p:animEffect>
+                                  </p:childTnLst>
+                                </p:cTn>
+                              </p:par>
+                            </p:childTnLst>
+                          </p:cTn>
+                        </p:par>
+                      </p:childTnLst>
+                    </p:cTn>
+                  </p:par>
+                  <p:par>
+                    <p:cTn id="16" fill="hold">
+                      <p:stCondLst>
+                        <p:cond delay="indefinite"/>
+                      </p:stCondLst>
+                      <p:childTnLst>
+                        <p:par>
+                          <p:cTn id="17" fill="hold">
+                            <p:stCondLst>
+                              <p:cond delay="0"/>
+                            </p:stCondLst>
+                            <p:childTnLst>
+                              <p:par>
+                                <p:cTn id="18" presetID="10" presetClass="entr" presetSubtype="0" fill="hold" grpId="0" nodeType="clickEffect">
+                                  <p:stCondLst>
+                                    <p:cond delay="500"/>
+                                  </p:stCondLst>
+                                  <p:childTnLst>
+                                    <p:set>
+                                      <p:cBhvr>
+                                        <p:cTn id="19" dur="1" fill="hold">
+                                          <p:stCondLst>
+                                            <p:cond delay="0"/>
+                                          </p:stCondLst>
+                                        </p:cTn>
+                                        <p:tgtEl>
+                                          <p:spTgt spid="3">
+                                            <p:txEl>
+                                              <p:pRg st="2" end="2"/>
+                                            </p:txEl>
+                                          </p:spTgt>
+                                        </p:tgtEl>
+                                        <p:attrNameLst>
+                                          <p:attrName>style.visibility</p:attrName>
+                                        </p:attrNameLst>
+                                      </p:cBhvr>
+                                      <p:to>
+                                        <p:strVal val="visible"/>
+                                      </p:to>
+                                    </p:set>
+                                    <p:animEffect transition="in" filter="fade">
+                                      <p:cBhvr>
+                                        <p:cTn id="20" dur="400"/>
+                                        <p:tgtEl>
+                                          <p:spTgt spid="3">
+                                            <p:txEl>
+                                              <p:pRg st="2" end="2"/>
+                                            </p:txEl>
+                                          </p:spTgt>
+                                        </p:tgtEl>
+                                      </p:cBhvr>
+                                    </p:animEffect>
+                                  </p:childTnLst>
+                                </p:cTn>
+                              </p:par>
+                              <p:par>
+                                <p:cTn id="21" presetID="10" presetClass="entr" presetSubtype="0" fill="hold" grpId="0" nodeType="withEffect">
+                                  <p:stCondLst>
+                                    <p:cond delay="2000"/>
+                                  </p:stCondLst>
+                                  <p:childTnLst>
+                                    <p:set>
+                                      <p:cBhvr>
+                                        <p:cTn id="22" dur="1" fill="hold">
+                                          <p:stCondLst>
+                                            <p:cond delay="0"/>
+                                          </p:stCondLst>
+                                        </p:cTn>
+                                        <p:tgtEl>
+                                          <p:spTgt spid="3">
+                                            <p:txEl>
+                                              <p:pRg st="3" end="3"/>
+                                            </p:txEl>
+                                          </p:spTgt>
+                                        </p:tgtEl>
+                                        <p:attrNameLst>
+                                          <p:attrName>style.visibility</p:attrName>
+                                        </p:attrNameLst>
+                                      </p:cBhvr>
+                                      <p:to>
+                                        <p:strVal val="visible"/>
+                                      </p:to>
+                                    </p:set>
+                                    <p:animEffect transition="in" filter="fade">
+                                      <p:cBhvr>
+                                        <p:cTn id="23" dur="400"/>
+                                        <p:tgtEl>
+                                          <p:spTgt spid="3">
+                                            <p:txEl>
+                                              <p:pRg st="3" end="3"/>
+                                            </p:txEl>
+                                          </p:spTgt>
+                                        </p:tgtEl>
+                                      </p:cBhvr>
+                                    </p:animEffect>
+                                  </p:childTnLst>
+                                </p:cTn>
+                              </p:par>
+                              <p:par>
+                                <p:cTn id="24" presetID="10" presetClass="entr" presetSubtype="0" fill="hold" grpId="0" nodeType="withEffect">
+                                  <p:stCondLst>
+                                    <p:cond delay="2000"/>
+                                  </p:stCondLst>
+                                  <p:childTnLst>
+                                    <p:set>
+                                      <p:cBhvr>
+                                        <p:cTn id="25" dur="1" fill="hold">
+                                          <p:stCondLst>
+                                            <p:cond delay="0"/>
+                                          </p:stCondLst>
+                                        </p:cTn>
+                                        <p:tgtEl>
+                                          <p:spTgt spid="3">
+                                            <p:txEl>
+                                              <p:pRg st="4" end="4"/>
+                                            </p:txEl>
+                                          </p:spTgt>
+                                        </p:tgtEl>
+                                        <p:attrNameLst>
+                                          <p:attrName>style.visibility</p:attrName>
+                                        </p:attrNameLst>
+                                      </p:cBhvr>
+                                      <p:to>
+                                        <p:strVal val="visible"/>
+                                      </p:to>
+                                    </p:set>
+                                    <p:animEffect transition="in" filter="fade">
+                                      <p:cBhvr>
+                                        <p:cTn id="26" dur="400"/>
+                                        <p:tgtEl>
+                                          <p:spTgt spid="3">
+                                            <p:txEl>
+                                              <p:pRg st="4" end="4"/>
+                                            </p:txEl>
+                                          </p:spTgt>
+                                        </p:tgtEl>
+                                      </p:cBhvr>
+                                    </p:animEffect>
+                                  </p:childTnLst>
+                                </p:cTn>
+                              </p:par>
+                              <p:par>
+                                <p:cTn id="27" presetID="10" presetClass="entr" presetSubtype="0" fill="hold" grpId="0" nodeType="withEffect">
+                                  <p:stCondLst>
+                                    <p:cond delay="2000"/>
+                                  </p:stCondLst>
+                                  <p:childTnLst>
+                                    <p:set>
+                                      <p:cBhvr>
+                                        <p:cTn id="28" dur="1" fill="hold">
+                                          <p:stCondLst>
+                                            <p:cond delay="0"/>
+                                          </p:stCondLst>
+                                        </p:cTn>
+                                        <p:tgtEl>
+                                          <p:spTgt spid="3">
+                                            <p:txEl>
+                                              <p:pRg st="5" end="5"/>
+                                            </p:txEl>
+                                          </p:spTgt>
+                                        </p:tgtEl>
+                                        <p:attrNameLst>
+                                          <p:attrName>style.visibility</p:attrName>
+                                        </p:attrNameLst>
+                                      </p:cBhvr>
+                                      <p:to>
+                                        <p:strVal val="visible"/>
+                                      </p:to>
+                                    </p:set>
+                                    <p:animEffect transition="in" filter="fade">
+                                      <p:cBhvr>
+                                        <p:cTn id="29" dur="400"/>
+                                        <p:tgtEl>
+                                          <p:spTgt spid="3">
+                                            <p:txEl>
+                                              <p:pRg st="5" end="5"/>
+                                            </p:txEl>
+                                          </p:spTgt>
+                                        </p:tgtEl>
+                                      </p:cBhvr>
+                                    </p:animEffect>
+                                  </p:childTnLst>
+                                </p:cTn>
+                              </p:par>
+                            </p:childTnLst>
+                          </p:cTn>
+                        </p:par>
+                      </p:childTnLst>
+                    </p:cTn>
+                  </p:par>
+                  <p:par>
+                    <p:cTn id="30" fill="hold">
+                      <p:stCondLst>
+                        <p:cond delay="indefinite"/>
+                      </p:stCondLst>
+                      <p:childTnLst>
+                        <p:par>
+                          <p:cTn id="31" fill="hold">
+                            <p:stCondLst>
+                              <p:cond delay="0"/>
+                            </p:stCondLst>
+                            <p:childTnLst>
+                              <p:par>
+                                <p:cTn id="32" presetID="10" presetClass="entr" presetSubtype="0" fill="hold" grpId="0" nodeType="clickEffect">
+                                  <p:stCondLst>
+                                    <p:cond delay="500"/>
+                                  </p:stCondLst>
+                                  <p:childTnLst>
+                                    <p:set>
+                                      <p:cBhvr>
+                                        <p:cTn id="33" dur="1" fill="hold">
+                                          <p:stCondLst>
+                                            <p:cond delay="0"/>
+                                          </p:stCondLst>
+                                        </p:cTn>
+                                        <p:tgtEl>
+                                          <p:spTgt spid="3">
+                                            <p:txEl>
+                                              <p:pRg st="6" end="6"/>
+                                            </p:txEl>
+                                          </p:spTgt>
+                                        </p:tgtEl>
+                                        <p:attrNameLst>
+                                          <p:attrName>style.visibility</p:attrName>
+                                        </p:attrNameLst>
+                                      </p:cBhvr>
+                                      <p:to>
+                                        <p:strVal val="visible"/>
+                                      </p:to>
+                                    </p:set>
+                                    <p:animEffect transition="in" filter="fade">
+                                      <p:cBhvr>
+                                        <p:cTn id="34" dur="400"/>
+                                        <p:tgtEl>
+                                          <p:spTgt spid="3">
+                                            <p:txEl>
+                                              <p:pRg st="6" end="6"/>
+                                            </p:txEl>
+                                          </p:spTgt>
+                                        </p:tgtEl>
+                                      </p:cBhvr>
+                                    </p:animEffect>
+                                  </p:childTnLst>
+                                </p:cTn>
+                              </p:par>
+                              <p:par>
+                                <p:cTn id="35" presetID="10" presetClass="entr" presetSubtype="0" fill="hold" grpId="0" nodeType="withEffect">
+                                  <p:stCondLst>
+                                    <p:cond delay="2000"/>
+                                  </p:stCondLst>
+                                  <p:childTnLst>
+                                    <p:set>
+                                      <p:cBhvr>
+                                        <p:cTn id="36" dur="1" fill="hold">
+                                          <p:stCondLst>
+                                            <p:cond delay="0"/>
+                                          </p:stCondLst>
+                                        </p:cTn>
+                                        <p:tgtEl>
+                                          <p:spTgt spid="3">
+                                            <p:txEl>
+                                              <p:pRg st="7" end="7"/>
+                                            </p:txEl>
+                                          </p:spTgt>
+                                        </p:tgtEl>
+                                        <p:attrNameLst>
+                                          <p:attrName>style.visibility</p:attrName>
+                                        </p:attrNameLst>
+                                      </p:cBhvr>
+                                      <p:to>
+                                        <p:strVal val="visible"/>
+                                      </p:to>
+                                    </p:set>
+                                    <p:animEffect transition="in" filter="fade">
+                                      <p:cBhvr>
+                                        <p:cTn id="37" dur="400"/>
+                                        <p:tgtEl>
+                                          <p:spTgt spid="3">
+                                            <p:txEl>
+                                              <p:pRg st="7" end="7"/>
+                                            </p:txEl>
+                                          </p:spTgt>
+                                        </p:tgtEl>
+                                      </p:cBhvr>
+                                    </p:animEffect>
+                                  </p:childTnLst>
+                                </p:cTn>
+                              </p:par>
+                              <p:par>
+                                <p:cTn id="38" presetID="10" presetClass="entr" presetSubtype="0" fill="hold" grpId="0" nodeType="withEffect">
+                                  <p:stCondLst>
+                                    <p:cond delay="2000"/>
+                                  </p:stCondLst>
+                                  <p:childTnLst>
+                                    <p:set>
+                                      <p:cBhvr>
+                                        <p:cTn id="39" dur="1" fill="hold">
+                                          <p:stCondLst>
+                                            <p:cond delay="0"/>
+                                          </p:stCondLst>
+                                        </p:cTn>
+                                        <p:tgtEl>
+                                          <p:spTgt spid="3">
+                                            <p:txEl>
+                                              <p:pRg st="8" end="8"/>
+                                            </p:txEl>
+                                          </p:spTgt>
+                                        </p:tgtEl>
+                                        <p:attrNameLst>
+                                          <p:attrName>style.visibility</p:attrName>
+                                        </p:attrNameLst>
+                                      </p:cBhvr>
+                                      <p:to>
+                                        <p:strVal val="visible"/>
+                                      </p:to>
+                                    </p:set>
+                                    <p:animEffect transition="in" filter="fade">
+                                      <p:cBhvr>
+                                        <p:cTn id="40" dur="400"/>
+                                        <p:tgtEl>
+                                          <p:spTgt spid="3">
+                                            <p:txEl>
+                                              <p:pRg st="8" end="8"/>
+                                            </p:txEl>
+                                          </p:spTgt>
+                                        </p:tgtEl>
+                                      </p:cBhvr>
+                                    </p:animEffect>
+                                  </p:childTnLst>
+                                </p:cTn>
+                              </p:par>
+                            </p:childTnLst>
+                          </p:cTn>
+                        </p:par>
+                      </p:childTnLst>
+                    </p:cTn>
+                  </p:par>
+                  <p:par>
+                    <p:cTn id="41" fill="hold">
+                      <p:stCondLst>
+                        <p:cond delay="indefinite"/>
+                      </p:stCondLst>
+                      <p:childTnLst>
+                        <p:par>
+                          <p:cTn id="42" fill="hold">
+                            <p:stCondLst>
+                              <p:cond delay="0"/>
+                            </p:stCondLst>
+                            <p:childTnLst>
+                              <p:par>
+                                <p:cTn id="43" presetID="10" presetClass="entr" presetSubtype="0" fill="hold" grpId="0" nodeType="clickEffect">
+                                  <p:stCondLst>
+                                    <p:cond delay="500"/>
+                                  </p:stCondLst>
+                                  <p:childTnLst>
+                                    <p:set>
+                                      <p:cBhvr>
+                                        <p:cTn id="44" dur="1" fill="hold">
+                                          <p:stCondLst>
+                                            <p:cond delay="0"/>
+                                          </p:stCondLst>
+                                        </p:cTn>
+                                        <p:tgtEl>
+                                          <p:spTgt spid="3">
+                                            <p:txEl>
+                                              <p:pRg st="9" end="9"/>
+                                            </p:txEl>
+                                          </p:spTgt>
+                                        </p:tgtEl>
+                                        <p:attrNameLst>
+                                          <p:attrName>style.visibility</p:attrName>
+                                        </p:attrNameLst>
+                                      </p:cBhvr>
+                                      <p:to>
+                                        <p:strVal val="visible"/>
+                                      </p:to>
+                                    </p:set>
+                                    <p:animEffect transition="in" filter="fade">
+                                      <p:cBhvr>
+                                        <p:cTn id="45" dur="400"/>
+                                        <p:tgtEl>
+                                          <p:spTgt spid="3">
+                                            <p:txEl>
+                                              <p:pRg st="9" end="9"/>
+                                            </p:txEl>
+                                          </p:spTgt>
+                                        </p:tgtEl>
+                                      </p:cBhvr>
+                                    </p:animEffect>
+                                  </p:childTnLst>
+                                </p:cTn>
+                              </p:par>
+                              <p:par>
+                                <p:cTn id="46" presetID="10" presetClass="entr" presetSubtype="0" fill="hold" grpId="0" nodeType="withEffect">
+                                  <p:stCondLst>
+                                    <p:cond delay="2000"/>
+                                  </p:stCondLst>
+                                  <p:childTnLst>
+                                    <p:set>
+                                      <p:cBhvr>
+                                        <p:cTn id="47" dur="1" fill="hold">
+                                          <p:stCondLst>
+                                            <p:cond delay="0"/>
+                                          </p:stCondLst>
+                                        </p:cTn>
+                                        <p:tgtEl>
+                                          <p:spTgt spid="3">
+                                            <p:txEl>
+                                              <p:pRg st="10" end="10"/>
+                                            </p:txEl>
+                                          </p:spTgt>
+                                        </p:tgtEl>
+                                        <p:attrNameLst>
+                                          <p:attrName>style.visibility</p:attrName>
+                                        </p:attrNameLst>
+                                      </p:cBhvr>
+                                      <p:to>
+                                        <p:strVal val="visible"/>
+                                      </p:to>
+                                    </p:set>
+                                    <p:animEffect transition="in" filter="fade">
+                                      <p:cBhvr>
+                                        <p:cTn id="48" dur="400"/>
+                                        <p:tgtEl>
+                                          <p:spTgt spid="3">
+                                            <p:txEl>
+                                              <p:pRg st="10" end="10"/>
+                                            </p:txEl>
+                                          </p:spTgt>
+                                        </p:tgtEl>
+                                      </p:cBhvr>
+                                    </p:animEffect>
+                                  </p:childTnLst>
+                                </p:cTn>
+                              </p:par>
+                            </p:childTnLst>
+                          </p:cTn>
+                        </p:par>
+                      </p:childTnLst>
+                    </p:cTn>
+                  </p:par>
+                  <p:par>
+                    <p:cTn id="49" fill="hold">
+                      <p:stCondLst>
+                        <p:cond delay="indefinite"/>
+                      </p:stCondLst>
+                      <p:childTnLst>
+                        <p:par>
+                          <p:cTn id="50" fill="hold">
+                            <p:stCondLst>
+                              <p:cond delay="0"/>
+                            </p:stCondLst>
+                            <p:childTnLst>
+                              <p:par>
+                                <p:cTn id="51" presetID="10" presetClass="entr" presetSubtype="0" fill="hold" grpId="0" nodeType="clickEffect">
+                                  <p:stCondLst>
+                                    <p:cond delay="500"/>
+                                  </p:stCondLst>
+                                  <p:childTnLst>
+                                    <p:set>
+                                      <p:cBhvr>
+                                        <p:cTn id="52" dur="1" fill="hold">
+                                          <p:stCondLst>
+                                            <p:cond delay="0"/>
+                                          </p:stCondLst>
+                                        </p:cTn>
+                                        <p:tgtEl>
+                                          <p:spTgt spid="3">
+                                            <p:txEl>
+                                              <p:pRg st="11" end="11"/>
+                                            </p:txEl>
+                                          </p:spTgt>
+                                        </p:tgtEl>
+                                        <p:attrNameLst>
+                                          <p:attrName>style.visibility</p:attrName>
+                                        </p:attrNameLst>
+                                      </p:cBhvr>
+                                      <p:to>
+                                        <p:strVal val="visible"/>
+                                      </p:to>
+                                    </p:set>
+                                    <p:animEffect transition="in" filter="fade">
+                                      <p:cBhvr>
+                                        <p:cTn id="53" dur="400"/>
+                                        <p:tgtEl>
+                                          <p:spTgt spid="3">
+                                            <p:txEl>
+                                              <p:pRg st="11" end="11"/>
+                                            </p:txEl>
+                                          </p:spTgt>
+                                        </p:tgtEl>
+                                      </p:cBhvr>
+                                    </p:animEffect>
+                                  </p:childTnLst>
+                                </p:cTn>
+                              </p:par>
+                              <p:par>
+                                <p:cTn id="54" presetID="10" presetClass="entr" presetSubtype="0" fill="hold" grpId="0" nodeType="withEffect">
+                                  <p:stCondLst>
+                                    <p:cond delay="2000"/>
+                                  </p:stCondLst>
+                                  <p:childTnLst>
+                                    <p:set>
+                                      <p:cBhvr>
+                                        <p:cTn id="55" dur="1" fill="hold">
+                                          <p:stCondLst>
+                                            <p:cond delay="0"/>
+                                          </p:stCondLst>
+                                        </p:cTn>
+                                        <p:tgtEl>
+                                          <p:spTgt spid="3">
+                                            <p:txEl>
+                                              <p:pRg st="12" end="12"/>
+                                            </p:txEl>
+                                          </p:spTgt>
+                                        </p:tgtEl>
+                                        <p:attrNameLst>
+                                          <p:attrName>style.visibility</p:attrName>
+                                        </p:attrNameLst>
+                                      </p:cBhvr>
+                                      <p:to>
+                                        <p:strVal val="visible"/>
+                                      </p:to>
+                                    </p:set>
+                                    <p:animEffect transition="in" filter="fade">
+                                      <p:cBhvr>
+                                        <p:cTn id="56" dur="400"/>
+                                        <p:tgtEl>
+                                          <p:spTgt spid="3">
+                                            <p:txEl>
+                                              <p:pRg st="12" end="12"/>
+                                            </p:txEl>
+                                          </p:spTgt>
+                                        </p:tgtEl>
+                                      </p:cBhvr>
+                                    </p:animEffect>
+                                  </p:childTnLst>
+                                </p:cTn>
+                              </p:par>
+                            </p:childTnLst>
+                          </p:cTn>
+                        </p:par>
+                      </p:childTnLst>
+                    </p:cTn>
+                  </p:par>
+                </p:childTnLst>
+              </p:cTn>
+              <p:prevCondLst>
+                <p:cond evt="onPrev" delay="0">
+                  <p:tgtEl>
+                    <p:sldTgt/>
+                  </p:tgtEl>
+                </p:cond>
+              </p:prevCondLst>
+              <p:nextCondLst>
+                <p:cond evt="onNext" delay="0">
+                  <p:tgtEl>
+                    <p:sldTgt/>
+                  </p:tgtEl>
+                </p:cond>
+              </p:nextCondLst>
+            </p:seq>
+          </p:childTnLst>
+        </p:cTn>
+      </p:par>
+    </p:tnLst>
+    <p:bldLst>
+      <p:bldP spid="2" grpId="0"/>
+      <p:bldP spid="3" grpId="0" uiExpand="1" build="p"/>
+    </p:bldLst>
+  </p:timing>
+</p:sld>
+</file>
+
+<file path=ppt/slides/slide7.xml><?xml version="1.0" encoding="utf-8"?>
+<p:sld xmlns:a="http://schemas.openxmlformats.org/drawingml/2006/main" xmlns:r="http://schemas.openxmlformats.org/officeDocument/2006/relationships" xmlns:p="http://schemas.openxmlformats.org/presentationml/2006/main">
+  <p:cSld>
+    <p:bg>
+      <p:bgPr>
+        <a:solidFill>
+          <a:schemeClr val="bg1"/>
+        </a:solidFill>
+        <a:effectLst/>
+      </p:bgPr>
+    </p:bg>
+    <p:spTree>
+      <p:nvGrpSpPr>
+        <p:cNvPr id="1" name="">
+          <a:extLst>
+            <a:ext uri="{FF2B5EF4-FFF2-40B4-BE49-F238E27FC236}">
+              <a16:creationId xmlns:a16="http://schemas.microsoft.com/office/drawing/2014/main" id="{1B9FA8A9-8C97-DD9C-2C22-03242C9A52E7}"/>
+            </a:ext>
+          </a:extLst>
+        </p:cNvPr>
+        <p:cNvGrpSpPr/>
+        <p:nvPr/>
+      </p:nvGrpSpPr>
+      <p:grpSpPr>
+        <a:xfrm>
+          <a:off x="0" y="0"/>
+          <a:ext cx="0" cy="0"/>
+          <a:chOff x="0" y="0"/>
+          <a:chExt cx="0" cy="0"/>
+        </a:xfrm>
+      </p:grpSpPr>
+      <p:sp>
+        <p:nvSpPr>
+          <p:cNvPr id="8" name="Rectangle 7">
+            <a:extLst>
+              <a:ext uri="{FF2B5EF4-FFF2-40B4-BE49-F238E27FC236}">
+                <a16:creationId xmlns:a16="http://schemas.microsoft.com/office/drawing/2014/main" id="{E38F5530-DA31-4B62-8DF9-56A1A3B6B614}"/>
+              </a:ext>
+              <a:ext uri="{C183D7F6-B498-43B3-948B-1728B52AA6E4}">
+                <adec:decorative xmlns:adec="http://schemas.microsoft.com/office/drawing/2017/decorative" val="1"/>
+              </a:ext>
+            </a:extLst>
+          </p:cNvPr>
+          <p:cNvSpPr>
+            <a:spLocks noGrp="1" noRot="1" noChangeAspect="1" noMove="1" noResize="1" noEditPoints="1" noAdjustHandles="1" noChangeArrowheads="1" noChangeShapeType="1" noTextEdit="1"/>
+          </p:cNvSpPr>
+          <p:nvPr>
+            <p:extLst>
+              <p:ext uri="{386F3935-93C4-4BCD-93E2-E3B085C9AB24}">
+                <p16:designElem xmlns:p16="http://schemas.microsoft.com/office/powerpoint/2015/main" val="1"/>
+              </p:ext>
+            </p:extLst>
+          </p:nvPr>
+        </p:nvSpPr>
+        <p:spPr>
+          <a:xfrm>
+            <a:off x="3048" y="0"/>
+            <a:ext cx="12188952" cy="6858000"/>
+          </a:xfrm>
+          <a:prstGeom prst="rect">
+            <a:avLst/>
+          </a:prstGeom>
+          <a:solidFill>
+            <a:schemeClr val="tx2"/>
+          </a:solidFill>
+          <a:ln>
+            <a:noFill/>
+          </a:ln>
+        </p:spPr>
+        <p:style>
+          <a:lnRef idx="2">
+            <a:schemeClr val="accent1">
+              <a:shade val="50000"/>
+            </a:schemeClr>
+          </a:lnRef>
+          <a:fillRef idx="1">
+            <a:schemeClr val="accent1"/>
+          </a:fillRef>
+          <a:effectRef idx="0">
+            <a:schemeClr val="accent1"/>
+          </a:effectRef>
+          <a:fontRef idx="minor">
+            <a:schemeClr val="lt1"/>
+          </a:fontRef>
+        </p:style>
+        <p:txBody>
+          <a:bodyPr rtlCol="0" anchor="ctr"/>
+          <a:lstStyle/>
+          <a:p>
+            <a:pPr algn="ctr"/>
+            <a:endParaRPr lang="en-US"/>
+          </a:p>
+        </p:txBody>
+      </p:sp>
+      <p:sp>
+        <p:nvSpPr>
+          <p:cNvPr id="10" name="Rectangle 9">
+            <a:extLst>
+              <a:ext uri="{FF2B5EF4-FFF2-40B4-BE49-F238E27FC236}">
+                <a16:creationId xmlns:a16="http://schemas.microsoft.com/office/drawing/2014/main" id="{4AEFAF95-013F-4375-AAF4-033AC93F5550}"/>
+              </a:ext>
+              <a:ext uri="{C183D7F6-B498-43B3-948B-1728B52AA6E4}">
+                <adec:decorative xmlns:adec="http://schemas.microsoft.com/office/drawing/2017/decorative" val="1"/>
+              </a:ext>
+            </a:extLst>
+          </p:cNvPr>
+          <p:cNvSpPr>
+            <a:spLocks noGrp="1" noRot="1" noChangeAspect="1" noMove="1" noResize="1" noEditPoints="1" noAdjustHandles="1" noChangeArrowheads="1" noChangeShapeType="1" noTextEdit="1"/>
+          </p:cNvSpPr>
+          <p:nvPr>
+            <p:extLst>
+              <p:ext uri="{386F3935-93C4-4BCD-93E2-E3B085C9AB24}">
+                <p16:designElem xmlns:p16="http://schemas.microsoft.com/office/powerpoint/2015/main" val="1"/>
+              </p:ext>
+            </p:extLst>
+          </p:nvPr>
+        </p:nvSpPr>
+        <p:spPr>
+          <a:xfrm>
+            <a:off x="0" y="0"/>
+            <a:ext cx="12188952" cy="6858000"/>
+          </a:xfrm>
+          <a:prstGeom prst="rect">
+            <a:avLst/>
+          </a:prstGeom>
+          <a:solidFill>
+            <a:schemeClr val="tx1">
+              <a:alpha val="53000"/>
+            </a:schemeClr>
+          </a:solidFill>
+          <a:ln>
+            <a:noFill/>
+          </a:ln>
+        </p:spPr>
+        <p:style>
+          <a:lnRef idx="2">
+            <a:schemeClr val="accent1">
+              <a:shade val="50000"/>
+            </a:schemeClr>
+          </a:lnRef>
+          <a:fillRef idx="1">
+            <a:schemeClr val="accent1"/>
+          </a:fillRef>
+          <a:effectRef idx="0">
+            <a:schemeClr val="accent1"/>
+          </a:effectRef>
+          <a:fontRef idx="minor">
+            <a:schemeClr val="lt1"/>
+          </a:fontRef>
+        </p:style>
+        <p:txBody>
+          <a:bodyPr rtlCol="0" anchor="ctr"/>
+          <a:lstStyle/>
+          <a:p>
+            <a:pPr algn="ctr"/>
+            <a:endParaRPr lang="en-US"/>
+          </a:p>
+        </p:txBody>
+      </p:sp>
+      <p:grpSp>
+        <p:nvGrpSpPr>
+          <p:cNvPr id="12" name="Group 11">
+            <a:extLst>
+              <a:ext uri="{FF2B5EF4-FFF2-40B4-BE49-F238E27FC236}">
+                <a16:creationId xmlns:a16="http://schemas.microsoft.com/office/drawing/2014/main" id="{68735E28-7236-42D8-A5E1-A0F302FE879A}"/>
+              </a:ext>
+              <a:ext uri="{C183D7F6-B498-43B3-948B-1728B52AA6E4}">
+                <adec:decorative xmlns:adec="http://schemas.microsoft.com/office/drawing/2017/decorative" val="1"/>
+              </a:ext>
+            </a:extLst>
+          </p:cNvPr>
+          <p:cNvGrpSpPr>
+            <a:grpSpLocks noGrp="1" noUngrp="1" noRot="1" noChangeAspect="1" noMove="1" noResize="1"/>
+          </p:cNvGrpSpPr>
+          <p:nvPr>
+            <p:extLst>
+              <p:ext uri="{386F3935-93C4-4BCD-93E2-E3B085C9AB24}">
+                <p16:designElem xmlns:p16="http://schemas.microsoft.com/office/powerpoint/2015/main" val="1"/>
+              </p:ext>
+            </p:extLst>
+          </p:nvPr>
+        </p:nvGrpSpPr>
+        <p:grpSpPr>
+          <a:xfrm>
+            <a:off x="1" y="2075420"/>
+            <a:ext cx="12048729" cy="4093306"/>
+            <a:chOff x="1" y="2075420"/>
+            <a:chExt cx="12048729" cy="4093306"/>
+          </a:xfrm>
+        </p:grpSpPr>
+        <p:sp>
+          <p:nvSpPr>
+            <p:cNvPr id="13" name="Oval 12">
+              <a:extLst>
+                <a:ext uri="{FF2B5EF4-FFF2-40B4-BE49-F238E27FC236}">
+                  <a16:creationId xmlns:a16="http://schemas.microsoft.com/office/drawing/2014/main" id="{F3642881-D4B2-4CC2-A287-0FA0006F3AC8}"/>
+                </a:ext>
+                <a:ext uri="{C183D7F6-B498-43B3-948B-1728B52AA6E4}">
+                  <adec:decorative xmlns:adec="http://schemas.microsoft.com/office/drawing/2017/decorative" val="1"/>
+                </a:ext>
+              </a:extLst>
+            </p:cNvPr>
+            <p:cNvSpPr/>
+            <p:nvPr>
+              <p:extLst>
+                <p:ext uri="{386F3935-93C4-4BCD-93E2-E3B085C9AB24}">
+                  <p16:designElem xmlns:p16="http://schemas.microsoft.com/office/powerpoint/2015/main" val="1"/>
+                </p:ext>
+              </p:extLst>
+            </p:nvPr>
+          </p:nvSpPr>
+          <p:spPr>
+            <a:xfrm rot="4500000">
+              <a:off x="7942191" y="2507571"/>
+              <a:ext cx="3563871" cy="3563871"/>
+            </a:xfrm>
+            <a:prstGeom prst="ellipse">
+              <a:avLst/>
+            </a:prstGeom>
+            <a:noFill/>
+            <a:ln w="31750">
+              <a:gradFill>
+                <a:gsLst>
+                  <a:gs pos="0">
+                    <a:schemeClr val="tx2">
+                      <a:lumMod val="60000"/>
+                      <a:lumOff val="40000"/>
+                      <a:alpha val="10000"/>
+                    </a:schemeClr>
+                  </a:gs>
+                  <a:gs pos="100000">
+                    <a:schemeClr val="tx2">
+                      <a:lumMod val="50000"/>
+                      <a:alpha val="20000"/>
+                    </a:schemeClr>
+                  </a:gs>
+                </a:gsLst>
+                <a:lin ang="5400000" scaled="1"/>
+              </a:gradFill>
+              <a:prstDash val="sysDot"/>
+            </a:ln>
+          </p:spPr>
+          <p:style>
+            <a:lnRef idx="2">
+              <a:schemeClr val="accent1">
+                <a:shade val="50000"/>
+              </a:schemeClr>
+            </a:lnRef>
+            <a:fillRef idx="1">
+              <a:schemeClr val="accent1"/>
+            </a:fillRef>
+            <a:effectRef idx="0">
+              <a:schemeClr val="accent1"/>
+            </a:effectRef>
+            <a:fontRef idx="minor">
+              <a:schemeClr val="lt1"/>
+            </a:fontRef>
+          </p:style>
+          <p:txBody>
+            <a:bodyPr rtlCol="0" anchor="ctr"/>
+            <a:lstStyle/>
+            <a:p>
+              <a:pPr algn="ctr"/>
+              <a:endParaRPr lang="en-US"/>
+            </a:p>
+          </p:txBody>
+        </p:sp>
+        <p:sp>
+          <p:nvSpPr>
+            <p:cNvPr id="14" name="Oval 13">
+              <a:extLst>
+                <a:ext uri="{FF2B5EF4-FFF2-40B4-BE49-F238E27FC236}">
+                  <a16:creationId xmlns:a16="http://schemas.microsoft.com/office/drawing/2014/main" id="{901C50C6-CC43-4D9E-B2AB-F373712E43AF}"/>
+                </a:ext>
+                <a:ext uri="{C183D7F6-B498-43B3-948B-1728B52AA6E4}">
+                  <adec:decorative xmlns:adec="http://schemas.microsoft.com/office/drawing/2017/decorative" val="1"/>
+                </a:ext>
+              </a:extLst>
+            </p:cNvPr>
+            <p:cNvSpPr/>
+            <p:nvPr>
+              <p:extLst>
+                <p:ext uri="{386F3935-93C4-4BCD-93E2-E3B085C9AB24}">
+                  <p16:designElem xmlns:p16="http://schemas.microsoft.com/office/powerpoint/2015/main" val="1"/>
+                </p:ext>
+              </p:extLst>
+            </p:nvPr>
+          </p:nvSpPr>
+          <p:spPr>
+            <a:xfrm rot="16200000">
+              <a:off x="10435065" y="4048931"/>
+              <a:ext cx="1381607" cy="1381607"/>
+            </a:xfrm>
+            <a:prstGeom prst="ellipse">
+              <a:avLst/>
+            </a:prstGeom>
+            <a:noFill/>
+            <a:ln w="31750">
+              <a:gradFill>
+                <a:gsLst>
+                  <a:gs pos="0">
+                    <a:schemeClr val="tx2">
+                      <a:lumMod val="60000"/>
+                      <a:lumOff val="40000"/>
+                      <a:alpha val="20000"/>
+                    </a:schemeClr>
+                  </a:gs>
+                  <a:gs pos="100000">
+                    <a:schemeClr val="tx2">
+                      <a:lumMod val="50000"/>
+                      <a:alpha val="20000"/>
+                    </a:schemeClr>
+                  </a:gs>
+                </a:gsLst>
+                <a:lin ang="5400000" scaled="1"/>
+              </a:gradFill>
+              <a:prstDash val="sysDot"/>
+            </a:ln>
+          </p:spPr>
+          <p:style>
+            <a:lnRef idx="2">
+              <a:schemeClr val="accent1">
+                <a:shade val="50000"/>
+              </a:schemeClr>
+            </a:lnRef>
+            <a:fillRef idx="1">
+              <a:schemeClr val="accent1"/>
+            </a:fillRef>
+            <a:effectRef idx="0">
+              <a:schemeClr val="accent1"/>
+            </a:effectRef>
+            <a:fontRef idx="minor">
+              <a:schemeClr val="lt1"/>
+            </a:fontRef>
+          </p:style>
+          <p:txBody>
+            <a:bodyPr rtlCol="0" anchor="ctr"/>
+            <a:lstStyle/>
+            <a:p>
+              <a:pPr algn="ctr"/>
+              <a:endParaRPr lang="en-US"/>
+            </a:p>
+          </p:txBody>
+        </p:sp>
+        <p:sp>
+          <p:nvSpPr>
+            <p:cNvPr id="15" name="Oval 14">
+              <a:extLst>
+                <a:ext uri="{FF2B5EF4-FFF2-40B4-BE49-F238E27FC236}">
+                  <a16:creationId xmlns:a16="http://schemas.microsoft.com/office/drawing/2014/main" id="{26E7187D-0938-461D-BFC5-89EEF3506225}"/>
+                </a:ext>
+                <a:ext uri="{C183D7F6-B498-43B3-948B-1728B52AA6E4}">
+                  <adec:decorative xmlns:adec="http://schemas.microsoft.com/office/drawing/2017/decorative" val="1"/>
+                </a:ext>
+              </a:extLst>
+            </p:cNvPr>
+            <p:cNvSpPr/>
+            <p:nvPr>
+              <p:extLst>
+                <p:ext uri="{386F3935-93C4-4BCD-93E2-E3B085C9AB24}">
+                  <p16:designElem xmlns:p16="http://schemas.microsoft.com/office/powerpoint/2015/main" val="1"/>
+                </p:ext>
+              </p:extLst>
+            </p:nvPr>
+          </p:nvSpPr>
+          <p:spPr>
+            <a:xfrm rot="16200000">
+              <a:off x="1" y="2075420"/>
+              <a:ext cx="3144364" cy="3144364"/>
+            </a:xfrm>
+            <a:prstGeom prst="ellipse">
+              <a:avLst/>
+            </a:prstGeom>
+            <a:gradFill>
+              <a:gsLst>
+                <a:gs pos="0">
+                  <a:schemeClr val="tx2">
+                    <a:lumMod val="75000"/>
+                    <a:alpha val="20000"/>
+                  </a:schemeClr>
+                </a:gs>
+                <a:gs pos="100000">
+                  <a:schemeClr val="tx2">
+                    <a:lumMod val="50000"/>
+                    <a:alpha val="10000"/>
+                  </a:schemeClr>
+                </a:gs>
+              </a:gsLst>
+              <a:lin ang="5400000" scaled="1"/>
+            </a:gradFill>
+            <a:ln>
+              <a:noFill/>
+            </a:ln>
+          </p:spPr>
+          <p:style>
+            <a:lnRef idx="2">
+              <a:schemeClr val="accent1">
+                <a:shade val="50000"/>
+              </a:schemeClr>
+            </a:lnRef>
+            <a:fillRef idx="1">
+              <a:schemeClr val="accent1"/>
+            </a:fillRef>
+            <a:effectRef idx="0">
+              <a:schemeClr val="accent1"/>
+            </a:effectRef>
+            <a:fontRef idx="minor">
+              <a:schemeClr val="lt1"/>
+            </a:fontRef>
+          </p:style>
+          <p:txBody>
+            <a:bodyPr rtlCol="0" anchor="ctr"/>
+            <a:lstStyle/>
+            <a:p>
+              <a:pPr algn="ctr"/>
+              <a:endParaRPr lang="en-US"/>
+            </a:p>
+          </p:txBody>
+        </p:sp>
+        <p:sp>
+          <p:nvSpPr>
+            <p:cNvPr id="16" name="Oval 15">
+              <a:extLst>
+                <a:ext uri="{FF2B5EF4-FFF2-40B4-BE49-F238E27FC236}">
+                  <a16:creationId xmlns:a16="http://schemas.microsoft.com/office/drawing/2014/main" id="{934C951A-9754-438B-9D57-E6B93B6E4C24}"/>
+                </a:ext>
+                <a:ext uri="{C183D7F6-B498-43B3-948B-1728B52AA6E4}">
+                  <adec:decorative xmlns:adec="http://schemas.microsoft.com/office/drawing/2017/decorative" val="1"/>
+                </a:ext>
+              </a:extLst>
+            </p:cNvPr>
+            <p:cNvSpPr/>
+            <p:nvPr>
+              <p:extLst>
+                <p:ext uri="{386F3935-93C4-4BCD-93E2-E3B085C9AB24}">
+                  <p16:designElem xmlns:p16="http://schemas.microsoft.com/office/powerpoint/2015/main" val="1"/>
+                </p:ext>
+              </p:extLst>
+            </p:nvPr>
+          </p:nvSpPr>
+          <p:spPr>
+            <a:xfrm rot="12600000">
+              <a:off x="10150845" y="4270841"/>
+              <a:ext cx="1897885" cy="1897885"/>
+            </a:xfrm>
+            <a:prstGeom prst="ellipse">
+              <a:avLst/>
+            </a:prstGeom>
+            <a:gradFill>
+              <a:gsLst>
+                <a:gs pos="0">
+                  <a:schemeClr val="tx2">
+                    <a:lumMod val="75000"/>
+                    <a:alpha val="10000"/>
+                  </a:schemeClr>
+                </a:gs>
+                <a:gs pos="100000">
+                  <a:schemeClr val="tx2">
+                    <a:lumMod val="75000"/>
+                    <a:alpha val="20000"/>
+                  </a:schemeClr>
+                </a:gs>
+              </a:gsLst>
+              <a:lin ang="5400000" scaled="1"/>
+            </a:gradFill>
+            <a:ln>
+              <a:noFill/>
+            </a:ln>
+          </p:spPr>
+          <p:style>
+            <a:lnRef idx="2">
+              <a:schemeClr val="accent1">
+                <a:shade val="50000"/>
+              </a:schemeClr>
+            </a:lnRef>
+            <a:fillRef idx="1">
+              <a:schemeClr val="accent1"/>
+            </a:fillRef>
+            <a:effectRef idx="0">
+              <a:schemeClr val="accent1"/>
+            </a:effectRef>
+            <a:fontRef idx="minor">
+              <a:schemeClr val="lt1"/>
+            </a:fontRef>
+          </p:style>
+          <p:txBody>
+            <a:bodyPr rtlCol="0" anchor="ctr"/>
+            <a:lstStyle/>
+            <a:p>
+              <a:pPr algn="ctr"/>
+              <a:endParaRPr lang="en-US" dirty="0"/>
+            </a:p>
+          </p:txBody>
+        </p:sp>
+        <p:sp>
+          <p:nvSpPr>
+            <p:cNvPr id="17" name="Oval 16">
+              <a:extLst>
+                <a:ext uri="{FF2B5EF4-FFF2-40B4-BE49-F238E27FC236}">
+                  <a16:creationId xmlns:a16="http://schemas.microsoft.com/office/drawing/2014/main" id="{FCCC8FCE-0563-4147-B2A2-7C81702EBE88}"/>
+                </a:ext>
+                <a:ext uri="{C183D7F6-B498-43B3-948B-1728B52AA6E4}">
+                  <adec:decorative xmlns:adec="http://schemas.microsoft.com/office/drawing/2017/decorative" val="1"/>
+                </a:ext>
+              </a:extLst>
+            </p:cNvPr>
+            <p:cNvSpPr/>
+            <p:nvPr>
+              <p:extLst>
+                <p:ext uri="{386F3935-93C4-4BCD-93E2-E3B085C9AB24}">
+                  <p16:designElem xmlns:p16="http://schemas.microsoft.com/office/powerpoint/2015/main" val="1"/>
+                </p:ext>
+              </p:extLst>
+            </p:nvPr>
+          </p:nvSpPr>
+          <p:spPr>
+            <a:xfrm rot="4500000">
+              <a:off x="2046780" y="3040492"/>
+              <a:ext cx="2579322" cy="2579322"/>
+            </a:xfrm>
+            <a:prstGeom prst="ellipse">
+              <a:avLst/>
+            </a:prstGeom>
+            <a:noFill/>
+            <a:ln w="31750">
+              <a:gradFill>
+                <a:gsLst>
+                  <a:gs pos="0">
+                    <a:schemeClr val="tx2">
+                      <a:lumMod val="60000"/>
+                      <a:lumOff val="40000"/>
+                      <a:alpha val="20000"/>
+                    </a:schemeClr>
+                  </a:gs>
+                  <a:gs pos="100000">
+                    <a:schemeClr val="tx2">
+                      <a:lumMod val="50000"/>
+                      <a:alpha val="20000"/>
+                    </a:schemeClr>
+                  </a:gs>
+                </a:gsLst>
+                <a:lin ang="5400000" scaled="1"/>
+              </a:gradFill>
+              <a:prstDash val="sysDot"/>
+            </a:ln>
+          </p:spPr>
+          <p:style>
+            <a:lnRef idx="2">
+              <a:schemeClr val="accent1">
+                <a:shade val="50000"/>
+              </a:schemeClr>
+            </a:lnRef>
+            <a:fillRef idx="1">
+              <a:schemeClr val="accent1"/>
+            </a:fillRef>
+            <a:effectRef idx="0">
+              <a:schemeClr val="accent1"/>
+            </a:effectRef>
+            <a:fontRef idx="minor">
+              <a:schemeClr val="lt1"/>
+            </a:fontRef>
+          </p:style>
+          <p:txBody>
+            <a:bodyPr rtlCol="0" anchor="ctr"/>
+            <a:lstStyle/>
+            <a:p>
+              <a:pPr algn="ctr"/>
+              <a:endParaRPr lang="en-US"/>
+            </a:p>
+          </p:txBody>
+        </p:sp>
+        <p:sp>
+          <p:nvSpPr>
+            <p:cNvPr id="18" name="Oval 17">
+              <a:extLst>
+                <a:ext uri="{FF2B5EF4-FFF2-40B4-BE49-F238E27FC236}">
+                  <a16:creationId xmlns:a16="http://schemas.microsoft.com/office/drawing/2014/main" id="{5E68FC26-41A9-4C82-BE7F-E9344CDC4F9F}"/>
+                </a:ext>
+                <a:ext uri="{C183D7F6-B498-43B3-948B-1728B52AA6E4}">
+                  <adec:decorative xmlns:adec="http://schemas.microsoft.com/office/drawing/2017/decorative" val="1"/>
+                </a:ext>
+              </a:extLst>
+            </p:cNvPr>
+            <p:cNvSpPr/>
+            <p:nvPr>
+              <p:extLst>
+                <p:ext uri="{386F3935-93C4-4BCD-93E2-E3B085C9AB24}">
+                  <p16:designElem xmlns:p16="http://schemas.microsoft.com/office/powerpoint/2015/main" val="1"/>
+                </p:ext>
+              </p:extLst>
+            </p:nvPr>
+          </p:nvSpPr>
+          <p:spPr>
+            <a:xfrm rot="4500000">
+              <a:off x="2224640" y="3193975"/>
+              <a:ext cx="2243193" cy="2243193"/>
+            </a:xfrm>
+            <a:prstGeom prst="ellipse">
+              <a:avLst/>
+            </a:prstGeom>
+            <a:noFill/>
+            <a:ln w="31750">
+              <a:gradFill>
+                <a:gsLst>
+                  <a:gs pos="0">
+                    <a:schemeClr val="tx2">
+                      <a:lumMod val="60000"/>
+                      <a:lumOff val="40000"/>
+                      <a:alpha val="10000"/>
+                    </a:schemeClr>
+                  </a:gs>
+                  <a:gs pos="100000">
+                    <a:schemeClr val="tx2">
+                      <a:lumMod val="50000"/>
+                      <a:alpha val="10000"/>
+                    </a:schemeClr>
+                  </a:gs>
+                </a:gsLst>
+                <a:lin ang="5400000" scaled="1"/>
+              </a:gradFill>
+            </a:ln>
+          </p:spPr>
+          <p:style>
+            <a:lnRef idx="2">
+              <a:schemeClr val="accent1">
+                <a:shade val="50000"/>
+              </a:schemeClr>
+            </a:lnRef>
+            <a:fillRef idx="1">
+              <a:schemeClr val="accent1"/>
+            </a:fillRef>
+            <a:effectRef idx="0">
+              <a:schemeClr val="accent1"/>
+            </a:effectRef>
+            <a:fontRef idx="minor">
+              <a:schemeClr val="lt1"/>
+            </a:fontRef>
+          </p:style>
+          <p:txBody>
+            <a:bodyPr rtlCol="0" anchor="ctr"/>
+            <a:lstStyle/>
+            <a:p>
+              <a:pPr algn="ctr"/>
+              <a:endParaRPr lang="en-US"/>
+            </a:p>
+          </p:txBody>
+        </p:sp>
+      </p:grpSp>
+      <p:sp>
+        <p:nvSpPr>
+          <p:cNvPr id="20" name="Rectangle 19">
+            <a:extLst>
+              <a:ext uri="{FF2B5EF4-FFF2-40B4-BE49-F238E27FC236}">
+                <a16:creationId xmlns:a16="http://schemas.microsoft.com/office/drawing/2014/main" id="{FBB336D1-2562-4680-B29B-E22C603C0ED9}"/>
+              </a:ext>
+              <a:ext uri="{C183D7F6-B498-43B3-948B-1728B52AA6E4}">
+                <adec:decorative xmlns:adec="http://schemas.microsoft.com/office/drawing/2017/decorative" val="1"/>
+              </a:ext>
+            </a:extLst>
+          </p:cNvPr>
+          <p:cNvSpPr>
+            <a:spLocks noGrp="1" noRot="1" noChangeAspect="1" noMove="1" noResize="1" noEditPoints="1" noAdjustHandles="1" noChangeArrowheads="1" noChangeShapeType="1" noTextEdit="1"/>
+          </p:cNvSpPr>
+          <p:nvPr>
+            <p:extLst>
+              <p:ext uri="{386F3935-93C4-4BCD-93E2-E3B085C9AB24}">
+                <p16:designElem xmlns:p16="http://schemas.microsoft.com/office/powerpoint/2015/main" val="1"/>
+              </p:ext>
+            </p:extLst>
+          </p:nvPr>
+        </p:nvSpPr>
+        <p:spPr>
+          <a:xfrm rot="16200000">
+            <a:off x="10438146" y="1042605"/>
+            <a:ext cx="2796461" cy="711252"/>
+          </a:xfrm>
+          <a:prstGeom prst="rect">
+            <a:avLst/>
+          </a:prstGeom>
+          <a:gradFill flip="none" rotWithShape="1">
+            <a:gsLst>
+              <a:gs pos="0">
+                <a:schemeClr val="tx2">
+                  <a:lumMod val="40000"/>
+                  <a:lumOff val="60000"/>
+                  <a:alpha val="0"/>
+                </a:schemeClr>
+              </a:gs>
+              <a:gs pos="100000">
+                <a:schemeClr val="tx2">
+                  <a:lumMod val="75000"/>
+                  <a:alpha val="10000"/>
+                </a:schemeClr>
+              </a:gs>
+            </a:gsLst>
+            <a:lin ang="8400000" scaled="0"/>
+            <a:tileRect/>
+          </a:gradFill>
+          <a:ln>
+            <a:noFill/>
+          </a:ln>
+        </p:spPr>
+        <p:style>
+          <a:lnRef idx="2">
+            <a:schemeClr val="accent1">
+              <a:shade val="50000"/>
+            </a:schemeClr>
+          </a:lnRef>
+          <a:fillRef idx="1">
+            <a:schemeClr val="accent1"/>
+          </a:fillRef>
+          <a:effectRef idx="0">
+            <a:schemeClr val="accent1"/>
+          </a:effectRef>
+          <a:fontRef idx="minor">
+            <a:schemeClr val="lt1"/>
+          </a:fontRef>
+        </p:style>
+        <p:txBody>
+          <a:bodyPr rtlCol="0" anchor="ctr"/>
+          <a:lstStyle/>
+          <a:p>
+            <a:pPr algn="ctr"/>
+            <a:endParaRPr lang="en-US"/>
+          </a:p>
+        </p:txBody>
+      </p:sp>
+      <p:grpSp>
+        <p:nvGrpSpPr>
+          <p:cNvPr id="22" name="Group 21">
+            <a:extLst>
+              <a:ext uri="{FF2B5EF4-FFF2-40B4-BE49-F238E27FC236}">
+                <a16:creationId xmlns:a16="http://schemas.microsoft.com/office/drawing/2014/main" id="{9EED3885-4010-4FBE-A045-DC59CAE78290}"/>
+              </a:ext>
+              <a:ext uri="{C183D7F6-B498-43B3-948B-1728B52AA6E4}">
+                <adec:decorative xmlns:adec="http://schemas.microsoft.com/office/drawing/2017/decorative" val="1"/>
+              </a:ext>
+            </a:extLst>
+          </p:cNvPr>
+          <p:cNvGrpSpPr>
+            <a:grpSpLocks noGrp="1" noUngrp="1" noRot="1" noChangeAspect="1" noMove="1" noResize="1"/>
+          </p:cNvGrpSpPr>
+          <p:nvPr>
+            <p:extLst>
+              <p:ext uri="{386F3935-93C4-4BCD-93E2-E3B085C9AB24}">
+                <p16:designElem xmlns:p16="http://schemas.microsoft.com/office/powerpoint/2015/main" val="1"/>
+              </p:ext>
+            </p:extLst>
+          </p:nvPr>
+        </p:nvGrpSpPr>
+        <p:grpSpPr>
+          <a:xfrm>
+            <a:off x="11259539" y="317578"/>
+            <a:ext cx="548640" cy="549007"/>
+            <a:chOff x="7029447" y="3514725"/>
+            <a:chExt cx="1285875" cy="549007"/>
+          </a:xfrm>
+        </p:grpSpPr>
+        <p:cxnSp>
+          <p:nvCxnSpPr>
+            <p:cNvPr id="23" name="Straight Connector 22">
+              <a:extLst>
+                <a:ext uri="{FF2B5EF4-FFF2-40B4-BE49-F238E27FC236}">
+                  <a16:creationId xmlns:a16="http://schemas.microsoft.com/office/drawing/2014/main" id="{C3D74F45-ED22-46E8-8A8C-85550ED981FC}"/>
+                </a:ext>
+                <a:ext uri="{C183D7F6-B498-43B3-948B-1728B52AA6E4}">
+                  <adec:decorative xmlns:adec="http://schemas.microsoft.com/office/drawing/2017/decorative" val="1"/>
+                </a:ext>
+              </a:extLst>
+            </p:cNvPr>
+            <p:cNvCxnSpPr>
+              <a:cxnSpLocks/>
+            </p:cNvCxnSpPr>
+            <p:nvPr>
+              <p:extLst>
+                <p:ext uri="{386F3935-93C4-4BCD-93E2-E3B085C9AB24}">
+                  <p16:designElem xmlns:p16="http://schemas.microsoft.com/office/powerpoint/2015/main" val="1"/>
+                </p:ext>
+              </p:extLst>
+            </p:nvPr>
+          </p:nvCxnSpPr>
+          <p:spPr>
+            <a:xfrm>
+              <a:off x="7029447" y="3514725"/>
+              <a:ext cx="1285875" cy="0"/>
+            </a:xfrm>
+            <a:prstGeom prst="line">
+              <a:avLst/>
+            </a:prstGeom>
+            <a:ln w="31750" cap="rnd" cmpd="sng">
+              <a:gradFill>
+                <a:gsLst>
+                  <a:gs pos="0">
+                    <a:schemeClr val="tx2">
+                      <a:lumMod val="60000"/>
+                      <a:lumOff val="40000"/>
+                      <a:alpha val="40000"/>
+                    </a:schemeClr>
+                  </a:gs>
+                  <a:gs pos="100000">
+                    <a:schemeClr val="tx2">
+                      <a:lumMod val="75000"/>
+                      <a:alpha val="40000"/>
+                    </a:schemeClr>
+                  </a:gs>
+                </a:gsLst>
+                <a:lin ang="5400000" scaled="1"/>
+              </a:gradFill>
+              <a:prstDash val="sysDot"/>
+              <a:round/>
+            </a:ln>
+          </p:spPr>
+          <p:style>
+            <a:lnRef idx="1">
+              <a:schemeClr val="accent1"/>
+            </a:lnRef>
+            <a:fillRef idx="0">
+              <a:schemeClr val="accent1"/>
+            </a:fillRef>
+            <a:effectRef idx="0">
+              <a:schemeClr val="accent1"/>
+            </a:effectRef>
+            <a:fontRef idx="minor">
+              <a:schemeClr val="tx1"/>
+            </a:fontRef>
+          </p:style>
+        </p:cxnSp>
+        <p:cxnSp>
+          <p:nvCxnSpPr>
+            <p:cNvPr id="24" name="Straight Connector 23">
+              <a:extLst>
+                <a:ext uri="{FF2B5EF4-FFF2-40B4-BE49-F238E27FC236}">
+                  <a16:creationId xmlns:a16="http://schemas.microsoft.com/office/drawing/2014/main" id="{7F675583-78ED-4BEC-8424-37068227E88F}"/>
+                </a:ext>
+                <a:ext uri="{C183D7F6-B498-43B3-948B-1728B52AA6E4}">
+                  <adec:decorative xmlns:adec="http://schemas.microsoft.com/office/drawing/2017/decorative" val="1"/>
+                </a:ext>
+              </a:extLst>
+            </p:cNvPr>
+            <p:cNvCxnSpPr>
+              <a:cxnSpLocks/>
+            </p:cNvCxnSpPr>
+            <p:nvPr>
+              <p:extLst>
+                <p:ext uri="{386F3935-93C4-4BCD-93E2-E3B085C9AB24}">
+                  <p16:designElem xmlns:p16="http://schemas.microsoft.com/office/powerpoint/2015/main" val="1"/>
+                </p:ext>
+              </p:extLst>
+            </p:nvPr>
+          </p:nvCxnSpPr>
+          <p:spPr>
+            <a:xfrm>
+              <a:off x="7029447" y="3697727"/>
+              <a:ext cx="1285875" cy="0"/>
+            </a:xfrm>
+            <a:prstGeom prst="line">
+              <a:avLst/>
+            </a:prstGeom>
+            <a:ln w="31750" cap="rnd" cmpd="sng">
+              <a:gradFill>
+                <a:gsLst>
+                  <a:gs pos="0">
+                    <a:schemeClr val="tx2">
+                      <a:lumMod val="60000"/>
+                      <a:lumOff val="40000"/>
+                      <a:alpha val="40000"/>
+                    </a:schemeClr>
+                  </a:gs>
+                  <a:gs pos="100000">
+                    <a:schemeClr val="tx2">
+                      <a:lumMod val="75000"/>
+                      <a:alpha val="40000"/>
+                    </a:schemeClr>
+                  </a:gs>
+                </a:gsLst>
+                <a:lin ang="5400000" scaled="1"/>
+              </a:gradFill>
+              <a:prstDash val="sysDot"/>
+              <a:round/>
+            </a:ln>
+          </p:spPr>
+          <p:style>
+            <a:lnRef idx="1">
+              <a:schemeClr val="accent1"/>
+            </a:lnRef>
+            <a:fillRef idx="0">
+              <a:schemeClr val="accent1"/>
+            </a:fillRef>
+            <a:effectRef idx="0">
+              <a:schemeClr val="accent1"/>
+            </a:effectRef>
+            <a:fontRef idx="minor">
+              <a:schemeClr val="tx1"/>
+            </a:fontRef>
+          </p:style>
+        </p:cxnSp>
+        <p:cxnSp>
+          <p:nvCxnSpPr>
+            <p:cNvPr id="25" name="Straight Connector 24">
+              <a:extLst>
+                <a:ext uri="{FF2B5EF4-FFF2-40B4-BE49-F238E27FC236}">
+                  <a16:creationId xmlns:a16="http://schemas.microsoft.com/office/drawing/2014/main" id="{C9BD9726-207D-4725-AA6E-5147080D5BEC}"/>
+                </a:ext>
+                <a:ext uri="{C183D7F6-B498-43B3-948B-1728B52AA6E4}">
+                  <adec:decorative xmlns:adec="http://schemas.microsoft.com/office/drawing/2017/decorative" val="1"/>
+                </a:ext>
+              </a:extLst>
+            </p:cNvPr>
+            <p:cNvCxnSpPr>
+              <a:cxnSpLocks/>
+            </p:cNvCxnSpPr>
+            <p:nvPr>
+              <p:extLst>
+                <p:ext uri="{386F3935-93C4-4BCD-93E2-E3B085C9AB24}">
+                  <p16:designElem xmlns:p16="http://schemas.microsoft.com/office/powerpoint/2015/main" val="1"/>
+                </p:ext>
+              </p:extLst>
+            </p:nvPr>
+          </p:nvCxnSpPr>
+          <p:spPr>
+            <a:xfrm>
+              <a:off x="7029447" y="3880729"/>
+              <a:ext cx="1285875" cy="0"/>
+            </a:xfrm>
+            <a:prstGeom prst="line">
+              <a:avLst/>
+            </a:prstGeom>
+            <a:ln w="31750" cap="rnd" cmpd="sng">
+              <a:gradFill>
+                <a:gsLst>
+                  <a:gs pos="0">
+                    <a:schemeClr val="tx2">
+                      <a:lumMod val="60000"/>
+                      <a:lumOff val="40000"/>
+                      <a:alpha val="40000"/>
+                    </a:schemeClr>
+                  </a:gs>
+                  <a:gs pos="100000">
+                    <a:schemeClr val="tx2">
+                      <a:lumMod val="75000"/>
+                      <a:alpha val="40000"/>
+                    </a:schemeClr>
+                  </a:gs>
+                </a:gsLst>
+                <a:lin ang="5400000" scaled="1"/>
+              </a:gradFill>
+              <a:prstDash val="sysDot"/>
+              <a:round/>
+            </a:ln>
+          </p:spPr>
+          <p:style>
+            <a:lnRef idx="1">
+              <a:schemeClr val="accent1"/>
+            </a:lnRef>
+            <a:fillRef idx="0">
+              <a:schemeClr val="accent1"/>
+            </a:fillRef>
+            <a:effectRef idx="0">
+              <a:schemeClr val="accent1"/>
+            </a:effectRef>
+            <a:fontRef idx="minor">
+              <a:schemeClr val="tx1"/>
+            </a:fontRef>
+          </p:style>
+        </p:cxnSp>
+        <p:cxnSp>
+          <p:nvCxnSpPr>
+            <p:cNvPr id="26" name="Straight Connector 25">
+              <a:extLst>
+                <a:ext uri="{FF2B5EF4-FFF2-40B4-BE49-F238E27FC236}">
+                  <a16:creationId xmlns:a16="http://schemas.microsoft.com/office/drawing/2014/main" id="{B1A43941-4783-4A0B-9385-1952F9F89DEC}"/>
+                </a:ext>
+                <a:ext uri="{C183D7F6-B498-43B3-948B-1728B52AA6E4}">
+                  <adec:decorative xmlns:adec="http://schemas.microsoft.com/office/drawing/2017/decorative" val="1"/>
+                </a:ext>
+              </a:extLst>
+            </p:cNvPr>
+            <p:cNvCxnSpPr>
+              <a:cxnSpLocks/>
+            </p:cNvCxnSpPr>
+            <p:nvPr>
+              <p:extLst>
+                <p:ext uri="{386F3935-93C4-4BCD-93E2-E3B085C9AB24}">
+                  <p16:designElem xmlns:p16="http://schemas.microsoft.com/office/powerpoint/2015/main" val="1"/>
+                </p:ext>
+              </p:extLst>
+            </p:nvPr>
+          </p:nvCxnSpPr>
+          <p:spPr>
+            <a:xfrm>
+              <a:off x="7029447" y="4063732"/>
+              <a:ext cx="1285875" cy="0"/>
+            </a:xfrm>
+            <a:prstGeom prst="line">
+              <a:avLst/>
+            </a:prstGeom>
+            <a:ln w="31750" cap="rnd" cmpd="sng">
+              <a:gradFill>
+                <a:gsLst>
+                  <a:gs pos="0">
+                    <a:schemeClr val="tx2">
+                      <a:lumMod val="60000"/>
+                      <a:lumOff val="40000"/>
+                      <a:alpha val="40000"/>
+                    </a:schemeClr>
+                  </a:gs>
+                  <a:gs pos="100000">
+                    <a:schemeClr val="tx2">
+                      <a:lumMod val="75000"/>
+                      <a:alpha val="40000"/>
+                    </a:schemeClr>
+                  </a:gs>
+                </a:gsLst>
+                <a:lin ang="5400000" scaled="1"/>
+              </a:gradFill>
+              <a:prstDash val="sysDot"/>
+              <a:round/>
+            </a:ln>
+          </p:spPr>
+          <p:style>
+            <a:lnRef idx="1">
+              <a:schemeClr val="accent1"/>
+            </a:lnRef>
+            <a:fillRef idx="0">
+              <a:schemeClr val="accent1"/>
+            </a:fillRef>
+            <a:effectRef idx="0">
+              <a:schemeClr val="accent1"/>
+            </a:effectRef>
+            <a:fontRef idx="minor">
+              <a:schemeClr val="tx1"/>
+            </a:fontRef>
+          </p:style>
+        </p:cxnSp>
+      </p:grpSp>
+      <p:sp>
+        <p:nvSpPr>
+          <p:cNvPr id="28" name="Rectangle 27">
+            <a:extLst>
+              <a:ext uri="{FF2B5EF4-FFF2-40B4-BE49-F238E27FC236}">
+                <a16:creationId xmlns:a16="http://schemas.microsoft.com/office/drawing/2014/main" id="{B4806F9C-3233-4FC3-B300-D5AA58A5CD8F}"/>
+              </a:ext>
+              <a:ext uri="{C183D7F6-B498-43B3-948B-1728B52AA6E4}">
+                <adec:decorative xmlns:adec="http://schemas.microsoft.com/office/drawing/2017/decorative" val="1"/>
+              </a:ext>
+            </a:extLst>
+          </p:cNvPr>
+          <p:cNvSpPr>
+            <a:spLocks noGrp="1" noRot="1" noChangeAspect="1" noMove="1" noResize="1" noEditPoints="1" noAdjustHandles="1" noChangeArrowheads="1" noChangeShapeType="1" noTextEdit="1"/>
+          </p:cNvSpPr>
+          <p:nvPr>
+            <p:extLst>
+              <p:ext uri="{386F3935-93C4-4BCD-93E2-E3B085C9AB24}">
+                <p16:designElem xmlns:p16="http://schemas.microsoft.com/office/powerpoint/2015/main" val="1"/>
+              </p:ext>
+            </p:extLst>
+          </p:nvPr>
+        </p:nvSpPr>
+        <p:spPr>
+          <a:xfrm rot="10800000">
+            <a:off x="-1" y="6140785"/>
+            <a:ext cx="6095997" cy="711252"/>
+          </a:xfrm>
+          <a:prstGeom prst="rect">
+            <a:avLst/>
+          </a:prstGeom>
+          <a:gradFill flip="none" rotWithShape="1">
+            <a:gsLst>
+              <a:gs pos="10000">
+                <a:schemeClr val="tx2">
+                  <a:lumMod val="50000"/>
+                  <a:alpha val="10000"/>
+                </a:schemeClr>
+              </a:gs>
+              <a:gs pos="100000">
+                <a:schemeClr val="tx2">
+                  <a:lumMod val="60000"/>
+                  <a:lumOff val="40000"/>
+                  <a:alpha val="0"/>
+                </a:schemeClr>
+              </a:gs>
+            </a:gsLst>
+            <a:lin ang="8400000" scaled="0"/>
+            <a:tileRect/>
+          </a:gradFill>
+          <a:ln>
+            <a:noFill/>
+          </a:ln>
+        </p:spPr>
+        <p:style>
+          <a:lnRef idx="2">
+            <a:schemeClr val="accent1">
+              <a:shade val="50000"/>
+            </a:schemeClr>
+          </a:lnRef>
+          <a:fillRef idx="1">
+            <a:schemeClr val="accent1"/>
+          </a:fillRef>
+          <a:effectRef idx="0">
+            <a:schemeClr val="accent1"/>
+          </a:effectRef>
+          <a:fontRef idx="minor">
+            <a:schemeClr val="lt1"/>
+          </a:fontRef>
+        </p:style>
+        <p:txBody>
+          <a:bodyPr rtlCol="0" anchor="ctr"/>
+          <a:lstStyle/>
+          <a:p>
+            <a:pPr algn="ctr"/>
+            <a:endParaRPr lang="en-US"/>
+          </a:p>
+        </p:txBody>
+      </p:sp>
+      <p:grpSp>
+        <p:nvGrpSpPr>
+          <p:cNvPr id="30" name="Group 29">
+            <a:extLst>
+              <a:ext uri="{FF2B5EF4-FFF2-40B4-BE49-F238E27FC236}">
+                <a16:creationId xmlns:a16="http://schemas.microsoft.com/office/drawing/2014/main" id="{70E3F9FC-BB7B-433D-8A4F-1BCFA582E019}"/>
+              </a:ext>
+              <a:ext uri="{C183D7F6-B498-43B3-948B-1728B52AA6E4}">
+                <adec:decorative xmlns:adec="http://schemas.microsoft.com/office/drawing/2017/decorative" val="1"/>
+              </a:ext>
+            </a:extLst>
+          </p:cNvPr>
+          <p:cNvGrpSpPr>
+            <a:grpSpLocks noGrp="1" noUngrp="1" noRot="1" noChangeAspect="1" noMove="1" noResize="1"/>
+          </p:cNvGrpSpPr>
+          <p:nvPr>
+            <p:extLst>
+              <p:ext uri="{386F3935-93C4-4BCD-93E2-E3B085C9AB24}">
+                <p16:designElem xmlns:p16="http://schemas.microsoft.com/office/powerpoint/2015/main" val="1"/>
+              </p:ext>
+            </p:extLst>
+          </p:nvPr>
+        </p:nvGrpSpPr>
+        <p:grpSpPr>
+          <a:xfrm rot="5400000">
+            <a:off x="616345" y="5940560"/>
+            <a:ext cx="1285875" cy="549007"/>
+            <a:chOff x="7029447" y="3514725"/>
+            <a:chExt cx="1285875" cy="549007"/>
+          </a:xfrm>
+        </p:grpSpPr>
+        <p:cxnSp>
+          <p:nvCxnSpPr>
+            <p:cNvPr id="31" name="Straight Connector 30">
+              <a:extLst>
+                <a:ext uri="{FF2B5EF4-FFF2-40B4-BE49-F238E27FC236}">
+                  <a16:creationId xmlns:a16="http://schemas.microsoft.com/office/drawing/2014/main" id="{1406F394-9D6F-4986-A3AF-6EF16DEDE62B}"/>
+                </a:ext>
+                <a:ext uri="{C183D7F6-B498-43B3-948B-1728B52AA6E4}">
+                  <adec:decorative xmlns:adec="http://schemas.microsoft.com/office/drawing/2017/decorative" val="1"/>
+                </a:ext>
+              </a:extLst>
+            </p:cNvPr>
+            <p:cNvCxnSpPr>
+              <a:cxnSpLocks/>
+            </p:cNvCxnSpPr>
+            <p:nvPr>
+              <p:extLst>
+                <p:ext uri="{386F3935-93C4-4BCD-93E2-E3B085C9AB24}">
+                  <p16:designElem xmlns:p16="http://schemas.microsoft.com/office/powerpoint/2015/main" val="1"/>
+                </p:ext>
+              </p:extLst>
+            </p:nvPr>
+          </p:nvCxnSpPr>
+          <p:spPr>
+            <a:xfrm>
+              <a:off x="7029447" y="3514725"/>
+              <a:ext cx="1285875" cy="0"/>
+            </a:xfrm>
+            <a:prstGeom prst="line">
+              <a:avLst/>
+            </a:prstGeom>
+            <a:ln w="31750" cap="rnd" cmpd="sng">
+              <a:gradFill>
+                <a:gsLst>
+                  <a:gs pos="0">
+                    <a:schemeClr val="tx2">
+                      <a:lumMod val="60000"/>
+                      <a:lumOff val="40000"/>
+                      <a:alpha val="40000"/>
+                    </a:schemeClr>
+                  </a:gs>
+                  <a:gs pos="100000">
+                    <a:schemeClr val="tx2">
+                      <a:lumMod val="50000"/>
+                      <a:alpha val="40000"/>
+                    </a:schemeClr>
+                  </a:gs>
+                </a:gsLst>
+                <a:lin ang="5400000" scaled="1"/>
+              </a:gradFill>
+              <a:prstDash val="sysDot"/>
+              <a:round/>
+            </a:ln>
+          </p:spPr>
+          <p:style>
+            <a:lnRef idx="1">
+              <a:schemeClr val="accent1"/>
+            </a:lnRef>
+            <a:fillRef idx="0">
+              <a:schemeClr val="accent1"/>
+            </a:fillRef>
+            <a:effectRef idx="0">
+              <a:schemeClr val="accent1"/>
+            </a:effectRef>
+            <a:fontRef idx="minor">
+              <a:schemeClr val="tx1"/>
+            </a:fontRef>
+          </p:style>
+        </p:cxnSp>
+        <p:cxnSp>
+          <p:nvCxnSpPr>
+            <p:cNvPr id="32" name="Straight Connector 31">
+              <a:extLst>
+                <a:ext uri="{FF2B5EF4-FFF2-40B4-BE49-F238E27FC236}">
+                  <a16:creationId xmlns:a16="http://schemas.microsoft.com/office/drawing/2014/main" id="{54F98CF1-0C8F-435D-846B-D3C506378FC8}"/>
+                </a:ext>
+                <a:ext uri="{C183D7F6-B498-43B3-948B-1728B52AA6E4}">
+                  <adec:decorative xmlns:adec="http://schemas.microsoft.com/office/drawing/2017/decorative" val="1"/>
+                </a:ext>
+              </a:extLst>
+            </p:cNvPr>
+            <p:cNvCxnSpPr>
+              <a:cxnSpLocks/>
+            </p:cNvCxnSpPr>
+            <p:nvPr>
+              <p:extLst>
+                <p:ext uri="{386F3935-93C4-4BCD-93E2-E3B085C9AB24}">
+                  <p16:designElem xmlns:p16="http://schemas.microsoft.com/office/powerpoint/2015/main" val="1"/>
+                </p:ext>
+              </p:extLst>
+            </p:nvPr>
+          </p:nvCxnSpPr>
+          <p:spPr>
+            <a:xfrm>
+              <a:off x="7029447" y="3697727"/>
+              <a:ext cx="1285875" cy="0"/>
+            </a:xfrm>
+            <a:prstGeom prst="line">
+              <a:avLst/>
+            </a:prstGeom>
+            <a:ln w="31750" cap="rnd" cmpd="sng">
+              <a:gradFill>
+                <a:gsLst>
+                  <a:gs pos="0">
+                    <a:schemeClr val="tx2">
+                      <a:lumMod val="60000"/>
+                      <a:lumOff val="40000"/>
+                      <a:alpha val="40000"/>
+                    </a:schemeClr>
+                  </a:gs>
+                  <a:gs pos="100000">
+                    <a:schemeClr val="tx2">
+                      <a:lumMod val="50000"/>
+                      <a:alpha val="40000"/>
+                    </a:schemeClr>
+                  </a:gs>
+                </a:gsLst>
+                <a:lin ang="5400000" scaled="1"/>
+              </a:gradFill>
+              <a:prstDash val="sysDot"/>
+              <a:round/>
+            </a:ln>
+          </p:spPr>
+          <p:style>
+            <a:lnRef idx="1">
+              <a:schemeClr val="accent1"/>
+            </a:lnRef>
+            <a:fillRef idx="0">
+              <a:schemeClr val="accent1"/>
+            </a:fillRef>
+            <a:effectRef idx="0">
+              <a:schemeClr val="accent1"/>
+            </a:effectRef>
+            <a:fontRef idx="minor">
+              <a:schemeClr val="tx1"/>
+            </a:fontRef>
+          </p:style>
+        </p:cxnSp>
+        <p:cxnSp>
+          <p:nvCxnSpPr>
+            <p:cNvPr id="33" name="Straight Connector 32">
+              <a:extLst>
+                <a:ext uri="{FF2B5EF4-FFF2-40B4-BE49-F238E27FC236}">
+                  <a16:creationId xmlns:a16="http://schemas.microsoft.com/office/drawing/2014/main" id="{2781ACDD-4A0F-4369-A468-3FEC355F8E29}"/>
+                </a:ext>
+                <a:ext uri="{C183D7F6-B498-43B3-948B-1728B52AA6E4}">
+                  <adec:decorative xmlns:adec="http://schemas.microsoft.com/office/drawing/2017/decorative" val="1"/>
+                </a:ext>
+              </a:extLst>
+            </p:cNvPr>
+            <p:cNvCxnSpPr>
+              <a:cxnSpLocks/>
+            </p:cNvCxnSpPr>
+            <p:nvPr>
+              <p:extLst>
+                <p:ext uri="{386F3935-93C4-4BCD-93E2-E3B085C9AB24}">
+                  <p16:designElem xmlns:p16="http://schemas.microsoft.com/office/powerpoint/2015/main" val="1"/>
+                </p:ext>
+              </p:extLst>
+            </p:nvPr>
+          </p:nvCxnSpPr>
+          <p:spPr>
+            <a:xfrm>
+              <a:off x="7029447" y="3880729"/>
+              <a:ext cx="1285875" cy="0"/>
+            </a:xfrm>
+            <a:prstGeom prst="line">
+              <a:avLst/>
+            </a:prstGeom>
+            <a:ln w="31750" cap="rnd" cmpd="sng">
+              <a:gradFill>
+                <a:gsLst>
+                  <a:gs pos="0">
+                    <a:schemeClr val="tx2">
+                      <a:lumMod val="60000"/>
+                      <a:lumOff val="40000"/>
+                      <a:alpha val="40000"/>
+                    </a:schemeClr>
+                  </a:gs>
+                  <a:gs pos="100000">
+                    <a:schemeClr val="tx2">
+                      <a:lumMod val="50000"/>
+                      <a:alpha val="40000"/>
+                    </a:schemeClr>
+                  </a:gs>
+                </a:gsLst>
+                <a:lin ang="5400000" scaled="1"/>
+              </a:gradFill>
+              <a:prstDash val="sysDot"/>
+              <a:round/>
+            </a:ln>
+          </p:spPr>
+          <p:style>
+            <a:lnRef idx="1">
+              <a:schemeClr val="accent1"/>
+            </a:lnRef>
+            <a:fillRef idx="0">
+              <a:schemeClr val="accent1"/>
+            </a:fillRef>
+            <a:effectRef idx="0">
+              <a:schemeClr val="accent1"/>
+            </a:effectRef>
+            <a:fontRef idx="minor">
+              <a:schemeClr val="tx1"/>
+            </a:fontRef>
+          </p:style>
+        </p:cxnSp>
+        <p:cxnSp>
+          <p:nvCxnSpPr>
+            <p:cNvPr id="34" name="Straight Connector 33">
+              <a:extLst>
+                <a:ext uri="{FF2B5EF4-FFF2-40B4-BE49-F238E27FC236}">
+                  <a16:creationId xmlns:a16="http://schemas.microsoft.com/office/drawing/2014/main" id="{2BB34D61-E762-4862-9DA8-702D97A3620C}"/>
+                </a:ext>
+                <a:ext uri="{C183D7F6-B498-43B3-948B-1728B52AA6E4}">
+                  <adec:decorative xmlns:adec="http://schemas.microsoft.com/office/drawing/2017/decorative" val="1"/>
+                </a:ext>
+              </a:extLst>
+            </p:cNvPr>
+            <p:cNvCxnSpPr>
+              <a:cxnSpLocks/>
+            </p:cNvCxnSpPr>
+            <p:nvPr>
+              <p:extLst>
+                <p:ext uri="{386F3935-93C4-4BCD-93E2-E3B085C9AB24}">
+                  <p16:designElem xmlns:p16="http://schemas.microsoft.com/office/powerpoint/2015/main" val="1"/>
+                </p:ext>
+              </p:extLst>
+            </p:nvPr>
+          </p:nvCxnSpPr>
+          <p:spPr>
+            <a:xfrm>
+              <a:off x="7029447" y="4063732"/>
+              <a:ext cx="1285875" cy="0"/>
+            </a:xfrm>
+            <a:prstGeom prst="line">
+              <a:avLst/>
+            </a:prstGeom>
+            <a:ln w="31750" cap="rnd" cmpd="sng">
+              <a:gradFill>
+                <a:gsLst>
+                  <a:gs pos="0">
+                    <a:schemeClr val="tx2">
+                      <a:lumMod val="60000"/>
+                      <a:lumOff val="40000"/>
+                      <a:alpha val="40000"/>
+                    </a:schemeClr>
+                  </a:gs>
+                  <a:gs pos="100000">
+                    <a:schemeClr val="tx2">
+                      <a:lumMod val="50000"/>
+                      <a:alpha val="40000"/>
+                    </a:schemeClr>
+                  </a:gs>
+                </a:gsLst>
+                <a:lin ang="5400000" scaled="1"/>
+              </a:gradFill>
+              <a:prstDash val="sysDot"/>
+              <a:round/>
+            </a:ln>
+          </p:spPr>
+          <p:style>
+            <a:lnRef idx="1">
+              <a:schemeClr val="accent1"/>
+            </a:lnRef>
+            <a:fillRef idx="0">
+              <a:schemeClr val="accent1"/>
+            </a:fillRef>
+            <a:effectRef idx="0">
+              <a:schemeClr val="accent1"/>
+            </a:effectRef>
+            <a:fontRef idx="minor">
+              <a:schemeClr val="tx1"/>
+            </a:fontRef>
+          </p:style>
+        </p:cxnSp>
+      </p:grpSp>
+      <p:sp>
+        <p:nvSpPr>
+          <p:cNvPr id="2" name="Title 1">
+            <a:extLst>
+              <a:ext uri="{FF2B5EF4-FFF2-40B4-BE49-F238E27FC236}">
+                <a16:creationId xmlns:a16="http://schemas.microsoft.com/office/drawing/2014/main" id="{FB780660-1156-732B-730E-66EE429A7087}"/>
+              </a:ext>
+            </a:extLst>
+          </p:cNvPr>
+          <p:cNvSpPr>
+            <a:spLocks noGrp="1"/>
+          </p:cNvSpPr>
+          <p:nvPr>
+            <p:ph type="title"/>
+          </p:nvPr>
+        </p:nvSpPr>
+        <p:spPr>
+          <a:xfrm>
+            <a:off x="630936" y="630936"/>
+            <a:ext cx="5465064" cy="5626947"/>
+          </a:xfrm>
+          <a:noFill/>
+        </p:spPr>
+        <p:txBody>
+          <a:bodyPr anchor="ctr">
+            <a:normAutofit/>
+          </a:bodyPr>
+          <a:lstStyle/>
+          <a:p>
+            <a:r>
+              <a:rPr lang="en-US" sz="4800" dirty="0">
+                <a:solidFill>
+                  <a:schemeClr val="bg1"/>
+                </a:solidFill>
+              </a:rPr>
+              <a:t>Why THEIA?</a:t>
+            </a:r>
+            <a:br>
+              <a:rPr lang="en-US" sz="4800" dirty="0">
+                <a:solidFill>
+                  <a:schemeClr val="bg1"/>
+                </a:solidFill>
+              </a:rPr>
+            </a:br>
+            <a:r>
+              <a:rPr lang="en-US" sz="4800" dirty="0">
+                <a:solidFill>
+                  <a:schemeClr val="bg1"/>
+                </a:solidFill>
+              </a:rPr>
+              <a:t>Comparative Analysis</a:t>
+            </a:r>
+          </a:p>
+        </p:txBody>
+      </p:sp>
+      <p:sp>
+        <p:nvSpPr>
+          <p:cNvPr id="3" name="Text Placeholder 2">
+            <a:extLst>
+              <a:ext uri="{FF2B5EF4-FFF2-40B4-BE49-F238E27FC236}">
+                <a16:creationId xmlns:a16="http://schemas.microsoft.com/office/drawing/2014/main" id="{416F39CC-BC1F-8002-F12C-648C9D4212F2}"/>
+              </a:ext>
+            </a:extLst>
+          </p:cNvPr>
+          <p:cNvSpPr>
+            <a:spLocks noGrp="1"/>
+          </p:cNvSpPr>
+          <p:nvPr>
+            <p:ph idx="1"/>
+          </p:nvPr>
+        </p:nvSpPr>
+        <p:spPr>
+          <a:xfrm>
+            <a:off x="6502152" y="630936"/>
+            <a:ext cx="4978592" cy="5626957"/>
+          </a:xfrm>
+          <a:noFill/>
+        </p:spPr>
+        <p:txBody>
+          <a:bodyPr anchor="ctr">
+            <a:normAutofit/>
+          </a:bodyPr>
+          <a:lstStyle/>
+          <a:p>
+            <a:pPr>
+              <a:buFont typeface="Wingdings" panose="05000000000000000000" pitchFamily="2" charset="2"/>
+              <a:buChar char="q"/>
+            </a:pPr>
+            <a:r>
+              <a:rPr lang="en-US" sz="1800" dirty="0">
+                <a:solidFill>
+                  <a:schemeClr val="bg1"/>
+                </a:solidFill>
+              </a:rPr>
+              <a:t>A complimentary tool to use along with a cane or service animal</a:t>
+            </a:r>
+          </a:p>
+          <a:p>
+            <a:pPr lvl="1">
+              <a:buFont typeface="Wingdings" panose="05000000000000000000" pitchFamily="2" charset="2"/>
+              <a:buChar char="q"/>
+            </a:pPr>
+            <a:r>
+              <a:rPr lang="en-US" sz="1400" dirty="0">
+                <a:solidFill>
+                  <a:schemeClr val="bg1"/>
+                </a:solidFill>
+              </a:rPr>
+              <a:t>User route preferences</a:t>
+            </a:r>
+          </a:p>
+          <a:p>
+            <a:pPr lvl="1">
+              <a:buFont typeface="Wingdings" panose="05000000000000000000" pitchFamily="2" charset="2"/>
+              <a:buChar char="q"/>
+            </a:pPr>
+            <a:r>
+              <a:rPr lang="en-US" sz="1400" dirty="0">
+                <a:solidFill>
+                  <a:schemeClr val="bg1"/>
+                </a:solidFill>
+              </a:rPr>
+              <a:t>Caretaker safety controls</a:t>
+            </a:r>
+          </a:p>
+          <a:p>
+            <a:pPr>
+              <a:buFont typeface="Wingdings" panose="05000000000000000000" pitchFamily="2" charset="2"/>
+              <a:buChar char="q"/>
+            </a:pPr>
+            <a:r>
+              <a:rPr lang="en-US" sz="1800" dirty="0">
+                <a:solidFill>
+                  <a:schemeClr val="bg1"/>
+                </a:solidFill>
+              </a:rPr>
+              <a:t>When Primary User uses solely a White Cane</a:t>
+            </a:r>
+          </a:p>
+          <a:p>
+            <a:pPr lvl="1">
+              <a:buFont typeface="Wingdings" panose="05000000000000000000" pitchFamily="2" charset="2"/>
+              <a:buChar char="q"/>
+            </a:pPr>
+            <a:r>
+              <a:rPr lang="en-US" sz="1400" dirty="0">
+                <a:solidFill>
+                  <a:schemeClr val="bg1"/>
+                </a:solidFill>
+              </a:rPr>
+              <a:t>Strengths: Inexpensive, reliable physical ground obstacle detection</a:t>
+            </a:r>
+          </a:p>
+          <a:p>
+            <a:pPr lvl="1">
+              <a:buFont typeface="Wingdings" panose="05000000000000000000" pitchFamily="2" charset="2"/>
+              <a:buChar char="q"/>
+            </a:pPr>
+            <a:r>
+              <a:rPr lang="en-US" sz="1400" dirty="0">
+                <a:solidFill>
+                  <a:schemeClr val="bg1"/>
+                </a:solidFill>
+              </a:rPr>
+              <a:t>Limitations: Can’t provide context for indoor room numbers, floor plans, or destination directions</a:t>
+            </a:r>
+          </a:p>
+          <a:p>
+            <a:pPr>
+              <a:buFont typeface="Wingdings" panose="05000000000000000000" pitchFamily="2" charset="2"/>
+              <a:buChar char="q"/>
+            </a:pPr>
+            <a:r>
+              <a:rPr lang="en-US" sz="1800" dirty="0">
+                <a:solidFill>
+                  <a:schemeClr val="bg1"/>
+                </a:solidFill>
+              </a:rPr>
+              <a:t>When Primary User uses solely a Service Animal</a:t>
+            </a:r>
+          </a:p>
+          <a:p>
+            <a:pPr lvl="1">
+              <a:buFont typeface="Wingdings" panose="05000000000000000000" pitchFamily="2" charset="2"/>
+              <a:buChar char="q"/>
+            </a:pPr>
+            <a:r>
+              <a:rPr lang="en-US" sz="1400" dirty="0">
+                <a:solidFill>
+                  <a:schemeClr val="bg1"/>
+                </a:solidFill>
+              </a:rPr>
+              <a:t>Strengths: Service animals assist in navigating through crowds and drop-offs</a:t>
+            </a:r>
+          </a:p>
+          <a:p>
+            <a:pPr lvl="1">
+              <a:buFont typeface="Wingdings" panose="05000000000000000000" pitchFamily="2" charset="2"/>
+              <a:buChar char="q"/>
+            </a:pPr>
+            <a:r>
+              <a:rPr lang="en-US" sz="1400" dirty="0">
+                <a:solidFill>
+                  <a:schemeClr val="bg1"/>
+                </a:solidFill>
+              </a:rPr>
+              <a:t>Limitations: High maintenance costs and training, can’t identify specific classrooms, navigate complex multi-floor buildings, nor be able to dispatch emergency SMS location texts during a fall</a:t>
+            </a:r>
+          </a:p>
+          <a:p>
+            <a:pPr>
+              <a:buFont typeface="Wingdings" panose="05000000000000000000" pitchFamily="2" charset="2"/>
+              <a:buChar char="q"/>
+            </a:pPr>
+            <a:r>
+              <a:rPr lang="en-US" sz="1800" dirty="0">
+                <a:solidFill>
+                  <a:schemeClr val="bg1"/>
+                </a:solidFill>
+              </a:rPr>
+              <a:t>Using Project THEIA</a:t>
+            </a:r>
+          </a:p>
+          <a:p>
+            <a:pPr lvl="1">
+              <a:buFont typeface="Wingdings" panose="05000000000000000000" pitchFamily="2" charset="2"/>
+              <a:buChar char="q"/>
+            </a:pPr>
+            <a:r>
+              <a:rPr lang="en-US" sz="1400" dirty="0">
+                <a:solidFill>
+                  <a:schemeClr val="bg1"/>
+                </a:solidFill>
+              </a:rPr>
+              <a:t>Combines hands-free 3D spatial audio, room-level indoor navigation within multiple floors, elevator guidance, and automated fall/emergency escalation</a:t>
+            </a:r>
+          </a:p>
+          <a:p>
+            <a:pPr marL="0" indent="0">
+              <a:buNone/>
+            </a:pPr>
+            <a:endParaRPr lang="en-US" sz="1800" dirty="0">
+              <a:solidFill>
+                <a:schemeClr val="bg1"/>
+              </a:solidFill>
+            </a:endParaRPr>
+          </a:p>
+        </p:txBody>
+      </p:sp>
+    </p:spTree>
+    <p:extLst>
+      <p:ext uri="{BB962C8B-B14F-4D97-AF65-F5344CB8AC3E}">
+        <p14:creationId xmlns:p14="http://schemas.microsoft.com/office/powerpoint/2010/main" val="297628799"/>
+      </p:ext>
+    </p:extLst>
+  </p:cSld>
+  <p:clrMapOvr>
+    <a:masterClrMapping/>
+  </p:clrMapOvr>
+  <p:timing>
+    <p:tnLst>
+      <p:par>
+        <p:cTn id="1" dur="indefinite" restart="never" nodeType="tmRoot">
+          <p:childTnLst>
+            <p:seq concurrent="1" nextAc="seek">
+              <p:cTn id="2" dur="indefinite" nodeType="mainSeq">
+                <p:childTnLst>
+                  <p:par>
+                    <p:cTn id="3" fill="hold">
+                      <p:stCondLst>
+                        <p:cond delay="indefinite"/>
+                      </p:stCondLst>
+                      <p:childTnLst>
+                        <p:par>
+                          <p:cTn id="4" fill="hold">
+                            <p:stCondLst>
+                              <p:cond delay="0"/>
+                            </p:stCondLst>
+                            <p:childTnLst>
+                              <p:par>
+                                <p:cTn id="5" presetID="10" presetClass="entr" presetSubtype="0" fill="hold" grpId="0" nodeType="clickEffect">
+                                  <p:stCondLst>
+                                    <p:cond delay="500"/>
+                                  </p:stCondLst>
+                                  <p:childTnLst>
+                                    <p:set>
+                                      <p:cBhvr>
+                                        <p:cTn id="6" dur="1" fill="hold">
+                                          <p:stCondLst>
+                                            <p:cond delay="0"/>
+                                          </p:stCondLst>
+                                        </p:cTn>
+                                        <p:tgtEl>
+                                          <p:spTgt spid="2"/>
+                                        </p:tgtEl>
+                                        <p:attrNameLst>
+                                          <p:attrName>style.visibility</p:attrName>
+                                        </p:attrNameLst>
+                                      </p:cBhvr>
+                                      <p:to>
+                                        <p:strVal val="visible"/>
+                                      </p:to>
+                                    </p:set>
+                                    <p:animEffect transition="in" filter="fade">
+                                      <p:cBhvr>
+                                        <p:cTn id="7" dur="400"/>
+                                        <p:tgtEl>
+                                          <p:spTgt spid="2"/>
+                                        </p:tgtEl>
+                                      </p:cBhvr>
+                                    </p:animEffect>
+                                  </p:childTnLst>
+                                </p:cTn>
+                              </p:par>
+                            </p:childTnLst>
+                          </p:cTn>
+                        </p:par>
+                      </p:childTnLst>
+                    </p:cTn>
+                  </p:par>
+                  <p:par>
+                    <p:cTn id="8" fill="hold">
+                      <p:stCondLst>
+                        <p:cond delay="indefinite"/>
+                      </p:stCondLst>
+                      <p:childTnLst>
+                        <p:par>
+                          <p:cTn id="9" fill="hold">
+                            <p:stCondLst>
+                              <p:cond delay="0"/>
+                            </p:stCondLst>
+                            <p:childTnLst>
+                              <p:par>
+                                <p:cTn id="10" presetID="10" presetClass="entr" presetSubtype="0" fill="hold" grpId="0" nodeType="clickEffect">
+                                  <p:stCondLst>
+                                    <p:cond delay="500"/>
+                                  </p:stCondLst>
+                                  <p:childTnLst>
+                                    <p:set>
+                                      <p:cBhvr>
+                                        <p:cTn id="11" dur="1" fill="hold">
+                                          <p:stCondLst>
+                                            <p:cond delay="0"/>
+                                          </p:stCondLst>
+                                        </p:cTn>
+                                        <p:tgtEl>
+                                          <p:spTgt spid="3">
+                                            <p:txEl>
+                                              <p:pRg st="0" end="0"/>
+                                            </p:txEl>
+                                          </p:spTgt>
+                                        </p:tgtEl>
+                                        <p:attrNameLst>
+                                          <p:attrName>style.visibility</p:attrName>
+                                        </p:attrNameLst>
+                                      </p:cBhvr>
+                                      <p:to>
+                                        <p:strVal val="visible"/>
+                                      </p:to>
+                                    </p:set>
+                                    <p:animEffect transition="in" filter="fade">
+                                      <p:cBhvr>
+                                        <p:cTn id="12" dur="400"/>
+                                        <p:tgtEl>
+                                          <p:spTgt spid="3">
+                                            <p:txEl>
+                                              <p:pRg st="0" end="0"/>
+                                            </p:txEl>
+                                          </p:spTgt>
+                                        </p:tgtEl>
+                                      </p:cBhvr>
+                                    </p:animEffect>
+                                  </p:childTnLst>
+                                </p:cTn>
+                              </p:par>
+                              <p:par>
+                                <p:cTn id="13" presetID="10" presetClass="entr" presetSubtype="0" fill="hold" grpId="0" nodeType="withEffect">
+                                  <p:stCondLst>
+                                    <p:cond delay="2000"/>
+                                  </p:stCondLst>
+                                  <p:childTnLst>
+                                    <p:set>
+                                      <p:cBhvr>
+                                        <p:cTn id="14" dur="1" fill="hold">
+                                          <p:stCondLst>
+                                            <p:cond delay="0"/>
+                                          </p:stCondLst>
+                                        </p:cTn>
+                                        <p:tgtEl>
+                                          <p:spTgt spid="3">
+                                            <p:txEl>
+                                              <p:pRg st="1" end="1"/>
+                                            </p:txEl>
+                                          </p:spTgt>
+                                        </p:tgtEl>
+                                        <p:attrNameLst>
+                                          <p:attrName>style.visibility</p:attrName>
+                                        </p:attrNameLst>
+                                      </p:cBhvr>
+                                      <p:to>
+                                        <p:strVal val="visible"/>
+                                      </p:to>
+                                    </p:set>
+                                    <p:animEffect transition="in" filter="fade">
+                                      <p:cBhvr>
+                                        <p:cTn id="15" dur="400"/>
+                                        <p:tgtEl>
+                                          <p:spTgt spid="3">
+                                            <p:txEl>
+                                              <p:pRg st="1" end="1"/>
+                                            </p:txEl>
+                                          </p:spTgt>
+                                        </p:tgtEl>
+                                      </p:cBhvr>
+                                    </p:animEffect>
+                                  </p:childTnLst>
+                                </p:cTn>
+                              </p:par>
+                              <p:par>
+                                <p:cTn id="16" presetID="10" presetClass="entr" presetSubtype="0" fill="hold" grpId="0" nodeType="withEffect">
+                                  <p:stCondLst>
+                                    <p:cond delay="2000"/>
+                                  </p:stCondLst>
+                                  <p:childTnLst>
+                                    <p:set>
+                                      <p:cBhvr>
+                                        <p:cTn id="17" dur="1" fill="hold">
+                                          <p:stCondLst>
+                                            <p:cond delay="0"/>
+                                          </p:stCondLst>
+                                        </p:cTn>
+                                        <p:tgtEl>
+                                          <p:spTgt spid="3">
+                                            <p:txEl>
+                                              <p:pRg st="2" end="2"/>
+                                            </p:txEl>
+                                          </p:spTgt>
+                                        </p:tgtEl>
+                                        <p:attrNameLst>
+                                          <p:attrName>style.visibility</p:attrName>
+                                        </p:attrNameLst>
+                                      </p:cBhvr>
+                                      <p:to>
+                                        <p:strVal val="visible"/>
+                                      </p:to>
+                                    </p:set>
+                                    <p:animEffect transition="in" filter="fade">
+                                      <p:cBhvr>
+                                        <p:cTn id="18" dur="400"/>
+                                        <p:tgtEl>
+                                          <p:spTgt spid="3">
+                                            <p:txEl>
+                                              <p:pRg st="2" end="2"/>
+                                            </p:txEl>
+                                          </p:spTgt>
+                                        </p:tgtEl>
+                                      </p:cBhvr>
+                                    </p:animEffect>
+                                  </p:childTnLst>
+                                </p:cTn>
+                              </p:par>
+                            </p:childTnLst>
+                          </p:cTn>
+                        </p:par>
+                      </p:childTnLst>
+                    </p:cTn>
+                  </p:par>
+                  <p:par>
+                    <p:cTn id="19" fill="hold">
+                      <p:stCondLst>
+                        <p:cond delay="indefinite"/>
+                      </p:stCondLst>
+                      <p:childTnLst>
+                        <p:par>
+                          <p:cTn id="20" fill="hold">
+                            <p:stCondLst>
+                              <p:cond delay="0"/>
+                            </p:stCondLst>
+                            <p:childTnLst>
+                              <p:par>
+                                <p:cTn id="21" presetID="10" presetClass="entr" presetSubtype="0" fill="hold" grpId="0" nodeType="clickEffect">
+                                  <p:stCondLst>
+                                    <p:cond delay="500"/>
+                                  </p:stCondLst>
+                                  <p:childTnLst>
+                                    <p:set>
+                                      <p:cBhvr>
+                                        <p:cTn id="22" dur="1" fill="hold">
+                                          <p:stCondLst>
+                                            <p:cond delay="0"/>
+                                          </p:stCondLst>
+                                        </p:cTn>
+                                        <p:tgtEl>
+                                          <p:spTgt spid="3">
+                                            <p:txEl>
+                                              <p:pRg st="3" end="3"/>
+                                            </p:txEl>
+                                          </p:spTgt>
+                                        </p:tgtEl>
+                                        <p:attrNameLst>
+                                          <p:attrName>style.visibility</p:attrName>
+                                        </p:attrNameLst>
+                                      </p:cBhvr>
+                                      <p:to>
+                                        <p:strVal val="visible"/>
+                                      </p:to>
+                                    </p:set>
+                                    <p:animEffect transition="in" filter="fade">
+                                      <p:cBhvr>
+                                        <p:cTn id="23" dur="400"/>
+                                        <p:tgtEl>
+                                          <p:spTgt spid="3">
+                                            <p:txEl>
+                                              <p:pRg st="3" end="3"/>
+                                            </p:txEl>
+                                          </p:spTgt>
+                                        </p:tgtEl>
+                                      </p:cBhvr>
+                                    </p:animEffect>
+                                  </p:childTnLst>
+                                </p:cTn>
+                              </p:par>
+                              <p:par>
+                                <p:cTn id="24" presetID="10" presetClass="entr" presetSubtype="0" fill="hold" grpId="0" nodeType="withEffect">
+                                  <p:stCondLst>
+                                    <p:cond delay="2000"/>
+                                  </p:stCondLst>
+                                  <p:childTnLst>
+                                    <p:set>
+                                      <p:cBhvr>
+                                        <p:cTn id="25" dur="1" fill="hold">
+                                          <p:stCondLst>
+                                            <p:cond delay="0"/>
+                                          </p:stCondLst>
+                                        </p:cTn>
+                                        <p:tgtEl>
+                                          <p:spTgt spid="3">
+                                            <p:txEl>
+                                              <p:pRg st="4" end="4"/>
+                                            </p:txEl>
+                                          </p:spTgt>
+                                        </p:tgtEl>
+                                        <p:attrNameLst>
+                                          <p:attrName>style.visibility</p:attrName>
+                                        </p:attrNameLst>
+                                      </p:cBhvr>
+                                      <p:to>
+                                        <p:strVal val="visible"/>
+                                      </p:to>
+                                    </p:set>
+                                    <p:animEffect transition="in" filter="fade">
+                                      <p:cBhvr>
+                                        <p:cTn id="26" dur="400"/>
+                                        <p:tgtEl>
+                                          <p:spTgt spid="3">
+                                            <p:txEl>
+                                              <p:pRg st="4" end="4"/>
+                                            </p:txEl>
+                                          </p:spTgt>
+                                        </p:tgtEl>
+                                      </p:cBhvr>
+                                    </p:animEffect>
+                                  </p:childTnLst>
+                                </p:cTn>
+                              </p:par>
+                              <p:par>
+                                <p:cTn id="27" presetID="10" presetClass="entr" presetSubtype="0" fill="hold" grpId="0" nodeType="withEffect">
+                                  <p:stCondLst>
+                                    <p:cond delay="2000"/>
+                                  </p:stCondLst>
+                                  <p:childTnLst>
+                                    <p:set>
+                                      <p:cBhvr>
+                                        <p:cTn id="28" dur="1" fill="hold">
+                                          <p:stCondLst>
+                                            <p:cond delay="0"/>
+                                          </p:stCondLst>
+                                        </p:cTn>
+                                        <p:tgtEl>
+                                          <p:spTgt spid="3">
+                                            <p:txEl>
+                                              <p:pRg st="5" end="5"/>
+                                            </p:txEl>
+                                          </p:spTgt>
+                                        </p:tgtEl>
+                                        <p:attrNameLst>
+                                          <p:attrName>style.visibility</p:attrName>
+                                        </p:attrNameLst>
+                                      </p:cBhvr>
+                                      <p:to>
+                                        <p:strVal val="visible"/>
+                                      </p:to>
+                                    </p:set>
+                                    <p:animEffect transition="in" filter="fade">
+                                      <p:cBhvr>
+                                        <p:cTn id="29" dur="400"/>
+                                        <p:tgtEl>
+                                          <p:spTgt spid="3">
+                                            <p:txEl>
+                                              <p:pRg st="5" end="5"/>
+                                            </p:txEl>
+                                          </p:spTgt>
+                                        </p:tgtEl>
+                                      </p:cBhvr>
+                                    </p:animEffect>
+                                  </p:childTnLst>
+                                </p:cTn>
+                              </p:par>
+                            </p:childTnLst>
+                          </p:cTn>
+                        </p:par>
+                      </p:childTnLst>
+                    </p:cTn>
+                  </p:par>
+                  <p:par>
+                    <p:cTn id="30" fill="hold">
+                      <p:stCondLst>
+                        <p:cond delay="indefinite"/>
+                      </p:stCondLst>
+                      <p:childTnLst>
+                        <p:par>
+                          <p:cTn id="31" fill="hold">
+                            <p:stCondLst>
+                              <p:cond delay="0"/>
+                            </p:stCondLst>
+                            <p:childTnLst>
+                              <p:par>
+                                <p:cTn id="32" presetID="10" presetClass="entr" presetSubtype="0" fill="hold" grpId="0" nodeType="clickEffect">
+                                  <p:stCondLst>
+                                    <p:cond delay="500"/>
+                                  </p:stCondLst>
+                                  <p:childTnLst>
+                                    <p:set>
+                                      <p:cBhvr>
+                                        <p:cTn id="33" dur="1" fill="hold">
+                                          <p:stCondLst>
+                                            <p:cond delay="0"/>
+                                          </p:stCondLst>
+                                        </p:cTn>
+                                        <p:tgtEl>
+                                          <p:spTgt spid="3">
+                                            <p:txEl>
+                                              <p:pRg st="6" end="6"/>
+                                            </p:txEl>
+                                          </p:spTgt>
+                                        </p:tgtEl>
+                                        <p:attrNameLst>
+                                          <p:attrName>style.visibility</p:attrName>
+                                        </p:attrNameLst>
+                                      </p:cBhvr>
+                                      <p:to>
+                                        <p:strVal val="visible"/>
+                                      </p:to>
+                                    </p:set>
+                                    <p:animEffect transition="in" filter="fade">
+                                      <p:cBhvr>
+                                        <p:cTn id="34" dur="400"/>
+                                        <p:tgtEl>
+                                          <p:spTgt spid="3">
+                                            <p:txEl>
+                                              <p:pRg st="6" end="6"/>
+                                            </p:txEl>
+                                          </p:spTgt>
+                                        </p:tgtEl>
+                                      </p:cBhvr>
+                                    </p:animEffect>
+                                  </p:childTnLst>
+                                </p:cTn>
+                              </p:par>
+                              <p:par>
+                                <p:cTn id="35" presetID="10" presetClass="entr" presetSubtype="0" fill="hold" grpId="0" nodeType="withEffect">
+                                  <p:stCondLst>
+                                    <p:cond delay="2000"/>
+                                  </p:stCondLst>
+                                  <p:childTnLst>
+                                    <p:set>
+                                      <p:cBhvr>
+                                        <p:cTn id="36" dur="1" fill="hold">
+                                          <p:stCondLst>
+                                            <p:cond delay="0"/>
+                                          </p:stCondLst>
+                                        </p:cTn>
+                                        <p:tgtEl>
+                                          <p:spTgt spid="3">
+                                            <p:txEl>
+                                              <p:pRg st="7" end="7"/>
+                                            </p:txEl>
+                                          </p:spTgt>
+                                        </p:tgtEl>
+                                        <p:attrNameLst>
+                                          <p:attrName>style.visibility</p:attrName>
+                                        </p:attrNameLst>
+                                      </p:cBhvr>
+                                      <p:to>
+                                        <p:strVal val="visible"/>
+                                      </p:to>
+                                    </p:set>
+                                    <p:animEffect transition="in" filter="fade">
+                                      <p:cBhvr>
+                                        <p:cTn id="37" dur="400"/>
+                                        <p:tgtEl>
+                                          <p:spTgt spid="3">
+                                            <p:txEl>
+                                              <p:pRg st="7" end="7"/>
+                                            </p:txEl>
+                                          </p:spTgt>
+                                        </p:tgtEl>
+                                      </p:cBhvr>
+                                    </p:animEffect>
+                                  </p:childTnLst>
+                                </p:cTn>
+                              </p:par>
+                              <p:par>
+                                <p:cTn id="38" presetID="10" presetClass="entr" presetSubtype="0" fill="hold" grpId="0" nodeType="withEffect">
+                                  <p:stCondLst>
+                                    <p:cond delay="2000"/>
+                                  </p:stCondLst>
+                                  <p:childTnLst>
+                                    <p:set>
+                                      <p:cBhvr>
+                                        <p:cTn id="39" dur="1" fill="hold">
+                                          <p:stCondLst>
+                                            <p:cond delay="0"/>
+                                          </p:stCondLst>
+                                        </p:cTn>
+                                        <p:tgtEl>
+                                          <p:spTgt spid="3">
+                                            <p:txEl>
+                                              <p:pRg st="8" end="8"/>
+                                            </p:txEl>
+                                          </p:spTgt>
+                                        </p:tgtEl>
+                                        <p:attrNameLst>
+                                          <p:attrName>style.visibility</p:attrName>
+                                        </p:attrNameLst>
+                                      </p:cBhvr>
+                                      <p:to>
+                                        <p:strVal val="visible"/>
+                                      </p:to>
+                                    </p:set>
+                                    <p:animEffect transition="in" filter="fade">
+                                      <p:cBhvr>
+                                        <p:cTn id="40" dur="400"/>
+                                        <p:tgtEl>
+                                          <p:spTgt spid="3">
+                                            <p:txEl>
+                                              <p:pRg st="8" end="8"/>
+                                            </p:txEl>
+                                          </p:spTgt>
+                                        </p:tgtEl>
+                                      </p:cBhvr>
+                                    </p:animEffect>
+                                  </p:childTnLst>
+                                </p:cTn>
+                              </p:par>
+                            </p:childTnLst>
+                          </p:cTn>
+                        </p:par>
+                      </p:childTnLst>
+                    </p:cTn>
+                  </p:par>
+                  <p:par>
+                    <p:cTn id="41" fill="hold">
+                      <p:stCondLst>
+                        <p:cond delay="indefinite"/>
+                      </p:stCondLst>
+                      <p:childTnLst>
+                        <p:par>
+                          <p:cTn id="42" fill="hold">
+                            <p:stCondLst>
+                              <p:cond delay="0"/>
+                            </p:stCondLst>
+                            <p:childTnLst>
+                              <p:par>
+                                <p:cTn id="43" presetID="10" presetClass="entr" presetSubtype="0" fill="hold" grpId="0" nodeType="clickEffect">
+                                  <p:stCondLst>
+                                    <p:cond delay="500"/>
+                                  </p:stCondLst>
+                                  <p:childTnLst>
+                                    <p:set>
+                                      <p:cBhvr>
+                                        <p:cTn id="44" dur="1" fill="hold">
+                                          <p:stCondLst>
+                                            <p:cond delay="0"/>
+                                          </p:stCondLst>
+                                        </p:cTn>
+                                        <p:tgtEl>
+                                          <p:spTgt spid="3">
+                                            <p:txEl>
+                                              <p:pRg st="9" end="9"/>
+                                            </p:txEl>
+                                          </p:spTgt>
+                                        </p:tgtEl>
+                                        <p:attrNameLst>
+                                          <p:attrName>style.visibility</p:attrName>
+                                        </p:attrNameLst>
+                                      </p:cBhvr>
+                                      <p:to>
+                                        <p:strVal val="visible"/>
+                                      </p:to>
+                                    </p:set>
+                                    <p:animEffect transition="in" filter="fade">
+                                      <p:cBhvr>
+                                        <p:cTn id="45" dur="400"/>
+                                        <p:tgtEl>
+                                          <p:spTgt spid="3">
+                                            <p:txEl>
+                                              <p:pRg st="9" end="9"/>
+                                            </p:txEl>
+                                          </p:spTgt>
+                                        </p:tgtEl>
+                                      </p:cBhvr>
+                                    </p:animEffect>
+                                  </p:childTnLst>
+                                </p:cTn>
+                              </p:par>
+                              <p:par>
+                                <p:cTn id="46" presetID="10" presetClass="entr" presetSubtype="0" fill="hold" grpId="0" nodeType="withEffect">
+                                  <p:stCondLst>
+                                    <p:cond delay="2000"/>
+                                  </p:stCondLst>
+                                  <p:childTnLst>
+                                    <p:set>
+                                      <p:cBhvr>
+                                        <p:cTn id="47" dur="1" fill="hold">
+                                          <p:stCondLst>
+                                            <p:cond delay="0"/>
+                                          </p:stCondLst>
+                                        </p:cTn>
+                                        <p:tgtEl>
+                                          <p:spTgt spid="3">
+                                            <p:txEl>
+                                              <p:pRg st="10" end="10"/>
+                                            </p:txEl>
+                                          </p:spTgt>
+                                        </p:tgtEl>
+                                        <p:attrNameLst>
+                                          <p:attrName>style.visibility</p:attrName>
+                                        </p:attrNameLst>
+                                      </p:cBhvr>
+                                      <p:to>
+                                        <p:strVal val="visible"/>
+                                      </p:to>
+                                    </p:set>
+                                    <p:animEffect transition="in" filter="fade">
+                                      <p:cBhvr>
+                                        <p:cTn id="48" dur="400"/>
+                                        <p:tgtEl>
+                                          <p:spTgt spid="3">
+                                            <p:txEl>
+                                              <p:pRg st="10" end="10"/>
+                                            </p:txEl>
+                                          </p:spTgt>
+                                        </p:tgtEl>
+                                      </p:cBhvr>
+                                    </p:animEffect>
+                                  </p:childTnLst>
+                                </p:cTn>
+                              </p:par>
+                            </p:childTnLst>
+                          </p:cTn>
+                        </p:par>
+                      </p:childTnLst>
+                    </p:cTn>
+                  </p:par>
+                </p:childTnLst>
+              </p:cTn>
+              <p:prevCondLst>
+                <p:cond evt="onPrev" delay="0">
+                  <p:tgtEl>
+                    <p:sldTgt/>
+                  </p:tgtEl>
+                </p:cond>
+              </p:prevCondLst>
+              <p:nextCondLst>
+                <p:cond evt="onNext" delay="0">
+                  <p:tgtEl>
+                    <p:sldTgt/>
+                  </p:tgtEl>
+                </p:cond>
+              </p:nextCondLst>
+            </p:seq>
+          </p:childTnLst>
+        </p:cTn>
+      </p:par>
+    </p:tnLst>
+    <p:bldLst>
+      <p:bldP spid="2" grpId="0"/>
+      <p:bldP spid="3" grpId="0" uiExpand="1" build="p"/>
+    </p:bldLst>
+  </p:timing>
 </p:sld>
 </file>
 
